--- a/report/AI电商行业研究报告.pptx
+++ b/report/AI电商行业研究报告.pptx
@@ -3303,7 +3303,7 @@
                 <a:latin typeface="Microsoft YaHei"/>
                 <a:ea typeface="Microsoft YaHei"/>
               </a:rPr>
-              <a:t>v3.1　数据截至：2026年7月</a:t>
+              <a:t>v3.2　数据截至：2026年7月</a:t>
             </a:r>
           </a:p>
           <a:p>
@@ -3519,7 +3519,7 @@
                 <a:latin typeface="Microsoft YaHei"/>
                 <a:ea typeface="Microsoft YaHei"/>
               </a:rPr>
-              <a:t>AI电商行业研究报告｜v3.1｜数据截至2026-07｜第10页</a:t>
+              <a:t>AI电商行业研究报告｜v3.2｜数据截至2026-07｜第10页</a:t>
             </a:r>
           </a:p>
         </p:txBody>
@@ -4056,8 +4056,8 @@
         </p:nvSpPr>
         <p:spPr>
           <a:xfrm>
-            <a:off x="685800" y="5989320"/>
-            <a:ext cx="10881360" cy="457200"/>
+            <a:off x="685800" y="6023610"/>
+            <a:ext cx="10881360" cy="331470"/>
           </a:xfrm>
           <a:prstGeom prst="rect">
             <a:avLst/>
@@ -4265,7 +4265,7 @@
                 <a:latin typeface="Microsoft YaHei"/>
                 <a:ea typeface="Microsoft YaHei"/>
               </a:rPr>
-              <a:t>AI电商行业研究报告｜v3.1｜数据截至2026-07｜第11页</a:t>
+              <a:t>AI电商行业研究报告｜v3.2｜数据截至2026-07｜第11页</a:t>
             </a:r>
           </a:p>
         </p:txBody>
@@ -4286,8 +4286,8 @@
         </p:blipFill>
         <p:spPr>
           <a:xfrm>
-            <a:off x="2184729" y="1207008"/>
-            <a:ext cx="7822236" cy="4343400"/>
+            <a:off x="2098515" y="1207008"/>
+            <a:ext cx="7994664" cy="4343400"/>
           </a:xfrm>
           <a:prstGeom prst="rect">
             <a:avLst/>
@@ -4471,7 +4471,7 @@
                 <a:latin typeface="Microsoft YaHei"/>
                 <a:ea typeface="Microsoft YaHei"/>
               </a:rPr>
-              <a:t>AI电商行业研究报告｜v3.1｜数据截至2026-07｜第12页</a:t>
+              <a:t>AI电商行业研究报告｜v3.2｜数据截至2026-07｜第12页</a:t>
             </a:r>
           </a:p>
         </p:txBody>
@@ -4677,7 +4677,7 @@
                 <a:latin typeface="Microsoft YaHei"/>
                 <a:ea typeface="Microsoft YaHei"/>
               </a:rPr>
-              <a:t>AI电商行业研究报告｜v3.1｜数据截至2026-07｜第13页</a:t>
+              <a:t>AI电商行业研究报告｜v3.2｜数据截至2026-07｜第13页</a:t>
             </a:r>
           </a:p>
         </p:txBody>
@@ -4883,7 +4883,7 @@
                 <a:latin typeface="Microsoft YaHei"/>
                 <a:ea typeface="Microsoft YaHei"/>
               </a:rPr>
-              <a:t>AI电商行业研究报告｜v3.1｜数据截至2026-07｜第14页</a:t>
+              <a:t>AI电商行业研究报告｜v3.2｜数据截至2026-07｜第14页</a:t>
             </a:r>
           </a:p>
         </p:txBody>
@@ -4904,8 +4904,8 @@
         </p:blipFill>
         <p:spPr>
           <a:xfrm>
-            <a:off x="2608601" y="1207008"/>
-            <a:ext cx="6974493" cy="4480560"/>
+            <a:off x="2191916" y="1207008"/>
+            <a:ext cx="7807862" cy="4480560"/>
           </a:xfrm>
           <a:prstGeom prst="rect">
             <a:avLst/>
@@ -5089,7 +5089,7 @@
                 <a:latin typeface="Microsoft YaHei"/>
                 <a:ea typeface="Microsoft YaHei"/>
               </a:rPr>
-              <a:t>AI电商行业研究报告｜v3.1｜数据截至2026-07｜第15页</a:t>
+              <a:t>AI电商行业研究报告｜v3.2｜数据截至2026-07｜第15页</a:t>
             </a:r>
           </a:p>
         </p:txBody>
@@ -5553,7 +5553,7 @@
                           <a:latin typeface="Microsoft YaHei"/>
                           <a:ea typeface="Microsoft YaHei"/>
                         </a:rPr>
-                        <a:t>2.15×</a:t>
+                        <a:t>≈2.15×</a:t>
                       </a:r>
                     </a:p>
                   </a:txBody>
@@ -5670,7 +5670,7 @@
                           <a:latin typeface="Microsoft YaHei"/>
                           <a:ea typeface="Microsoft YaHei"/>
                         </a:rPr>
-                        <a:t>1.20×</a:t>
+                        <a:t>≈1.20×</a:t>
                       </a:r>
                     </a:p>
                   </a:txBody>
@@ -5787,7 +5787,7 @@
                           <a:latin typeface="Microsoft YaHei"/>
                           <a:ea typeface="Microsoft YaHei"/>
                         </a:rPr>
-                        <a:t>1.10×</a:t>
+                        <a:t>≈1.10×</a:t>
                       </a:r>
                     </a:p>
                   </a:txBody>
@@ -5835,7 +5835,7 @@
                           <a:latin typeface="Microsoft YaHei"/>
                           <a:ea typeface="Microsoft YaHei"/>
                         </a:rPr>
-                        <a:t>派生：日均有效商品浏览量</a:t>
+                        <a:t>派生：每轮对话产出（关键）</a:t>
                       </a:r>
                     </a:p>
                   </a:txBody>
@@ -5858,7 +5858,7 @@
                           <a:latin typeface="Microsoft YaHei"/>
                           <a:ea typeface="Microsoft YaHei"/>
                         </a:rPr>
-                        <a:t>55万次/日</a:t>
+                        <a:t>0.085次</a:t>
                       </a:r>
                     </a:p>
                   </a:txBody>
@@ -5881,7 +5881,7 @@
                           <a:latin typeface="Microsoft YaHei"/>
                           <a:ea typeface="Microsoft YaHei"/>
                         </a:rPr>
-                        <a:t>43万次/日</a:t>
+                        <a:t>0.357次</a:t>
                       </a:r>
                     </a:p>
                   </a:txBody>
@@ -5904,7 +5904,7 @@
                           <a:latin typeface="Microsoft YaHei"/>
                           <a:ea typeface="Microsoft YaHei"/>
                         </a:rPr>
-                        <a:t>0.78×</a:t>
+                        <a:t>≈4.22×</a:t>
                       </a:r>
                     </a:p>
                   </a:txBody>
@@ -5927,7 +5927,7 @@
                           <a:latin typeface="Microsoft YaHei"/>
                           <a:ea typeface="Microsoft YaHei"/>
                         </a:rPr>
-                        <a:t>DAU × 人均IPV</a:t>
+                        <a:t>人均IPV ÷ 人均对话轮次；差距落在交互层，是本报告首要指标的依据</a:t>
                       </a:r>
                     </a:p>
                   </a:txBody>
@@ -5952,7 +5952,7 @@
                           <a:latin typeface="Microsoft YaHei"/>
                           <a:ea typeface="Microsoft YaHei"/>
                         </a:rPr>
-                        <a:t>派生：每轮对话产出</a:t>
+                        <a:t>派生：日均有效商品浏览量</a:t>
                       </a:r>
                     </a:p>
                   </a:txBody>
@@ -5975,7 +5975,7 @@
                           <a:latin typeface="Microsoft YaHei"/>
                           <a:ea typeface="Microsoft YaHei"/>
                         </a:rPr>
-                        <a:t>0.085次</a:t>
+                        <a:t>55万次/日</a:t>
                       </a:r>
                     </a:p>
                   </a:txBody>
@@ -5998,7 +5998,7 @@
                           <a:latin typeface="Microsoft YaHei"/>
                           <a:ea typeface="Microsoft YaHei"/>
                         </a:rPr>
-                        <a:t>0.357次</a:t>
+                        <a:t>43万次/日</a:t>
                       </a:r>
                     </a:p>
                   </a:txBody>
@@ -6021,7 +6021,7 @@
                           <a:latin typeface="Microsoft YaHei"/>
                           <a:ea typeface="Microsoft YaHei"/>
                         </a:rPr>
-                        <a:t>4.22×</a:t>
+                        <a:t>≈0.78×</a:t>
                       </a:r>
                     </a:p>
                   </a:txBody>
@@ -6044,7 +6044,7 @@
                           <a:latin typeface="Microsoft YaHei"/>
                           <a:ea typeface="Microsoft YaHei"/>
                         </a:rPr>
-                        <a:t>人均IPV ÷ 人均对话轮次（近似量级）</a:t>
+                        <a:t>DAU × 人均IPV</a:t>
                       </a:r>
                     </a:p>
                   </a:txBody>
@@ -6067,8 +6067,8 @@
         </p:nvSpPr>
         <p:spPr>
           <a:xfrm>
-            <a:off x="685800" y="5989320"/>
-            <a:ext cx="10881360" cy="457200"/>
+            <a:off x="685800" y="5857875"/>
+            <a:ext cx="10881360" cy="497204"/>
           </a:xfrm>
           <a:prstGeom prst="rect">
             <a:avLst/>
@@ -6094,7 +6094,7 @@
                 <a:latin typeface="Microsoft YaHei"/>
                 <a:ea typeface="Microsoft YaHei"/>
               </a:rPr>
-              <a:t>口径校正：原始表述为「7日留存30%／33%」，但单日留存随时间单调不增、不可能高于次日留存，故判定其口径为7日窗口内至少回访一次。可比性限制：①两侧入口曝光机制不同，DAU意图强度不一致；②淘宝站内用户可绕过AI链路直达商品，归因规则可能低估其IPV；③IPV为日度口径、轮次为会话内均值，相除结果为近似量级。</a:t>
+              <a:t>读法：DAU与人均IPV的两组倍数方向相反、量级相近，几近相互抵消，乘积为0.78×（二者不是倒数关系，0.09的倒数为11.11）；真正提供额外信息的是「每轮对话产出」。口径校正：原始表述为「7日留存」，但单日留存单调不增、不可能高于次日留存，故判定为7日回访率。精度提示：千问IPV为整数1.00，倍数一律按「约9倍量级」引用。可比性限制：①两侧入口曝光机制不同，DAU意图强度不一致；②淘宝侧用户可绕过AI链路直达商品，归因规则可能低估其IPV（即便低估2~3倍，深度差距仍为约3~4.5倍）；③IPV为日度、轮次为会话内均值，相除为近似量级。</a:t>
             </a:r>
           </a:p>
         </p:txBody>
@@ -6236,7 +6236,7 @@
                 <a:latin typeface="Microsoft YaHei"/>
                 <a:ea typeface="Microsoft YaHei"/>
               </a:rPr>
-              <a:t>图8  有效商品浏览量情景测算（非预测，止于流量层）</a:t>
+              <a:t>图8  情景测算：淘宝靠深度与规模双轮，千问几乎全靠规模（两面板共用纵轴；非预测）</a:t>
             </a:r>
           </a:p>
         </p:txBody>
@@ -6276,7 +6276,7 @@
                 <a:latin typeface="Microsoft YaHei"/>
                 <a:ea typeface="Microsoft YaHei"/>
               </a:rPr>
-              <a:t>AI电商行业研究报告｜v3.1｜数据截至2026-07｜第16页</a:t>
+              <a:t>AI电商行业研究报告｜v3.2｜数据截至2026-07｜第16页</a:t>
             </a:r>
           </a:p>
         </p:txBody>
@@ -6297,8 +6297,8 @@
         </p:blipFill>
         <p:spPr>
           <a:xfrm>
-            <a:off x="2076248" y="1207008"/>
-            <a:ext cx="8039198" cy="4160520"/>
+            <a:off x="2260696" y="1207008"/>
+            <a:ext cx="7670302" cy="4160520"/>
           </a:xfrm>
           <a:prstGeom prst="rect">
             <a:avLst/>
@@ -6314,7 +6314,7 @@
         <p:spPr>
           <a:xfrm>
             <a:off x="685800" y="5623560"/>
-            <a:ext cx="10881360" cy="457200"/>
+            <a:ext cx="10881360" cy="497204"/>
           </a:xfrm>
           <a:prstGeom prst="rect">
             <a:avLst/>
@@ -6340,7 +6340,7 @@
                 <a:latin typeface="Microsoft YaHei"/>
                 <a:ea typeface="Microsoft YaHei"/>
               </a:rPr>
-              <a:t>测算方法：日均有效商品浏览量＝DAU×人均IPV，两项分别按情景假设的年增长倍数逐期复利推演。锚点：①增速衰减参照Adobe口径AI引荐流量由+1151%收敛至+269%；②高增长档参照Rufus月活同比+149%、交互量同比+210%；③淘宝侧人均IPV上限锚定千问当前实测1.00次，乐观档2028年仅取0.59次。不推演GMV。</a:t>
+              <a:t>测算方法：日均有效商品浏览量＝DAU×人均IPV，两项按情景假设的年增长倍数逐期复利推演；两面板共用纵轴，柱上标出DAU与IPV两条分项路径。锚点与弱点：①增速收敛系数为设定值（推导限制见图1）；②高增长档借Rufus月活+149%／交互量+210%的量级，属跨口径借用，且两侧乐观档取值不同（×2.00对×3.00）系编制方判断；③深度上限分两侧设定——淘宝侧以千问1.00次为追赶上限（乐观档仅达0.59次），千问侧因已处已实证最高水平设为两年累计不超20%。两层限制：区间跨度5.9倍全部来自流量层假设，衡量的是流量层自身的不确定性；GMV层敞口未纳入，真实不确定性会更大。</a:t>
             </a:r>
           </a:p>
         </p:txBody>
@@ -6482,7 +6482,7 @@
                 <a:latin typeface="Microsoft YaHei"/>
                 <a:ea typeface="Microsoft YaHei"/>
               </a:rPr>
-              <a:t>六点分析</a:t>
+              <a:t>七点分析</a:t>
             </a:r>
           </a:p>
         </p:txBody>
@@ -6522,7 +6522,7 @@
                 <a:latin typeface="Microsoft YaHei"/>
                 <a:ea typeface="Microsoft YaHei"/>
               </a:rPr>
-              <a:t>AI电商行业研究报告｜v3.1｜数据截至2026-07｜第17页</a:t>
+              <a:t>AI电商行业研究报告｜v3.2｜数据截至2026-07｜第17页</a:t>
             </a:r>
           </a:p>
         </p:txBody>
@@ -6568,7 +6568,7 @@
           <a:p>
             <a:pPr algn="l">
               <a:spcAft>
-                <a:spcPts val="2647"/>
+                <a:spcPts val="1432"/>
               </a:spcAft>
             </a:pPr>
             <a:r>
@@ -6602,7 +6602,7 @@
           <a:p>
             <a:pPr algn="l">
               <a:spcAft>
-                <a:spcPts val="2647"/>
+                <a:spcPts val="1432"/>
               </a:spcAft>
             </a:pPr>
             <a:r>
@@ -6613,7 +6613,7 @@
                 <a:latin typeface="Microsoft YaHei"/>
                 <a:ea typeface="Microsoft YaHei"/>
               </a:rPr>
-              <a:t>　　Instant Checkout约5个月、峰值约12至30家商家收场；替代方案与UCP协议设计均把Merchant of Record留给商家——本报告置信度最高的判断</a:t>
+              <a:t>　　Instant Checkout约5个月、峰值约12至30家商家收场；替代方案与UCP协议设计均把Merchant of Record留给商家。五条异质证据（产品决策／协议设计／司法判定）同向</a:t>
             </a:r>
           </a:p>
           <a:p>
@@ -6630,13 +6630,13 @@
                 <a:latin typeface="Microsoft YaHei"/>
                 <a:ea typeface="Microsoft YaHei"/>
               </a:rPr>
-              <a:t>● 站内AI导购的瓶颈是决策深度，不是流量</a:t>
-            </a:r>
-          </a:p>
-          <a:p>
-            <a:pPr algn="l">
-              <a:spcAft>
-                <a:spcPts val="2647"/>
+              <a:t>● 站内AI导购方向的公开效果证据只有一个数据点</a:t>
+            </a:r>
+          </a:p>
+          <a:p>
+            <a:pPr algn="l">
+              <a:spcAft>
+                <a:spcPts val="1432"/>
               </a:spcAft>
             </a:pPr>
             <a:r>
@@ -6647,7 +6647,7 @@
                 <a:latin typeface="Microsoft YaHei"/>
                 <a:ea typeface="Microsoft YaHei"/>
               </a:rPr>
-              <a:t>　　淘宝侧以11.63倍DAU仅换来1.28倍有效商品浏览量；入口曝光可快速做大DAU，但不能自动带来商品决策行为</a:t>
+              <a:t>　　全球可追溯的站内导购效果数据仅有Rufus「+60%完成率」（图9面板①只有一根柱）。Salesforce企业分组与Adobe／Shopify渠道数据分属另两种对照构造，不能替代</a:t>
             </a:r>
           </a:p>
           <a:p>
@@ -6664,13 +6664,13 @@
                 <a:latin typeface="Microsoft YaHei"/>
                 <a:ea typeface="Microsoft YaHei"/>
               </a:rPr>
-              <a:t>● 深度差距远大于留存差距，两个竞争性解释需用分层实验区分</a:t>
-            </a:r>
-          </a:p>
-          <a:p>
-            <a:pPr algn="l">
-              <a:spcAft>
-                <a:spcPts val="2647"/>
+              <a:t>● 差距落在交互层而非用户层，两个竞争性解释需用分层实验区分</a:t>
+            </a:r>
+          </a:p>
+          <a:p>
+            <a:pPr algn="l">
+              <a:spcAft>
+                <a:spcPts val="1432"/>
               </a:spcAft>
             </a:pPr>
             <a:r>
@@ -6681,7 +6681,7 @@
                 <a:latin typeface="Microsoft YaHei"/>
                 <a:ea typeface="Microsoft YaHei"/>
               </a:rPr>
-              <a:t>　　留存差1.10至1.20倍，人均IPV约9倍、每轮对话产出差4.22倍。解释A产品形态（淘宝侧人均1.3轮，与「单轮问答后结束」形态一致）；解释B意图构成（淘宝侧DAU含入口曝光触发的低意图使用）。报告倾向A为主因（依据是每轮产出属交互层指标），证伪条件见下页</a:t>
+              <a:t>　　留存差1.10至1.20倍，而每轮对话产出差4.22倍（0.085对0.357次）。解释A产品形态（淘宝侧1.3轮、每轮0.085次，与「单轮问答后结束」形态一致）；解释B意图构成（淘宝侧DAU含入口曝光触发的低意图使用）。报告倾向A为主因——差距集中在交互层指标而非用户层指标；证伪条件见下页</a:t>
             </a:r>
           </a:p>
           <a:p>
@@ -6698,13 +6698,13 @@
                 <a:latin typeface="Microsoft YaHei"/>
                 <a:ea typeface="Microsoft YaHei"/>
               </a:rPr>
-              <a:t>● 规模天花板的敞口在转化率与客单价，不在流量</a:t>
-            </a:r>
-          </a:p>
-          <a:p>
-            <a:pPr algn="l">
-              <a:spcAft>
-                <a:spcPts val="2647"/>
+              <a:t>● 两条提升路径的成本结构不同，这在成本约束下直接决定优先级</a:t>
+            </a:r>
+          </a:p>
+          <a:p>
+            <a:pPr algn="l">
+              <a:spcAft>
+                <a:spcPts val="1432"/>
               </a:spcAft>
             </a:pPr>
             <a:r>
@@ -6715,7 +6715,7 @@
                 <a:latin typeface="Microsoft YaHei"/>
                 <a:ea typeface="Microsoft YaHei"/>
               </a:rPr>
-              <a:t>　　2028年中淘宝侧区间160万至950万次／日（中性380万），千问侧87万至340万次／日（中性166万）；两侧驱动结构不同——淘宝靠DAU与深度双轮，千问几乎全靠DAU</a:t>
+              <a:t>　　路径A提高每轮产出：轮次仍1.3轮、推理成本近似不变、人均IPV达0.46次；路径B增加轮次：轮次至2.8轮、推理成本约为原2.15倍、人均IPV仅0.24次。A的指标增益为B的约2.8倍，按单位推理成本计效率约6倍。绝对成本水平需业务方补token单价，本报告不做估计</a:t>
             </a:r>
           </a:p>
           <a:p>
@@ -6732,13 +6732,13 @@
                 <a:latin typeface="Microsoft YaHei"/>
                 <a:ea typeface="Microsoft YaHei"/>
               </a:rPr>
-              <a:t>● 所有可得的公开效果数据都是观察性的</a:t>
-            </a:r>
-          </a:p>
-          <a:p>
-            <a:pPr algn="l">
-              <a:spcAft>
-                <a:spcPts val="2647"/>
+              <a:t>● 所有可得的公开效果数据都是观察性的，且分属三种对照构造</a:t>
+            </a:r>
+          </a:p>
+          <a:p>
+            <a:pPr algn="l">
+              <a:spcAft>
+                <a:spcPts val="1432"/>
               </a:spcAft>
             </a:pPr>
             <a:r>
@@ -6749,7 +6749,41 @@
                 <a:latin typeface="Microsoft YaHei"/>
                 <a:ea typeface="Microsoft YaHei"/>
               </a:rPr>
-              <a:t>　　Rufus「+60%完成率」、Salesforce「6.2%对3.9%」、Adobe渠道对比均属此类；可确认方向，不能测算收益</a:t>
+              <a:t>　　使用者对未使用者（Rufus）、AI渠道对非AI渠道（Adobe／Shopify）、企业分组（Salesforce）——图9按此分面板。可确认方向，不能测算收益</a:t>
+            </a:r>
+          </a:p>
+          <a:p>
+            <a:pPr algn="l">
+              <a:spcAft>
+                <a:spcPts val="200"/>
+              </a:spcAft>
+            </a:pPr>
+            <a:r>
+              <a:rPr sz="1200" b="1">
+                <a:solidFill>
+                  <a:srgbClr val="1F2937"/>
+                </a:solidFill>
+                <a:latin typeface="Microsoft YaHei"/>
+                <a:ea typeface="Microsoft YaHei"/>
+              </a:rPr>
+              <a:t>● 规模判断有两层不确定性，且都未被压缩</a:t>
+            </a:r>
+          </a:p>
+          <a:p>
+            <a:pPr algn="l">
+              <a:spcAft>
+                <a:spcPts val="1432"/>
+              </a:spcAft>
+            </a:pPr>
+            <a:r>
+              <a:rPr sz="1050" b="0">
+                <a:solidFill>
+                  <a:srgbClr val="6B7280"/>
+                </a:solidFill>
+                <a:latin typeface="Microsoft YaHei"/>
+                <a:ea typeface="Microsoft YaHei"/>
+              </a:rPr>
+              <a:t>　　第一层在流量本身：2028年中淘宝侧区间160万至950万次／日（跨度5.9倍），全部来自DAU与IPV两个假设；第二层在流量之后：转化率与客单价无实测值、未纳入测算，因此真实GMV不确定性会大于5.9倍。压缩顺序应是先测转化率与客单价</a:t>
             </a:r>
           </a:p>
         </p:txBody>
@@ -6931,7 +6965,7 @@
                 <a:latin typeface="Microsoft YaHei"/>
                 <a:ea typeface="Microsoft YaHei"/>
               </a:rPr>
-              <a:t>AI电商行业研究报告｜v3.1｜数据截至2026-07｜第18页</a:t>
+              <a:t>AI电商行业研究报告｜v3.2｜数据截至2026-07｜第18页</a:t>
             </a:r>
           </a:p>
         </p:txBody>
@@ -6971,13 +7005,13 @@
                 <a:latin typeface="Microsoft YaHei"/>
                 <a:ea typeface="Microsoft YaHei"/>
               </a:rPr>
-              <a:t>● 敏感度对比：提升深度的边际收益约为扩大曝光的4.5倍</a:t>
-            </a:r>
-          </a:p>
-          <a:p>
-            <a:pPr algn="l">
-              <a:spcAft>
-                <a:spcPts val="3425"/>
+              <a:t>● 可达空间对比（注意：不是边际弹性对比）</a:t>
+            </a:r>
+          </a:p>
+          <a:p>
+            <a:pPr algn="l">
+              <a:spcAft>
+                <a:spcPts val="2905"/>
               </a:spcAft>
             </a:pPr>
             <a:r>
@@ -6988,7 +7022,7 @@
                 <a:latin typeface="Microsoft YaHei"/>
                 <a:ea typeface="Microsoft YaHei"/>
               </a:rPr>
-              <a:t>　　DAU保持500万不变、人均IPV由0.11提至1.00 → 有效浏览量55万增至500万次／日（约9倍）；而人均IPV不变、DAU翻倍至1000万 → 仅110万次（2倍）</a:t>
+              <a:t>　　DAU保持500万不变、人均IPV由0.11提至1.00 → 有效浏览量55万增至500万次／日；而人均IPV不变、DAU翻倍至1000万 → 仅110万次。前提说明：浏览量＝DAU×IPV是乘积式，两因子边际弹性恒等；上述落差来自「可达空间」不同——IPV有千问已实证的1.00次上限可追赶，而DAU曝光位已接近饱和</a:t>
             </a:r>
           </a:p>
           <a:p>
@@ -7011,7 +7045,7 @@
           <a:p>
             <a:pPr algn="l">
               <a:spcAft>
-                <a:spcPts val="3425"/>
+                <a:spcPts val="2905"/>
               </a:spcAft>
             </a:pPr>
             <a:r>
@@ -7039,13 +7073,13 @@
                 <a:latin typeface="Microsoft YaHei"/>
                 <a:ea typeface="Microsoft YaHei"/>
               </a:rPr>
-              <a:t>● 阶段目标（与情景测算对齐）</a:t>
-            </a:r>
-          </a:p>
-          <a:p>
-            <a:pPr algn="l">
-              <a:spcAft>
-                <a:spcPts val="3425"/>
+              <a:t>● 阶段目标（两种DAU基准并列，避免执行时口径混淆）</a:t>
+            </a:r>
+          </a:p>
+          <a:p>
+            <a:pPr algn="l">
+              <a:spcAft>
+                <a:spcPts val="2905"/>
               </a:spcAft>
             </a:pPr>
             <a:r>
@@ -7056,7 +7090,7 @@
                 <a:latin typeface="Microsoft YaHei"/>
                 <a:ea typeface="Microsoft YaHei"/>
               </a:rPr>
-              <a:t>　　12个月 0.22次（176万次／日，对齐中性档2027年中）；24个月 0.35次（380万次／日，对齐中性档2028年中）；1.00次为长期追赶参照而非期限目标——乐观档2028年中也只达0.594次</a:t>
+              <a:t>　　12个月 IPV 0.22次 → DAU不变110万次／日，DAU按中性档800万则176万次／日；24个月 IPV 0.35次 → DAU不变175万次／日，DAU按中性档1080万则380万次／日；1.00次为长期追赶参照而非期限目标（乐观档2028年中也只达0.59次）。考核以人均IPV为准，浏览量为观察指标</a:t>
             </a:r>
           </a:p>
           <a:p>
@@ -7073,13 +7107,13 @@
                 <a:latin typeface="Microsoft YaHei"/>
                 <a:ea typeface="Microsoft YaHei"/>
               </a:rPr>
-              <a:t>● 落地动作</a:t>
-            </a:r>
-          </a:p>
-          <a:p>
-            <a:pPr algn="l">
-              <a:spcAft>
-                <a:spcPts val="3425"/>
+              <a:t>● 落地动作与过程验收指标（用于区分「形态假说错」与「改造没做到」）</a:t>
+            </a:r>
+          </a:p>
+          <a:p>
+            <a:pPr algn="l">
+              <a:spcAft>
+                <a:spcPts val="2905"/>
               </a:spcAft>
             </a:pPr>
             <a:r>
@@ -7090,7 +7124,7 @@
                 <a:latin typeface="Microsoft YaHei"/>
                 <a:ea typeface="Microsoft YaHei"/>
               </a:rPr>
-              <a:t>　　答案页内直接给出可加购的商品对象；为每轮对话设计明确的下一步动作；把「收窄选项」而非「提供信息」作为对话目标</a:t>
+              <a:t>　　答案页内直接给出可加购商品对象 → 带可加购对象的回答占比≥80%；为每轮对话设计明确下一步动作 → 给出下一步动作的回答占比≥80%；把「收窄选项」作为对话目标 → 会话中至少曝光1个商品卡的比例≥90%。过程指标未达门槛时，实验结果不得用于证伪判断</a:t>
             </a:r>
           </a:p>
           <a:p>
@@ -7107,13 +7141,13 @@
                 <a:latin typeface="Microsoft YaHei"/>
                 <a:ea typeface="Microsoft YaHei"/>
               </a:rPr>
-              <a:t>● 证伪条件（用于区分产品形态与意图构成两个解释）</a:t>
-            </a:r>
-          </a:p>
-          <a:p>
-            <a:pPr algn="l">
-              <a:spcAft>
-                <a:spcPts val="3425"/>
+              <a:t>● 证伪条件（采用等价检验形式，而非「未检出显著提升」）</a:t>
+            </a:r>
+          </a:p>
+          <a:p>
+            <a:pPr algn="l">
+              <a:spcAft>
+                <a:spcPts val="2905"/>
               </a:spcAft>
             </a:pPr>
             <a:r>
@@ -7124,7 +7158,7 @@
                 <a:latin typeface="Microsoft YaHei"/>
                 <a:ea typeface="Microsoft YaHei"/>
               </a:rPr>
-              <a:t>　　①完成上述改造后若随机对照实验测得人均IPV相对对照组提升不足30%（0.11→0.143以下），则「瓶颈在产品形态」不成立；②此时按入口来源对DAU分层（主动搜索触发 vs 入口曝光触发）分别计算人均IPV，若主动触发层已接近千问水平，则差距主要来自意图构成，改造重点应转为入口位置与触发时机</a:t>
+              <a:t>　　①过程指标达标前提下，若人均IPV相对提升的「95%置信区间上界低于+30%」，则「瓶颈在产品形态」不成立——以不拒绝原假设作结论在统计上不成立，故须用等价／非劣性检验；②此时按入口来源对DAU分层（主动搜索触发 vs 入口曝光触发）分别计算人均IPV，若主动触发层已接近千问水平，则差距主要来自意图构成，改造重点转为入口位置与触发时机</a:t>
             </a:r>
           </a:p>
         </p:txBody>
@@ -7306,7 +7340,7 @@
                 <a:latin typeface="Microsoft YaHei"/>
                 <a:ea typeface="Microsoft YaHei"/>
               </a:rPr>
-              <a:t>AI电商行业研究报告｜v3.1｜数据截至2026-07｜第19页</a:t>
+              <a:t>AI电商行业研究报告｜v3.2｜数据截至2026-07｜第19页</a:t>
             </a:r>
           </a:p>
         </p:txBody>
@@ -7321,7 +7355,7 @@
         </p:nvGraphicFramePr>
         <p:xfrm>
           <a:off x="640080" y="1280160"/>
-          <a:ext cx="10972800" cy="3785616"/>
+          <a:ext cx="10972800" cy="4480560"/>
         </p:xfrm>
         <a:graphic>
           <a:graphicData uri="http://schemas.openxmlformats.org/drawingml/2006/table">
@@ -7334,7 +7368,7 @@
                 <a:gridCol w="4206240"/>
                 <a:gridCol w="4663440"/>
               </a:tblGrid>
-              <a:tr h="420624">
+              <a:tr h="407323">
                 <a:tc>
                   <a:txBody>
                     <a:bodyPr/>
@@ -7405,7 +7439,7 @@
                   </a:tcPr>
                 </a:tc>
               </a:tr>
-              <a:tr h="420624">
+              <a:tr h="407323">
                 <a:tc>
                   <a:txBody>
                     <a:bodyPr wrap="square"/>
@@ -7419,7 +7453,7 @@
                           <a:latin typeface="Microsoft YaHei"/>
                           <a:ea typeface="Microsoft YaHei"/>
                         </a:rPr>
-                        <a:t>主指标</a:t>
+                        <a:t>主指标1（二值）</a:t>
                       </a:r>
                     </a:p>
                   </a:txBody>
@@ -7442,7 +7476,7 @@
                           <a:latin typeface="Microsoft YaHei"/>
                           <a:ea typeface="Microsoft YaHei"/>
                         </a:rPr>
-                        <a:t>会话内进入商品详情页的用户占比</a:t>
+                        <a:t>会话内进入商品详情页的用户占比，基线约10%</a:t>
                       </a:r>
                     </a:p>
                   </a:txBody>
@@ -7465,7 +7499,7 @@
                           <a:latin typeface="Microsoft YaHei"/>
                           <a:ea typeface="Microsoft YaHei"/>
                         </a:rPr>
-                        <a:t>以人均IPV 0.11次／人·日近似，基线率取约10%</a:t>
+                        <a:t>以人均IPV 0.11次／人·日近似推得</a:t>
                       </a:r>
                     </a:p>
                   </a:txBody>
@@ -7476,7 +7510,7 @@
                   </a:tcPr>
                 </a:tc>
               </a:tr>
-              <a:tr h="420624">
+              <a:tr h="407323">
                 <a:tc>
                   <a:txBody>
                     <a:bodyPr wrap="square"/>
@@ -7490,7 +7524,7 @@
                           <a:latin typeface="Microsoft YaHei"/>
                           <a:ea typeface="Microsoft YaHei"/>
                         </a:rPr>
-                        <a:t>最小可检测效应</a:t>
+                        <a:t>主指标1的MDE与检验</a:t>
                       </a:r>
                     </a:p>
                   </a:txBody>
@@ -7513,7 +7547,7 @@
                           <a:latin typeface="Microsoft YaHei"/>
                           <a:ea typeface="Microsoft YaHei"/>
                         </a:rPr>
-                        <a:t>相对提升20%（10%→12%）</a:t>
+                        <a:t>相对提升20%（10%→12%）；α＝0.05双侧，检验力80%</a:t>
                       </a:r>
                     </a:p>
                   </a:txBody>
@@ -7547,7 +7581,7 @@
                   </a:tcPr>
                 </a:tc>
               </a:tr>
-              <a:tr h="420624">
+              <a:tr h="407323">
                 <a:tc>
                   <a:txBody>
                     <a:bodyPr wrap="square"/>
@@ -7561,7 +7595,7 @@
                           <a:latin typeface="Microsoft YaHei"/>
                           <a:ea typeface="Microsoft YaHei"/>
                         </a:rPr>
-                        <a:t>检验水平与检验力</a:t>
+                        <a:t>主指标1每组样本量</a:t>
                       </a:r>
                     </a:p>
                   </a:txBody>
@@ -7584,7 +7618,7 @@
                           <a:latin typeface="Microsoft YaHei"/>
                           <a:ea typeface="Microsoft YaHei"/>
                         </a:rPr>
-                        <a:t>α＝0.05（双侧），检验力80%</a:t>
+                        <a:t>约3840人</a:t>
                       </a:r>
                     </a:p>
                   </a:txBody>
@@ -7600,6 +7634,31 @@
                     <a:lstStyle/>
                     <a:p>
                       <a:r>
+                        <a:rPr sz="900" b="0">
+                          <a:solidFill>
+                            <a:srgbClr val="1F2937"/>
+                          </a:solidFill>
+                          <a:latin typeface="Microsoft YaHei"/>
+                          <a:ea typeface="Microsoft YaHei"/>
+                        </a:rPr>
+                        <a:t>n ≈ 2(z₀.₉₇₅+z₀.₈)²·p̄(1−p̄)/δ² ＝ 2×7.85×0.11×0.89÷0.02²</a:t>
+                      </a:r>
+                    </a:p>
+                  </a:txBody>
+                  <a:tcPr marT="25400" marB="25400">
+                    <a:solidFill>
+                      <a:srgbClr val="F1F5F9"/>
+                    </a:solidFill>
+                  </a:tcPr>
+                </a:tc>
+              </a:tr>
+              <a:tr h="407323">
+                <a:tc>
+                  <a:txBody>
+                    <a:bodyPr wrap="square"/>
+                    <a:lstStyle/>
+                    <a:p>
+                      <a:r>
                         <a:rPr sz="1000" b="0">
                           <a:solidFill>
                             <a:srgbClr val="1F2937"/>
@@ -7607,7 +7666,78 @@
                           <a:latin typeface="Microsoft YaHei"/>
                           <a:ea typeface="Microsoft YaHei"/>
                         </a:rPr>
-                        <a:t>—</a:t>
+                        <a:t>主指标2（计数）</a:t>
+                      </a:r>
+                    </a:p>
+                  </a:txBody>
+                  <a:tcPr marT="25400" marB="25400">
+                    <a:solidFill>
+                      <a:srgbClr val="FFFFFF"/>
+                    </a:solidFill>
+                  </a:tcPr>
+                </a:tc>
+                <a:tc>
+                  <a:txBody>
+                    <a:bodyPr wrap="square"/>
+                    <a:lstStyle/>
+                    <a:p>
+                      <a:r>
+                        <a:rPr sz="1000" b="0">
+                          <a:solidFill>
+                            <a:srgbClr val="1F2937"/>
+                          </a:solidFill>
+                          <a:latin typeface="Microsoft YaHei"/>
+                          <a:ea typeface="Microsoft YaHei"/>
+                        </a:rPr>
+                        <a:t>人均IPV，用于证伪判据</a:t>
+                      </a:r>
+                    </a:p>
+                  </a:txBody>
+                  <a:tcPr marT="25400" marB="25400">
+                    <a:solidFill>
+                      <a:srgbClr val="FFFFFF"/>
+                    </a:solidFill>
+                  </a:tcPr>
+                </a:tc>
+                <a:tc>
+                  <a:txBody>
+                    <a:bodyPr wrap="square"/>
+                    <a:lstStyle/>
+                    <a:p>
+                      <a:r>
+                        <a:rPr sz="1000" b="0">
+                          <a:solidFill>
+                            <a:srgbClr val="1F2937"/>
+                          </a:solidFill>
+                          <a:latin typeface="Microsoft YaHei"/>
+                          <a:ea typeface="Microsoft YaHei"/>
+                        </a:rPr>
+                        <a:t>计数型指标须按过散布（负二项）模型另算样本量</a:t>
+                      </a:r>
+                    </a:p>
+                  </a:txBody>
+                  <a:tcPr marT="25400" marB="25400">
+                    <a:solidFill>
+                      <a:srgbClr val="FFFFFF"/>
+                    </a:solidFill>
+                  </a:tcPr>
+                </a:tc>
+              </a:tr>
+              <a:tr h="407323">
+                <a:tc>
+                  <a:txBody>
+                    <a:bodyPr wrap="square"/>
+                    <a:lstStyle/>
+                    <a:p>
+                      <a:r>
+                        <a:rPr sz="1000" b="0">
+                          <a:solidFill>
+                            <a:srgbClr val="1F2937"/>
+                          </a:solidFill>
+                          <a:latin typeface="Microsoft YaHei"/>
+                          <a:ea typeface="Microsoft YaHei"/>
+                        </a:rPr>
+                        <a:t>主指标2的待补输入</a:t>
                       </a:r>
                     </a:p>
                   </a:txBody>
@@ -7617,8 +7747,54 @@
                     </a:solidFill>
                   </a:tcPr>
                 </a:tc>
+                <a:tc>
+                  <a:txBody>
+                    <a:bodyPr wrap="square"/>
+                    <a:lstStyle/>
+                    <a:p>
+                      <a:r>
+                        <a:rPr sz="1000" b="0">
+                          <a:solidFill>
+                            <a:srgbClr val="1F2937"/>
+                          </a:solidFill>
+                          <a:latin typeface="Microsoft YaHei"/>
+                          <a:ea typeface="Microsoft YaHei"/>
+                        </a:rPr>
+                        <a:t>过散布参数k</a:t>
+                      </a:r>
+                    </a:p>
+                  </a:txBody>
+                  <a:tcPr marT="25400" marB="25400">
+                    <a:solidFill>
+                      <a:srgbClr val="F1F5F9"/>
+                    </a:solidFill>
+                  </a:tcPr>
+                </a:tc>
+                <a:tc>
+                  <a:txBody>
+                    <a:bodyPr wrap="square"/>
+                    <a:lstStyle/>
+                    <a:p>
+                      <a:r>
+                        <a:rPr sz="1000" b="0">
+                          <a:solidFill>
+                            <a:srgbClr val="1F2937"/>
+                          </a:solidFill>
+                          <a:latin typeface="Microsoft YaHei"/>
+                          <a:ea typeface="Microsoft YaHei"/>
+                        </a:rPr>
+                        <a:t>k未知前无法给出样本量；建议先用两周历史分流数据估计k。这是当前实验设计唯一尚缺的输入</a:t>
+                      </a:r>
+                    </a:p>
+                  </a:txBody>
+                  <a:tcPr marT="25400" marB="25400">
+                    <a:solidFill>
+                      <a:srgbClr val="F1F5F9"/>
+                    </a:solidFill>
+                  </a:tcPr>
+                </a:tc>
               </a:tr>
-              <a:tr h="420624">
+              <a:tr h="407323">
                 <a:tc>
                   <a:txBody>
                     <a:bodyPr wrap="square"/>
@@ -7632,7 +7808,7 @@
                           <a:latin typeface="Microsoft YaHei"/>
                           <a:ea typeface="Microsoft YaHei"/>
                         </a:rPr>
-                        <a:t>每组样本量</a:t>
+                        <a:t>分流与积累时长</a:t>
                       </a:r>
                     </a:p>
                   </a:txBody>
@@ -7655,7 +7831,7 @@
                           <a:latin typeface="Microsoft YaHei"/>
                           <a:ea typeface="Microsoft YaHei"/>
                         </a:rPr>
-                        <a:t>约3840人</a:t>
+                        <a:t>1%分流（每组约2.5万人／日）</a:t>
                       </a:r>
                     </a:p>
                   </a:txBody>
@@ -7671,6 +7847,267 @@
                     <a:lstStyle/>
                     <a:p>
                       <a:r>
+                        <a:rPr sz="1000" b="0">
+                          <a:solidFill>
+                            <a:srgbClr val="1F2937"/>
+                          </a:solidFill>
+                          <a:latin typeface="Microsoft YaHei"/>
+                          <a:ea typeface="Microsoft YaHei"/>
+                        </a:rPr>
+                        <a:t>主指标1不足一日即达样本量</a:t>
+                      </a:r>
+                    </a:p>
+                  </a:txBody>
+                  <a:tcPr marT="25400" marB="25400">
+                    <a:solidFill>
+                      <a:srgbClr val="FFFFFF"/>
+                    </a:solidFill>
+                  </a:tcPr>
+                </a:tc>
+              </a:tr>
+              <a:tr h="407323">
+                <a:tc>
+                  <a:txBody>
+                    <a:bodyPr wrap="square"/>
+                    <a:lstStyle/>
+                    <a:p>
+                      <a:r>
+                        <a:rPr sz="1000" b="0">
+                          <a:solidFill>
+                            <a:srgbClr val="1F2937"/>
+                          </a:solidFill>
+                          <a:latin typeface="Microsoft YaHei"/>
+                          <a:ea typeface="Microsoft YaHei"/>
+                        </a:rPr>
+                        <a:t>观测窗口</a:t>
+                      </a:r>
+                    </a:p>
+                  </a:txBody>
+                  <a:tcPr marT="25400" marB="25400">
+                    <a:solidFill>
+                      <a:srgbClr val="F1F5F9"/>
+                    </a:solidFill>
+                  </a:tcPr>
+                </a:tc>
+                <a:tc>
+                  <a:txBody>
+                    <a:bodyPr wrap="square"/>
+                    <a:lstStyle/>
+                    <a:p>
+                      <a:r>
+                        <a:rPr sz="1000" b="0">
+                          <a:solidFill>
+                            <a:srgbClr val="1F2937"/>
+                          </a:solidFill>
+                          <a:latin typeface="Microsoft YaHei"/>
+                          <a:ea typeface="Microsoft YaHei"/>
+                        </a:rPr>
+                        <a:t>≥14日</a:t>
+                      </a:r>
+                    </a:p>
+                  </a:txBody>
+                  <a:tcPr marT="25400" marB="25400">
+                    <a:solidFill>
+                      <a:srgbClr val="F1F5F9"/>
+                    </a:solidFill>
+                  </a:tcPr>
+                </a:tc>
+                <a:tc>
+                  <a:txBody>
+                    <a:bodyPr wrap="square"/>
+                    <a:lstStyle/>
+                    <a:p>
+                      <a:r>
+                        <a:rPr sz="1000" b="0">
+                          <a:solidFill>
+                            <a:srgbClr val="1F2937"/>
+                          </a:solidFill>
+                          <a:latin typeface="Microsoft YaHei"/>
+                          <a:ea typeface="Microsoft YaHei"/>
+                        </a:rPr>
+                        <a:t>次级指标（7日回访率）需覆盖至少一个完整回访周期——这才是真正的约束</a:t>
+                      </a:r>
+                    </a:p>
+                  </a:txBody>
+                  <a:tcPr marT="25400" marB="25400">
+                    <a:solidFill>
+                      <a:srgbClr val="F1F5F9"/>
+                    </a:solidFill>
+                  </a:tcPr>
+                </a:tc>
+              </a:tr>
+              <a:tr h="407323">
+                <a:tc>
+                  <a:txBody>
+                    <a:bodyPr wrap="square"/>
+                    <a:lstStyle/>
+                    <a:p>
+                      <a:r>
+                        <a:rPr sz="1000" b="0">
+                          <a:solidFill>
+                            <a:srgbClr val="1F2937"/>
+                          </a:solidFill>
+                          <a:latin typeface="Microsoft YaHei"/>
+                          <a:ea typeface="Microsoft YaHei"/>
+                        </a:rPr>
+                        <a:t>护栏指标</a:t>
+                      </a:r>
+                    </a:p>
+                  </a:txBody>
+                  <a:tcPr marT="25400" marB="25400">
+                    <a:solidFill>
+                      <a:srgbClr val="FFFFFF"/>
+                    </a:solidFill>
+                  </a:tcPr>
+                </a:tc>
+                <a:tc>
+                  <a:txBody>
+                    <a:bodyPr wrap="square"/>
+                    <a:lstStyle/>
+                    <a:p>
+                      <a:r>
+                        <a:rPr sz="1000" b="0">
+                          <a:solidFill>
+                            <a:srgbClr val="1F2937"/>
+                          </a:solidFill>
+                          <a:latin typeface="Microsoft YaHei"/>
+                          <a:ea typeface="Microsoft YaHei"/>
+                        </a:rPr>
+                        <a:t>客诉率相对提升的95%CI上界 ≤ +10%</a:t>
+                      </a:r>
+                    </a:p>
+                  </a:txBody>
+                  <a:tcPr marT="25400" marB="25400">
+                    <a:solidFill>
+                      <a:srgbClr val="FFFFFF"/>
+                    </a:solidFill>
+                  </a:tcPr>
+                </a:tc>
+                <a:tc>
+                  <a:txBody>
+                    <a:bodyPr wrap="square"/>
+                    <a:lstStyle/>
+                    <a:p>
+                      <a:r>
+                        <a:rPr sz="1000" b="0">
+                          <a:solidFill>
+                            <a:srgbClr val="1F2937"/>
+                          </a:solidFill>
+                          <a:latin typeface="Microsoft YaHei"/>
+                          <a:ea typeface="Microsoft YaHei"/>
+                        </a:rPr>
+                        <a:t>采用非劣性边界；「高于基线即不放量」在随机波动下等价于「大概率不放量」</a:t>
+                      </a:r>
+                    </a:p>
+                  </a:txBody>
+                  <a:tcPr marT="25400" marB="25400">
+                    <a:solidFill>
+                      <a:srgbClr val="FFFFFF"/>
+                    </a:solidFill>
+                  </a:tcPr>
+                </a:tc>
+              </a:tr>
+              <a:tr h="407323">
+                <a:tc>
+                  <a:txBody>
+                    <a:bodyPr wrap="square"/>
+                    <a:lstStyle/>
+                    <a:p>
+                      <a:r>
+                        <a:rPr sz="1000" b="0">
+                          <a:solidFill>
+                            <a:srgbClr val="1F2937"/>
+                          </a:solidFill>
+                          <a:latin typeface="Microsoft YaHei"/>
+                          <a:ea typeface="Microsoft YaHei"/>
+                        </a:rPr>
+                        <a:t>次级指标</a:t>
+                      </a:r>
+                    </a:p>
+                  </a:txBody>
+                  <a:tcPr marT="25400" marB="25400">
+                    <a:solidFill>
+                      <a:srgbClr val="F1F5F9"/>
+                    </a:solidFill>
+                  </a:tcPr>
+                </a:tc>
+                <a:tc>
+                  <a:txBody>
+                    <a:bodyPr wrap="square"/>
+                    <a:lstStyle/>
+                    <a:p>
+                      <a:r>
+                        <a:rPr sz="1000" b="0">
+                          <a:solidFill>
+                            <a:srgbClr val="1F2937"/>
+                          </a:solidFill>
+                          <a:latin typeface="Microsoft YaHei"/>
+                          <a:ea typeface="Microsoft YaHei"/>
+                        </a:rPr>
+                        <a:t>7日回访率、人均对话轮次、单会话推理成本</a:t>
+                      </a:r>
+                    </a:p>
+                  </a:txBody>
+                  <a:tcPr marT="25400" marB="25400">
+                    <a:solidFill>
+                      <a:srgbClr val="F1F5F9"/>
+                    </a:solidFill>
+                  </a:tcPr>
+                </a:tc>
+                <a:tc>
+                  <a:txBody>
+                    <a:bodyPr wrap="square"/>
+                    <a:lstStyle/>
+                    <a:p>
+                      <a:r>
+                        <a:rPr sz="1000" b="0">
+                          <a:solidFill>
+                            <a:srgbClr val="1F2937"/>
+                          </a:solidFill>
+                          <a:latin typeface="Microsoft YaHei"/>
+                          <a:ea typeface="Microsoft YaHei"/>
+                        </a:rPr>
+                        <a:t>后者用于校验「提高每轮产出成本中性」这一假设</a:t>
+                      </a:r>
+                    </a:p>
+                  </a:txBody>
+                  <a:tcPr marT="25400" marB="25400">
+                    <a:solidFill>
+                      <a:srgbClr val="F1F5F9"/>
+                    </a:solidFill>
+                  </a:tcPr>
+                </a:tc>
+              </a:tr>
+              <a:tr h="407330">
+                <a:tc>
+                  <a:txBody>
+                    <a:bodyPr wrap="square"/>
+                    <a:lstStyle/>
+                    <a:p>
+                      <a:r>
+                        <a:rPr sz="1000" b="0">
+                          <a:solidFill>
+                            <a:srgbClr val="1F2937"/>
+                          </a:solidFill>
+                          <a:latin typeface="Microsoft YaHei"/>
+                          <a:ea typeface="Microsoft YaHei"/>
+                        </a:rPr>
+                        <a:t>决策规则</a:t>
+                      </a:r>
+                    </a:p>
+                  </a:txBody>
+                  <a:tcPr marT="25400" marB="25400">
+                    <a:solidFill>
+                      <a:srgbClr val="FFFFFF"/>
+                    </a:solidFill>
+                  </a:tcPr>
+                </a:tc>
+                <a:tc>
+                  <a:txBody>
+                    <a:bodyPr wrap="square"/>
+                    <a:lstStyle/>
+                    <a:p>
+                      <a:r>
                         <a:rPr sz="900" b="0">
                           <a:solidFill>
                             <a:srgbClr val="1F2937"/>
@@ -7678,268 +8115,7 @@
                           <a:latin typeface="Microsoft YaHei"/>
                           <a:ea typeface="Microsoft YaHei"/>
                         </a:rPr>
-                        <a:t>n ≈ 2(z₀.₉₇₅+z₀.₈)²·p̄(1−p̄)/δ² ＝ 2×7.85×0.11×0.89÷0.02²</a:t>
-                      </a:r>
-                    </a:p>
-                  </a:txBody>
-                  <a:tcPr marT="25400" marB="25400">
-                    <a:solidFill>
-                      <a:srgbClr val="FFFFFF"/>
-                    </a:solidFill>
-                  </a:tcPr>
-                </a:tc>
-              </a:tr>
-              <a:tr h="420624">
-                <a:tc>
-                  <a:txBody>
-                    <a:bodyPr wrap="square"/>
-                    <a:lstStyle/>
-                    <a:p>
-                      <a:r>
-                        <a:rPr sz="1000" b="0">
-                          <a:solidFill>
-                            <a:srgbClr val="1F2937"/>
-                          </a:solidFill>
-                          <a:latin typeface="Microsoft YaHei"/>
-                          <a:ea typeface="Microsoft YaHei"/>
-                        </a:rPr>
-                        <a:t>分流与积累时长</a:t>
-                      </a:r>
-                    </a:p>
-                  </a:txBody>
-                  <a:tcPr marT="25400" marB="25400">
-                    <a:solidFill>
-                      <a:srgbClr val="F1F5F9"/>
-                    </a:solidFill>
-                  </a:tcPr>
-                </a:tc>
-                <a:tc>
-                  <a:txBody>
-                    <a:bodyPr wrap="square"/>
-                    <a:lstStyle/>
-                    <a:p>
-                      <a:r>
-                        <a:rPr sz="1000" b="0">
-                          <a:solidFill>
-                            <a:srgbClr val="1F2937"/>
-                          </a:solidFill>
-                          <a:latin typeface="Microsoft YaHei"/>
-                          <a:ea typeface="Microsoft YaHei"/>
-                        </a:rPr>
-                        <a:t>1%分流（每组约2.5万人／日），不足一日即达样本量</a:t>
-                      </a:r>
-                    </a:p>
-                  </a:txBody>
-                  <a:tcPr marT="25400" marB="25400">
-                    <a:solidFill>
-                      <a:srgbClr val="F1F5F9"/>
-                    </a:solidFill>
-                  </a:tcPr>
-                </a:tc>
-                <a:tc>
-                  <a:txBody>
-                    <a:bodyPr wrap="square"/>
-                    <a:lstStyle/>
-                    <a:p>
-                      <a:r>
-                        <a:rPr sz="1000" b="0">
-                          <a:solidFill>
-                            <a:srgbClr val="1F2937"/>
-                          </a:solidFill>
-                          <a:latin typeface="Microsoft YaHei"/>
-                          <a:ea typeface="Microsoft YaHei"/>
-                        </a:rPr>
-                        <a:t>以当前DAU 500万计，主指标一天内即可得到统计功效</a:t>
-                      </a:r>
-                    </a:p>
-                  </a:txBody>
-                  <a:tcPr marT="25400" marB="25400">
-                    <a:solidFill>
-                      <a:srgbClr val="F1F5F9"/>
-                    </a:solidFill>
-                  </a:tcPr>
-                </a:tc>
-              </a:tr>
-              <a:tr h="420624">
-                <a:tc>
-                  <a:txBody>
-                    <a:bodyPr wrap="square"/>
-                    <a:lstStyle/>
-                    <a:p>
-                      <a:r>
-                        <a:rPr sz="1000" b="0">
-                          <a:solidFill>
-                            <a:srgbClr val="1F2937"/>
-                          </a:solidFill>
-                          <a:latin typeface="Microsoft YaHei"/>
-                          <a:ea typeface="Microsoft YaHei"/>
-                        </a:rPr>
-                        <a:t>观测窗口</a:t>
-                      </a:r>
-                    </a:p>
-                  </a:txBody>
-                  <a:tcPr marT="25400" marB="25400">
-                    <a:solidFill>
-                      <a:srgbClr val="FFFFFF"/>
-                    </a:solidFill>
-                  </a:tcPr>
-                </a:tc>
-                <a:tc>
-                  <a:txBody>
-                    <a:bodyPr wrap="square"/>
-                    <a:lstStyle/>
-                    <a:p>
-                      <a:r>
-                        <a:rPr sz="1000" b="0">
-                          <a:solidFill>
-                            <a:srgbClr val="1F2937"/>
-                          </a:solidFill>
-                          <a:latin typeface="Microsoft YaHei"/>
-                          <a:ea typeface="Microsoft YaHei"/>
-                        </a:rPr>
-                        <a:t>≥14日</a:t>
-                      </a:r>
-                    </a:p>
-                  </a:txBody>
-                  <a:tcPr marT="25400" marB="25400">
-                    <a:solidFill>
-                      <a:srgbClr val="FFFFFF"/>
-                    </a:solidFill>
-                  </a:tcPr>
-                </a:tc>
-                <a:tc>
-                  <a:txBody>
-                    <a:bodyPr wrap="square"/>
-                    <a:lstStyle/>
-                    <a:p>
-                      <a:r>
-                        <a:rPr sz="1000" b="0">
-                          <a:solidFill>
-                            <a:srgbClr val="1F2937"/>
-                          </a:solidFill>
-                          <a:latin typeface="Microsoft YaHei"/>
-                          <a:ea typeface="Microsoft YaHei"/>
-                        </a:rPr>
-                        <a:t>次级指标（7日回访率）需覆盖至少一个完整回访周期——这才是真正的约束</a:t>
-                      </a:r>
-                    </a:p>
-                  </a:txBody>
-                  <a:tcPr marT="25400" marB="25400">
-                    <a:solidFill>
-                      <a:srgbClr val="FFFFFF"/>
-                    </a:solidFill>
-                  </a:tcPr>
-                </a:tc>
-              </a:tr>
-              <a:tr h="420624">
-                <a:tc>
-                  <a:txBody>
-                    <a:bodyPr wrap="square"/>
-                    <a:lstStyle/>
-                    <a:p>
-                      <a:r>
-                        <a:rPr sz="1000" b="0">
-                          <a:solidFill>
-                            <a:srgbClr val="1F2937"/>
-                          </a:solidFill>
-                          <a:latin typeface="Microsoft YaHei"/>
-                          <a:ea typeface="Microsoft YaHei"/>
-                        </a:rPr>
-                        <a:t>次级指标与护栏</a:t>
-                      </a:r>
-                    </a:p>
-                  </a:txBody>
-                  <a:tcPr marT="25400" marB="25400">
-                    <a:solidFill>
-                      <a:srgbClr val="F1F5F9"/>
-                    </a:solidFill>
-                  </a:tcPr>
-                </a:tc>
-                <a:tc>
-                  <a:txBody>
-                    <a:bodyPr wrap="square"/>
-                    <a:lstStyle/>
-                    <a:p>
-                      <a:r>
-                        <a:rPr sz="1000" b="0">
-                          <a:solidFill>
-                            <a:srgbClr val="1F2937"/>
-                          </a:solidFill>
-                          <a:latin typeface="Microsoft YaHei"/>
-                          <a:ea typeface="Microsoft YaHei"/>
-                        </a:rPr>
-                        <a:t>7日回访率、人均对话轮次、客诉率</a:t>
-                      </a:r>
-                    </a:p>
-                  </a:txBody>
-                  <a:tcPr marT="25400" marB="25400">
-                    <a:solidFill>
-                      <a:srgbClr val="F1F5F9"/>
-                    </a:solidFill>
-                  </a:tcPr>
-                </a:tc>
-                <a:tc>
-                  <a:txBody>
-                    <a:bodyPr wrap="square"/>
-                    <a:lstStyle/>
-                    <a:p>
-                      <a:r>
-                        <a:rPr sz="1000" b="0">
-                          <a:solidFill>
-                            <a:srgbClr val="1F2937"/>
-                          </a:solidFill>
-                          <a:latin typeface="Microsoft YaHei"/>
-                          <a:ea typeface="Microsoft YaHei"/>
-                        </a:rPr>
-                        <a:t>客诉率高于对照组基线即不予放量</a:t>
-                      </a:r>
-                    </a:p>
-                  </a:txBody>
-                  <a:tcPr marT="25400" marB="25400">
-                    <a:solidFill>
-                      <a:srgbClr val="F1F5F9"/>
-                    </a:solidFill>
-                  </a:tcPr>
-                </a:tc>
-              </a:tr>
-              <a:tr h="420624">
-                <a:tc>
-                  <a:txBody>
-                    <a:bodyPr wrap="square"/>
-                    <a:lstStyle/>
-                    <a:p>
-                      <a:r>
-                        <a:rPr sz="1000" b="0">
-                          <a:solidFill>
-                            <a:srgbClr val="1F2937"/>
-                          </a:solidFill>
-                          <a:latin typeface="Microsoft YaHei"/>
-                          <a:ea typeface="Microsoft YaHei"/>
-                        </a:rPr>
-                        <a:t>决策规则</a:t>
-                      </a:r>
-                    </a:p>
-                  </a:txBody>
-                  <a:tcPr marT="25400" marB="25400">
-                    <a:solidFill>
-                      <a:srgbClr val="FFFFFF"/>
-                    </a:solidFill>
-                  </a:tcPr>
-                </a:tc>
-                <a:tc>
-                  <a:txBody>
-                    <a:bodyPr wrap="square"/>
-                    <a:lstStyle/>
-                    <a:p>
-                      <a:r>
-                        <a:rPr sz="1000" b="0">
-                          <a:solidFill>
-                            <a:srgbClr val="1F2937"/>
-                          </a:solidFill>
-                          <a:latin typeface="Microsoft YaHei"/>
-                          <a:ea typeface="Microsoft YaHei"/>
-                        </a:rPr>
-                        <a:t>主指标达标且护栏不劣化则放量；未达标则转入分层检验</a:t>
+                        <a:t>过程指标达标 且 主指标1达MDE 且 护栏未越界 → 放量；主指标2的95%CI上界＜+30% → 转入分层检验</a:t>
                       </a:r>
                     </a:p>
                   </a:txBody>
@@ -7985,8 +8161,8 @@
         </p:nvSpPr>
         <p:spPr>
           <a:xfrm>
-            <a:off x="685800" y="5989320"/>
-            <a:ext cx="10881360" cy="457200"/>
+            <a:off x="685800" y="6023610"/>
+            <a:ext cx="10881360" cy="331470"/>
           </a:xfrm>
           <a:prstGeom prst="rect">
             <a:avLst/>
@@ -8012,7 +8188,7 @@
                 <a:latin typeface="Microsoft YaHei"/>
                 <a:ea typeface="Microsoft YaHei"/>
               </a:rPr>
-              <a:t>配套三项口径动作：①统一「7日回访率」与「7日留存率」的命名定义；②明确AI链路商品浏览的归因规则（绕过AI链路直达是否计入）；③规模测算止于流量层——用同一实验框架同时测出详情页转化率与客单价后，再与情景测算相乘，拒绝三层假设直乘。</a:t>
+              <a:t>三项口径动作有先后：「先定归因规则，再切换首要指标」——在归因规则未定的情况下切换考核指标，等于用不可比的口径做考核。①统一「7日回访率」与「7日留存率」的命名定义；②明确AI链路商品浏览的归因规则（绕过AI链路直达是否计入）；③用同一实验框架同时测出详情页转化率与客单价后，再与情景测算相乘，拒绝三层假设直乘。</a:t>
             </a:r>
           </a:p>
         </p:txBody>
@@ -8194,7 +8370,7 @@
                 <a:latin typeface="Microsoft YaHei"/>
                 <a:ea typeface="Microsoft YaHei"/>
               </a:rPr>
-              <a:t>AI电商行业研究报告｜v3.1｜数据截至2026-07｜第2页</a:t>
+              <a:t>AI电商行业研究报告｜v3.2｜数据截至2026-07｜第2页</a:t>
             </a:r>
           </a:p>
         </p:txBody>
@@ -8251,7 +8427,7 @@
                 <a:latin typeface="Microsoft YaHei"/>
                 <a:ea typeface="Microsoft YaHei"/>
               </a:rPr>
-              <a:t>● 摘要　　五项主要发现</a:t>
+              <a:t>● 摘要　　六项主要发现</a:t>
             </a:r>
           </a:p>
           <a:p>
@@ -8552,7 +8728,7 @@
                 <a:latin typeface="Microsoft YaHei"/>
                 <a:ea typeface="Microsoft YaHei"/>
               </a:rPr>
-              <a:t>AI电商行业研究报告｜v3.1｜数据截至2026-07｜第20页</a:t>
+              <a:t>AI电商行业研究报告｜v3.2｜数据截至2026-07｜第20页</a:t>
             </a:r>
           </a:p>
         </p:txBody>
@@ -8626,7 +8802,7 @@
                 <a:latin typeface="Microsoft YaHei"/>
                 <a:ea typeface="Microsoft YaHei"/>
               </a:rPr>
-              <a:t>● 四、以「被推荐率」监测替代「渠道规模」监测</a:t>
+              <a:t>● 四、以「被推荐率」监测替代「渠道规模」监测（最小可执行设计）</a:t>
             </a:r>
           </a:p>
           <a:p>
@@ -8643,7 +8819,7 @@
                 <a:latin typeface="Microsoft YaHei"/>
                 <a:ea typeface="Microsoft YaHei"/>
               </a:rPr>
-              <a:t>　　站外AI引荐绝对量小、质量已优、增速放缓；合理投入是低成本占位（商品数据结构化、协议接入）＋月度可见度与被平替率监测。商品结构化数据是跨协议、跨平台可迁移的资产，单一平台的接入工作则不是</a:t>
+              <a:t>　　查询集：GMV前20品类各15条自然语言购物查询（合计300条），覆盖品类词、场景词、价格约束三类句式；入口：豆包、千问、元宝、ChatGPT、Gemini；频率：月度且查询集固定不变（新增查询单独建集，避免漂移污染趋势）；指标：被推荐率与被平替率；基线：首月结果即为基线；触发动作：被平替率环比升超5个百分点时回溯该品类feed完成度</a:t>
             </a:r>
           </a:p>
           <a:p>
@@ -8859,7 +9035,7 @@
                 <a:latin typeface="Microsoft YaHei"/>
                 <a:ea typeface="Microsoft YaHei"/>
               </a:rPr>
-              <a:t>AI电商行业研究报告｜v3.1｜数据截至2026-07｜第21页</a:t>
+              <a:t>AI电商行业研究报告｜v3.2｜数据截至2026-07｜第21页</a:t>
             </a:r>
           </a:p>
         </p:txBody>
@@ -10044,8 +10220,8 @@
         </p:nvSpPr>
         <p:spPr>
           <a:xfrm>
-            <a:off x="685800" y="5989320"/>
-            <a:ext cx="10881360" cy="457200"/>
+            <a:off x="685800" y="6023610"/>
+            <a:ext cx="10881360" cy="331470"/>
           </a:xfrm>
           <a:prstGeom prst="rect">
             <a:avLst/>
@@ -10253,7 +10429,7 @@
                 <a:latin typeface="Microsoft YaHei"/>
                 <a:ea typeface="Microsoft YaHei"/>
               </a:rPr>
-              <a:t>AI电商行业研究报告｜v3.1｜数据截至2026-07｜第22页</a:t>
+              <a:t>AI电商行业研究报告｜v3.2｜数据截至2026-07｜第22页</a:t>
             </a:r>
           </a:p>
         </p:txBody>
@@ -10344,7 +10520,7 @@
                 <a:latin typeface="Microsoft YaHei"/>
                 <a:ea typeface="Microsoft YaHei"/>
               </a:rPr>
-              <a:t>　　UCP开放标准，与AP2／A2A／MCP互通。关键设计：商家保持Merchant of Record；两条路径——原生结账（在Google的AI界面完成）与嵌入式结账（商家保留自定义流程）。门槛为Merchant Center账号＋商品级 native_commerce 属性标记。2026-03更新新增购物车与商品目录能力；结账限美加澳合格商家早期访问</a:t>
+              <a:t>　　UCP开放标准，与AP2／A2A／MCP互通。关键设计：商家保持Merchant of Record；两条路径——原生结账（在Google的AI界面完成）与嵌入式结账（商家保留自定义流程）。门槛为Merchant Center账号＋商品级 native_commerce 属性标记。2026-03更新，新增购物车与商品目录能力；结账限美加澳合格商家早期访问</a:t>
             </a:r>
           </a:p>
           <a:p>
@@ -10560,7 +10736,7 @@
                 <a:latin typeface="Microsoft YaHei"/>
                 <a:ea typeface="Microsoft YaHei"/>
               </a:rPr>
-              <a:t>AI电商行业研究报告｜v3.1｜数据截至2026-07｜第23页</a:t>
+              <a:t>AI电商行业研究报告｜v3.2｜数据截至2026-07｜第23页</a:t>
             </a:r>
           </a:p>
         </p:txBody>
@@ -10867,7 +11043,7 @@
                 <a:latin typeface="Microsoft YaHei"/>
                 <a:ea typeface="Microsoft YaHei"/>
               </a:rPr>
-              <a:t>AI电商行业研究报告｜v3.1｜数据截至2026-07｜第24页</a:t>
+              <a:t>AI电商行业研究报告｜v3.2｜数据截至2026-07｜第24页</a:t>
             </a:r>
           </a:p>
         </p:txBody>
@@ -11890,8 +12066,8 @@
         </p:nvSpPr>
         <p:spPr>
           <a:xfrm>
-            <a:off x="685800" y="5989320"/>
-            <a:ext cx="10881360" cy="457200"/>
+            <a:off x="685800" y="6189345"/>
+            <a:ext cx="10881360" cy="165735"/>
           </a:xfrm>
           <a:prstGeom prst="rect">
             <a:avLst/>
@@ -12099,7 +12275,7 @@
                 <a:latin typeface="Microsoft YaHei"/>
                 <a:ea typeface="Microsoft YaHei"/>
               </a:rPr>
-              <a:t>AI电商行业研究报告｜v3.1｜数据截至2026-07｜第25页</a:t>
+              <a:t>AI电商行业研究报告｜v3.2｜数据截至2026-07｜第25页</a:t>
             </a:r>
           </a:p>
         </p:txBody>
@@ -12474,8 +12650,8 @@
         </p:nvSpPr>
         <p:spPr>
           <a:xfrm>
-            <a:off x="685800" y="5989320"/>
-            <a:ext cx="10881360" cy="457200"/>
+            <a:off x="685800" y="6189345"/>
+            <a:ext cx="10881360" cy="165735"/>
           </a:xfrm>
           <a:prstGeom prst="rect">
             <a:avLst/>
@@ -12683,7 +12859,7 @@
                 <a:latin typeface="Microsoft YaHei"/>
                 <a:ea typeface="Microsoft YaHei"/>
               </a:rPr>
-              <a:t>AI电商行业研究报告｜v3.1｜数据截至2026-07｜第26页</a:t>
+              <a:t>AI电商行业研究报告｜v3.2｜数据截至2026-07｜第26页</a:t>
             </a:r>
           </a:p>
         </p:txBody>
@@ -13092,7 +13268,7 @@
                 <a:latin typeface="Microsoft YaHei"/>
                 <a:ea typeface="Microsoft YaHei"/>
               </a:rPr>
-              <a:t>AI电商行业研究报告｜v3.1｜数据截至2026-07｜第27页</a:t>
+              <a:t>AI电商行业研究报告｜v3.2｜数据截至2026-07｜第27页</a:t>
             </a:r>
           </a:p>
         </p:txBody>
@@ -13629,8 +13805,8 @@
         </p:nvSpPr>
         <p:spPr>
           <a:xfrm>
-            <a:off x="685800" y="5989320"/>
-            <a:ext cx="10881360" cy="457200"/>
+            <a:off x="685800" y="6189345"/>
+            <a:ext cx="10881360" cy="165735"/>
           </a:xfrm>
           <a:prstGeom prst="rect">
             <a:avLst/>
@@ -13838,7 +14014,7 @@
                 <a:latin typeface="Microsoft YaHei"/>
                 <a:ea typeface="Microsoft YaHei"/>
               </a:rPr>
-              <a:t>AI电商行业研究报告｜v3.1｜数据截至2026-07｜第28页</a:t>
+              <a:t>AI电商行业研究报告｜v3.2｜数据截至2026-07｜第28页</a:t>
             </a:r>
           </a:p>
         </p:txBody>
@@ -14179,7 +14355,7 @@
                 <a:latin typeface="Microsoft YaHei"/>
                 <a:ea typeface="Microsoft YaHei"/>
               </a:rPr>
-              <a:t>AI电商行业研究报告｜v3.1｜数据截至2026-07｜第29页</a:t>
+              <a:t>AI电商行业研究报告｜v3.2｜数据截至2026-07｜第29页</a:t>
             </a:r>
           </a:p>
         </p:txBody>
@@ -14486,7 +14662,7 @@
                 <a:latin typeface="Microsoft YaHei"/>
                 <a:ea typeface="Microsoft YaHei"/>
               </a:rPr>
-              <a:t>AI电商行业研究报告｜v3.1｜数据截至2026-07｜第3页</a:t>
+              <a:t>AI电商行业研究报告｜v3.2｜数据截至2026-07｜第3页</a:t>
             </a:r>
           </a:p>
         </p:txBody>
@@ -14501,7 +14677,7 @@
         </p:nvGraphicFramePr>
         <p:xfrm>
           <a:off x="640080" y="1280160"/>
-          <a:ext cx="10972800" cy="2103120"/>
+          <a:ext cx="10972800" cy="2523744"/>
         </p:xfrm>
         <a:graphic>
           <a:graphicData uri="http://schemas.openxmlformats.org/drawingml/2006/table">
@@ -14599,7 +14775,7 @@
                           <a:latin typeface="Microsoft YaHei"/>
                           <a:ea typeface="Microsoft YaHei"/>
                         </a:rPr>
-                        <a:t>P1 公开可追溯</a:t>
+                        <a:t>P1 第三方与事实性披露</a:t>
                       </a:r>
                     </a:p>
                   </a:txBody>
@@ -14622,7 +14798,7 @@
                           <a:latin typeface="Microsoft YaHei"/>
                           <a:ea typeface="Microsoft YaHei"/>
                         </a:rPr>
-                        <a:t>第三方监测机构、财报电话会、官方公告、司法文件</a:t>
+                        <a:t>独立第三方监测数据；官方公告、协议文档、司法文件中的事实性内容（时间、条款、判决）；经审计财务数字</a:t>
                       </a:r>
                     </a:p>
                   </a:txBody>
@@ -14670,7 +14846,7 @@
                           <a:latin typeface="Microsoft YaHei"/>
                           <a:ea typeface="Microsoft YaHei"/>
                         </a:rPr>
-                        <a:t>P2 公司自报</a:t>
+                        <a:t>P2 企业自报运营数据</a:t>
                       </a:r>
                     </a:p>
                   </a:txBody>
@@ -14693,7 +14869,7 @@
                           <a:latin typeface="Microsoft YaHei"/>
                           <a:ea typeface="Microsoft YaHei"/>
                         </a:rPr>
-                        <a:t>来自财报电话会或官方新闻稿的企业自报运营数据</a:t>
+                        <a:t>企业自行统计并披露的运营与效果数据，无论披露渠道为财报电话会、新闻稿或发布会</a:t>
                       </a:r>
                     </a:p>
                   </a:txBody>
@@ -14865,6 +15041,77 @@
                   <a:tcPr marT="25400" marB="25400">
                     <a:solidFill>
                       <a:srgbClr val="FFFFFF"/>
+                    </a:solidFill>
+                  </a:tcPr>
+                </a:tc>
+              </a:tr>
+              <a:tr h="420624">
+                <a:tc>
+                  <a:txBody>
+                    <a:bodyPr wrap="square"/>
+                    <a:lstStyle/>
+                    <a:p>
+                      <a:r>
+                        <a:rPr sz="1100" b="0">
+                          <a:solidFill>
+                            <a:srgbClr val="1F2937"/>
+                          </a:solidFill>
+                          <a:latin typeface="Microsoft YaHei"/>
+                          <a:ea typeface="Microsoft YaHei"/>
+                        </a:rPr>
+                        <a:t>预测数据的处理</a:t>
+                      </a:r>
+                    </a:p>
+                  </a:txBody>
+                  <a:tcPr marT="25400" marB="25400">
+                    <a:solidFill>
+                      <a:srgbClr val="F1F5F9"/>
+                    </a:solidFill>
+                  </a:tcPr>
+                </a:tc>
+                <a:tc>
+                  <a:txBody>
+                    <a:bodyPr wrap="square"/>
+                    <a:lstStyle/>
+                    <a:p>
+                      <a:r>
+                        <a:rPr sz="1100" b="0">
+                          <a:solidFill>
+                            <a:srgbClr val="1F2937"/>
+                          </a:solidFill>
+                          <a:latin typeface="Microsoft YaHei"/>
+                          <a:ea typeface="Microsoft YaHei"/>
+                        </a:rPr>
+                        <a:t>第三方机构的预测值在来源上属P1，但在性质上不是观测值</a:t>
+                      </a:r>
+                    </a:p>
+                  </a:txBody>
+                  <a:tcPr marT="25400" marB="25400">
+                    <a:solidFill>
+                      <a:srgbClr val="F1F5F9"/>
+                    </a:solidFill>
+                  </a:tcPr>
+                </a:tc>
+                <a:tc>
+                  <a:txBody>
+                    <a:bodyPr wrap="square"/>
+                    <a:lstStyle/>
+                    <a:p>
+                      <a:r>
+                        <a:rPr sz="1100" b="0">
+                          <a:solidFill>
+                            <a:srgbClr val="1F2937"/>
+                          </a:solidFill>
+                          <a:latin typeface="Microsoft YaHei"/>
+                          <a:ea typeface="Microsoft YaHei"/>
+                        </a:rPr>
+                        <a:t>附录A一律标注「P1（第三方预测）」，不作为规模基数或折算依据</a:t>
+                      </a:r>
+                    </a:p>
+                  </a:txBody>
+                  <a:tcPr marT="25400" marB="25400">
+                    <a:solidFill>
+                      <a:srgbClr val="F1F5F9"/>
                     </a:solidFill>
                   </a:tcPr>
                 </a:tc>
@@ -14881,8 +15128,8 @@
         </p:nvSpPr>
         <p:spPr>
           <a:xfrm>
-            <a:off x="685800" y="5989320"/>
-            <a:ext cx="10881360" cy="457200"/>
+            <a:off x="685800" y="6023610"/>
+            <a:ext cx="10881360" cy="331470"/>
           </a:xfrm>
           <a:prstGeom prst="rect">
             <a:avLst/>
@@ -14908,7 +15155,7 @@
                 <a:latin typeface="Microsoft YaHei"/>
                 <a:ea typeface="Microsoft YaHei"/>
               </a:rPr>
-              <a:t>三项口径纪律：①区分「AI影响的销售」与「AI界面内完成的交易」，二者相差一个数量级以上；②区分观察性对比与因果效应，「使用者相对未使用者提升X%」应视为相关性上限；③区分实测与测算，测算不得引用为机构预测。</a:t>
+              <a:t>四项口径纪律：①区分「AI影响的销售」与「AI界面内完成的交易」，二者相差一个数量级以上；②区分观察性对比与因果效应，「使用者相对未使用者提升X%」应视为相关性上限；③区分实测、机构预测与本报告测算；④区间不取单点（如Perplexity月活0.3~0.45亿、Instant Checkout峰值商家约12~30家、Adobe与Shopify转化优势约+42%~+54%）。</a:t>
             </a:r>
           </a:p>
         </p:txBody>
@@ -15090,7 +15337,7 @@
                 <a:latin typeface="Microsoft YaHei"/>
                 <a:ea typeface="Microsoft YaHei"/>
               </a:rPr>
-              <a:t>AI电商行业研究报告｜v3.1｜数据截至2026-07｜第30页</a:t>
+              <a:t>AI电商行业研究报告｜v3.2｜数据截至2026-07｜第30页</a:t>
             </a:r>
           </a:p>
         </p:txBody>
@@ -15951,8 +16198,8 @@
         </p:nvSpPr>
         <p:spPr>
           <a:xfrm>
-            <a:off x="685800" y="5989320"/>
-            <a:ext cx="10881360" cy="457200"/>
+            <a:off x="685800" y="5857875"/>
+            <a:ext cx="10881360" cy="497204"/>
           </a:xfrm>
           <a:prstGeom prst="rect">
             <a:avLst/>
@@ -15978,7 +16225,7 @@
                 <a:latin typeface="Microsoft YaHei"/>
                 <a:ea typeface="Microsoft YaHei"/>
               </a:rPr>
-              <a:t>两处不单列为层的横向切面：①广告与流量变现是L2、L3的收入侧规则（核心矛盾为AI答案位与竞价位冲突）；②数据与合规横向贯穿六层。穷尽性检验：沿资金流与数据流回溯，任一笔交易均落入L1–L4；不进入该笔交易资金流的支出（GEO、SaaS、供应链算法）落入L5–L6。三种竞合模式：垂直自建闭环／生态联盟与协议接入／中立第三方（绕行式代理路径在Amazon诉Perplexity获禁令后基本关闭）。</a:t>
+              <a:t>两处不单列为层的横向切面：①广告与流量变现是L2、L3的收入侧规则（核心矛盾为AI答案位与竞价位冲突）；②数据与合规横向贯穿六层。穷尽性检验：沿资金流与数据流回溯，任一笔交易均落入L1–L4；不进入该笔交易资金流的支出（GEO、SaaS、供应链算法）落入L5–L6。三种竞合模式：垂直自建闭环（M4、M5）／生态联盟与协议接入（M2、M3a）／中立第三方（M3b式绕行代理在Amazon诉Perplexity获禁令后基本关闭，中立化只能走协议授权路径）。</a:t>
             </a:r>
           </a:p>
         </p:txBody>
@@ -16160,7 +16407,7 @@
                 <a:latin typeface="Microsoft YaHei"/>
                 <a:ea typeface="Microsoft YaHei"/>
               </a:rPr>
-              <a:t>AI电商行业研究报告｜v3.1｜数据截至2026-07｜第31页</a:t>
+              <a:t>AI电商行业研究报告｜v3.2｜数据截至2026-07｜第31页</a:t>
             </a:r>
           </a:p>
         </p:txBody>
@@ -16491,8 +16738,8 @@
         </p:nvSpPr>
         <p:spPr>
           <a:xfrm>
-            <a:off x="685800" y="5989320"/>
-            <a:ext cx="10881360" cy="457200"/>
+            <a:off x="685800" y="6023610"/>
+            <a:ext cx="10881360" cy="331470"/>
           </a:xfrm>
           <a:prstGeom prst="rect">
             <a:avLst/>
@@ -16700,7 +16947,7 @@
                 <a:latin typeface="Microsoft YaHei"/>
                 <a:ea typeface="Microsoft YaHei"/>
               </a:rPr>
-              <a:t>AI电商行业研究报告｜v3.1｜数据截至2026-07｜第32页</a:t>
+              <a:t>AI电商行业研究报告｜v3.2｜数据截至2026-07｜第32页</a:t>
             </a:r>
           </a:p>
         </p:txBody>
@@ -17069,7 +17316,7 @@
                 <a:latin typeface="Microsoft YaHei"/>
                 <a:ea typeface="Microsoft YaHei"/>
               </a:rPr>
-              <a:t>六项结论</a:t>
+              <a:t>六项结论（括注主要来源章节）</a:t>
             </a:r>
           </a:p>
         </p:txBody>
@@ -17109,7 +17356,7 @@
                 <a:latin typeface="Microsoft YaHei"/>
                 <a:ea typeface="Microsoft YaHei"/>
               </a:rPr>
-              <a:t>AI电商行业研究报告｜v3.1｜数据截至2026-07｜第33页</a:t>
+              <a:t>AI电商行业研究报告｜v3.2｜数据截至2026-07｜第33页</a:t>
             </a:r>
           </a:p>
         </p:txBody>
@@ -17138,7 +17385,7 @@
           <a:p>
             <a:pPr algn="l">
               <a:spcAft>
-                <a:spcPts val="4375"/>
+                <a:spcPts val="3517"/>
               </a:spcAft>
             </a:pPr>
             <a:r>
@@ -17155,7 +17402,7 @@
           <a:p>
             <a:pPr algn="l">
               <a:spcAft>
-                <a:spcPts val="4375"/>
+                <a:spcPts val="3517"/>
               </a:spcAft>
             </a:pPr>
             <a:r>
@@ -17166,13 +17413,13 @@
                 <a:latin typeface="Microsoft YaHei"/>
                 <a:ea typeface="Microsoft YaHei"/>
               </a:rPr>
-              <a:t>● 「AI负责发现、商家保留交易」是当前证据最充分的分工，由产品决策、协议设计与司法判定三类独立证据共同支撑</a:t>
-            </a:r>
-          </a:p>
-          <a:p>
-            <a:pPr algn="l">
-              <a:spcAft>
-                <a:spcPts val="4375"/>
+              <a:t>● 「AI负责发现、商家保留交易」是当前证据最充分的分工，且决定成败的是交易结构而非AI能力级别——M1与M2同为A3却结局相反</a:t>
+            </a:r>
+          </a:p>
+          <a:p>
+            <a:pPr algn="l">
+              <a:spcAft>
+                <a:spcPts val="3517"/>
               </a:spcAft>
             </a:pPr>
             <a:r>
@@ -17183,13 +17430,13 @@
                 <a:latin typeface="Microsoft YaHei"/>
                 <a:ea typeface="Microsoft YaHei"/>
               </a:rPr>
-              <a:t>● 站内AI导购的核心矛盾是决策深度而非流量规模：11.63倍的DAU差距仅带来1.28倍的有效商品浏览量差距，留存差距仅1.10至1.20倍</a:t>
-            </a:r>
-          </a:p>
-          <a:p>
-            <a:pPr algn="l">
-              <a:spcAft>
-                <a:spcPts val="4375"/>
+              <a:t>● 站内AI导购方向的公开效果证据只有一个数据点（Rufus +60%，观察性对比）——自建随机对照实验能力是获得可决策数字的唯一途径</a:t>
+            </a:r>
+          </a:p>
+          <a:p>
+            <a:pPr algn="l">
+              <a:spcAft>
+                <a:spcPts val="3517"/>
               </a:spcAft>
             </a:pPr>
             <a:r>
@@ -17200,13 +17447,13 @@
                 <a:latin typeface="Microsoft YaHei"/>
                 <a:ea typeface="Microsoft YaHei"/>
               </a:rPr>
-              <a:t>● 站外AI引荐处于低基数、高质量、增速衰减阶段，合理姿态是低成本占位与监测，而非按外推规模重投入</a:t>
-            </a:r>
-          </a:p>
-          <a:p>
-            <a:pPr algn="l">
-              <a:spcAft>
-                <a:spcPts val="4375"/>
+              <a:t>● 内部口径数据显示差距落在交互层：留存差距仅1.10至1.20倍，而每轮对话产出差4.22倍；产品形态与意图构成两个解释需分层实验区分</a:t>
+            </a:r>
+          </a:p>
+          <a:p>
+            <a:pPr algn="l">
+              <a:spcAft>
+                <a:spcPts val="3517"/>
               </a:spcAft>
             </a:pPr>
             <a:r>
@@ -17217,13 +17464,30 @@
                 <a:latin typeface="Microsoft YaHei"/>
                 <a:ea typeface="Microsoft YaHei"/>
               </a:rPr>
-              <a:t>● 行业公开效果数据的证据等级不足以支撑投入测算：全部为观察性对比，缺少随机对照实验，口径与归因方法多未完整披露</a:t>
-            </a:r>
-          </a:p>
-          <a:p>
-            <a:pPr algn="l">
-              <a:spcAft>
-                <a:spcPts val="4375"/>
+              <a:t>● 站外AI引荐处于低基数、质量指标已反转但因果性未证明、增速放缓的阶段，合理姿态是低成本占位与监测</a:t>
+            </a:r>
+          </a:p>
+          <a:p>
+            <a:pPr algn="l">
+              <a:spcAft>
+                <a:spcPts val="3517"/>
+              </a:spcAft>
+            </a:pPr>
+            <a:r>
+              <a:rPr sz="1250" b="0">
+                <a:solidFill>
+                  <a:srgbClr val="1F2937"/>
+                </a:solidFill>
+                <a:latin typeface="Microsoft YaHei"/>
+                <a:ea typeface="Microsoft YaHei"/>
+              </a:rPr>
+              <a:t>● 公开效果数据分属三种对照构造且全部为观察性对比，证据等级不足以支撑投入测算</a:t>
+            </a:r>
+          </a:p>
+          <a:p>
+            <a:pPr algn="l">
+              <a:spcAft>
+                <a:spcPts val="3517"/>
               </a:spcAft>
             </a:pPr>
             <a:r>
@@ -17416,7 +17680,7 @@
                 <a:latin typeface="Microsoft YaHei"/>
                 <a:ea typeface="Microsoft YaHei"/>
               </a:rPr>
-              <a:t>AI电商行业研究报告｜v3.1｜数据截至2026-07｜第34页</a:t>
+              <a:t>AI电商行业研究报告｜v3.2｜数据截至2026-07｜第34页</a:t>
             </a:r>
           </a:p>
         </p:txBody>
@@ -18095,8 +18359,8 @@
         </p:nvSpPr>
         <p:spPr>
           <a:xfrm>
-            <a:off x="685800" y="5989320"/>
-            <a:ext cx="10881360" cy="457200"/>
+            <a:off x="685800" y="6189345"/>
+            <a:ext cx="10881360" cy="165735"/>
           </a:xfrm>
           <a:prstGeom prst="rect">
             <a:avLst/>
@@ -18304,7 +18568,7 @@
                 <a:latin typeface="Microsoft YaHei"/>
                 <a:ea typeface="Microsoft YaHei"/>
               </a:rPr>
-              <a:t>AI电商行业研究报告｜v3.1｜数据截至2026-07｜第35页</a:t>
+              <a:t>AI电商行业研究报告｜v3.2｜数据截至2026-07｜第35页</a:t>
             </a:r>
           </a:p>
         </p:txBody>
@@ -18534,7 +18798,7 @@
                           <a:latin typeface="Microsoft YaHei"/>
                           <a:ea typeface="Microsoft YaHei"/>
                         </a:rPr>
-                        <a:t>仅美国市场；指数2025Q1=100；年保留系数30%／40%／55%为设定值而非推导值</a:t>
+                        <a:t>仅美国；左面板四窗口互有嵌套，非独立时点序列；年保留系数为设定值而非推导值</a:t>
                       </a:r>
                     </a:p>
                   </a:txBody>
@@ -18557,7 +18821,7 @@
                           <a:latin typeface="Microsoft YaHei"/>
                           <a:ea typeface="Microsoft YaHei"/>
                         </a:rPr>
-                        <a:t>P1＋测算</a:t>
+                        <a:t>P1实测＋本报告测算</a:t>
                       </a:r>
                     </a:p>
                   </a:txBody>
@@ -18651,7 +18915,7 @@
                           <a:latin typeface="Microsoft YaHei"/>
                           <a:ea typeface="Microsoft YaHei"/>
                         </a:rPr>
-                        <a:t>渠道观察性对比，非因果效应</a:t>
+                        <a:t>渠道间观察性对比；同期渠道流量增约4.9倍，访客构成迁移无法从公开数据分离</a:t>
                       </a:r>
                     </a:p>
                   </a:txBody>
@@ -18674,7 +18938,7 @@
                           <a:latin typeface="Microsoft YaHei"/>
                           <a:ea typeface="Microsoft YaHei"/>
                         </a:rPr>
-                        <a:t>P1</a:t>
+                        <a:t>P1实测</a:t>
                       </a:r>
                     </a:p>
                   </a:txBody>
@@ -18768,7 +19032,7 @@
                           <a:latin typeface="Microsoft YaHei"/>
                           <a:ea typeface="Microsoft YaHei"/>
                         </a:rPr>
-                        <a:t>柱高与标注均为销售额口径；「AI影响」为宽口径，另有订单口径约20%</a:t>
+                        <a:t>柱高与标注均为销售额口径；「AI影响」为宽口径；企业分组增速属第三种对照构造</a:t>
                       </a:r>
                     </a:p>
                   </a:txBody>
@@ -18791,7 +19055,7 @@
                           <a:latin typeface="Microsoft YaHei"/>
                           <a:ea typeface="Microsoft YaHei"/>
                         </a:rPr>
-                        <a:t>P1</a:t>
+                        <a:t>P1实测</a:t>
                       </a:r>
                     </a:p>
                   </a:txBody>
@@ -18885,7 +19149,7 @@
                           <a:latin typeface="Microsoft YaHei"/>
                           <a:ea typeface="Microsoft YaHei"/>
                         </a:rPr>
-                        <a:t>对数轴；菱形为点估计、线段为区间；窄宽口径差一个数量级以上，不可相加</a:t>
+                        <a:t>对数轴；颜色编码口径宽窄；菱形为点估计、线段为区间；不作为规模基数使用</a:t>
                       </a:r>
                     </a:p>
                   </a:txBody>
@@ -18908,7 +19172,7 @@
                           <a:latin typeface="Microsoft YaHei"/>
                           <a:ea typeface="Microsoft YaHei"/>
                         </a:rPr>
-                        <a:t>P1</a:t>
+                        <a:t>P1（第三方预测）</a:t>
                       </a:r>
                     </a:p>
                   </a:txBody>
@@ -19002,7 +19266,7 @@
                           <a:latin typeface="Microsoft YaHei"/>
                           <a:ea typeface="Microsoft YaHei"/>
                         </a:rPr>
-                        <a:t>私域子集；「AI驱动」未操作化定义，仅观察趋势方向，不作规模基数</a:t>
+                        <a:t>私域子集；「AI驱动」未操作化定义；图注附隐含私域大盘的自洽性反算</a:t>
                       </a:r>
                     </a:p>
                   </a:txBody>
@@ -19025,7 +19289,7 @@
                           <a:latin typeface="Microsoft YaHei"/>
                           <a:ea typeface="Microsoft YaHei"/>
                         </a:rPr>
-                        <a:t>P1</a:t>
+                        <a:t>P1实测＋P1预测</a:t>
                       </a:r>
                     </a:p>
                   </a:txBody>
@@ -19096,7 +19360,7 @@
                           <a:latin typeface="Microsoft YaHei"/>
                           <a:ea typeface="Microsoft YaHei"/>
                         </a:rPr>
-                        <a:t>QuestMobile／OpenAI／Google／亚马逊财报／Perplexity</a:t>
+                        <a:t>QuestMobile（P1）；OpenAI／Google／亚马逊财报／Perplexity（P2）</a:t>
                       </a:r>
                     </a:p>
                   </a:txBody>
@@ -19119,7 +19383,7 @@
                           <a:latin typeface="Microsoft YaHei"/>
                           <a:ea typeface="Microsoft YaHei"/>
                         </a:rPr>
-                        <a:t>周／月／年窗口并存，条形长度不构成排名；Perplexity柱长取区间上界</a:t>
+                        <a:t>周／月／年窗口并存，条形长度不构成排名；Perplexity柱长取区间上界，标签保留区间</a:t>
                       </a:r>
                     </a:p>
                   </a:txBody>
@@ -19353,7 +19617,7 @@
                           <a:latin typeface="Microsoft YaHei"/>
                           <a:ea typeface="Microsoft YaHei"/>
                         </a:rPr>
-                        <a:t>＝DAU×人均IPV，柱上标出分项路径；深度上限分两侧设定；不推演GMV</a:t>
+                        <a:t>两面板共用纵轴；柱上标出分项路径；区间宽度衡量流量层自身的不确定性，GMV层敞口未纳入</a:t>
                       </a:r>
                     </a:p>
                   </a:txBody>
@@ -19376,7 +19640,7 @@
                           <a:latin typeface="Microsoft YaHei"/>
                           <a:ea typeface="Microsoft YaHei"/>
                         </a:rPr>
-                        <a:t>P3＋测算</a:t>
+                        <a:t>P3＋本报告测算</a:t>
                       </a:r>
                     </a:p>
                   </a:txBody>
@@ -19447,7 +19711,7 @@
                           <a:latin typeface="Microsoft YaHei"/>
                           <a:ea typeface="Microsoft YaHei"/>
                         </a:rPr>
-                        <a:t>亚马逊2025Q4财报／Adobe／Shopify</a:t>
+                        <a:t>亚马逊2025Q4财报（P2）／Adobe（P1）／Shopify（P2）</a:t>
                       </a:r>
                     </a:p>
                   </a:txBody>
@@ -19470,7 +19734,7 @@
                           <a:latin typeface="Microsoft YaHei"/>
                           <a:ea typeface="Microsoft YaHei"/>
                         </a:rPr>
-                        <a:t>按指标构造分面板，同轴内量纲一致；Salesforce企业分组数据未纳入</a:t>
+                        <a:t>按对照构造分面板；面板①仅一根柱是本图主要事实；Salesforce企业分组数据未纳入</a:t>
                       </a:r>
                     </a:p>
                   </a:txBody>
@@ -19516,8 +19780,8 @@
         </p:nvSpPr>
         <p:spPr>
           <a:xfrm>
-            <a:off x="685800" y="5989320"/>
-            <a:ext cx="10881360" cy="457200"/>
+            <a:off x="685800" y="6189345"/>
+            <a:ext cx="10881360" cy="165735"/>
           </a:xfrm>
           <a:prstGeom prst="rect">
             <a:avLst/>
@@ -19725,7 +19989,7 @@
                 <a:latin typeface="Microsoft YaHei"/>
                 <a:ea typeface="Microsoft YaHei"/>
               </a:rPr>
-              <a:t>AI电商行业研究报告｜v3.1｜数据截至2026-07｜第36页</a:t>
+              <a:t>AI电商行业研究报告｜v3.2｜数据截至2026-07｜第36页</a:t>
             </a:r>
           </a:p>
         </p:txBody>
@@ -19740,7 +20004,7 @@
         </p:nvGraphicFramePr>
         <p:xfrm>
           <a:off x="640080" y="1280160"/>
-          <a:ext cx="10972799" cy="4206240"/>
+          <a:ext cx="10972799" cy="4480560"/>
         </p:xfrm>
         <a:graphic>
           <a:graphicData uri="http://schemas.openxmlformats.org/drawingml/2006/table">
@@ -19753,7 +20017,7 @@
                 <a:gridCol w="4206240"/>
                 <a:gridCol w="3749039"/>
               </a:tblGrid>
-              <a:tr h="420624">
+              <a:tr h="344658">
                 <a:tc>
                   <a:txBody>
                     <a:bodyPr/>
@@ -19824,7 +20088,7 @@
                   </a:tcPr>
                 </a:tc>
               </a:tr>
-              <a:tr h="420624">
+              <a:tr h="344658">
                 <a:tc>
                   <a:txBody>
                     <a:bodyPr wrap="square"/>
@@ -19895,7 +20159,7 @@
                   </a:tcPr>
                 </a:tc>
               </a:tr>
-              <a:tr h="420624">
+              <a:tr h="344658">
                 <a:tc>
                   <a:txBody>
                     <a:bodyPr wrap="square"/>
@@ -19966,7 +20230,7 @@
                   </a:tcPr>
                 </a:tc>
               </a:tr>
-              <a:tr h="420624">
+              <a:tr h="344658">
                 <a:tc>
                   <a:txBody>
                     <a:bodyPr wrap="square"/>
@@ -20037,7 +20301,7 @@
                   </a:tcPr>
                 </a:tc>
               </a:tr>
-              <a:tr h="420624">
+              <a:tr h="344658">
                 <a:tc>
                   <a:txBody>
                     <a:bodyPr wrap="square"/>
@@ -20108,7 +20372,7 @@
                   </a:tcPr>
                 </a:tc>
               </a:tr>
-              <a:tr h="420624">
+              <a:tr h="344658">
                 <a:tc>
                   <a:txBody>
                     <a:bodyPr wrap="square"/>
@@ -20179,7 +20443,7 @@
                   </a:tcPr>
                 </a:tc>
               </a:tr>
-              <a:tr h="420624">
+              <a:tr h="344658">
                 <a:tc>
                   <a:txBody>
                     <a:bodyPr wrap="square"/>
@@ -20250,7 +20514,7 @@
                   </a:tcPr>
                 </a:tc>
               </a:tr>
-              <a:tr h="420624">
+              <a:tr h="344658">
                 <a:tc>
                   <a:txBody>
                     <a:bodyPr wrap="square"/>
@@ -20321,7 +20585,7 @@
                   </a:tcPr>
                 </a:tc>
               </a:tr>
-              <a:tr h="420624">
+              <a:tr h="344658">
                 <a:tc>
                   <a:txBody>
                     <a:bodyPr wrap="square"/>
@@ -20392,7 +20656,7 @@
                   </a:tcPr>
                 </a:tc>
               </a:tr>
-              <a:tr h="420624">
+              <a:tr h="344658">
                 <a:tc>
                   <a:txBody>
                     <a:bodyPr wrap="square"/>
@@ -20406,13 +20670,226 @@
                           <a:latin typeface="Microsoft YaHei"/>
                           <a:ea typeface="Microsoft YaHei"/>
                         </a:rPr>
+                        <a:t>Adobe口径转化率反转（−38%→+42%）</a:t>
+                      </a:r>
+                    </a:p>
+                  </a:txBody>
+                  <a:tcPr marT="25400" marB="25400">
+                    <a:solidFill>
+                      <a:srgbClr val="F1F5F9"/>
+                    </a:solidFill>
+                  </a:tcPr>
+                </a:tc>
+                <a:tc>
+                  <a:txBody>
+                    <a:bodyPr wrap="square"/>
+                    <a:lstStyle/>
+                    <a:p>
+                      <a:r>
+                        <a:rPr sz="950" b="0">
+                          <a:solidFill>
+                            <a:srgbClr val="1F2937"/>
+                          </a:solidFill>
+                          <a:latin typeface="Microsoft YaHei"/>
+                          <a:ea typeface="Microsoft YaHei"/>
+                        </a:rPr>
+                        <a:t>渠道间观察性对比；同期渠道流量增约4.9倍，访客构成迁移无法分离</a:t>
+                      </a:r>
+                    </a:p>
+                  </a:txBody>
+                  <a:tcPr marT="25400" marB="25400">
+                    <a:solidFill>
+                      <a:srgbClr val="F1F5F9"/>
+                    </a:solidFill>
+                  </a:tcPr>
+                </a:tc>
+                <a:tc>
+                  <a:txBody>
+                    <a:bodyPr wrap="square"/>
+                    <a:lstStyle/>
+                    <a:p>
+                      <a:r>
+                        <a:rPr sz="950" b="0">
+                          <a:solidFill>
+                            <a:srgbClr val="1F2937"/>
+                          </a:solidFill>
+                          <a:latin typeface="Microsoft YaHei"/>
+                          <a:ea typeface="Microsoft YaHei"/>
+                        </a:rPr>
+                        <a:t>表述为「质量指标已反转」而非「AI渠道更有效」</a:t>
+                      </a:r>
+                    </a:p>
+                  </a:txBody>
+                  <a:tcPr marT="25400" marB="25400">
+                    <a:solidFill>
+                      <a:srgbClr val="F1F5F9"/>
+                    </a:solidFill>
+                  </a:tcPr>
+                </a:tc>
+              </a:tr>
+              <a:tr h="344658">
+                <a:tc>
+                  <a:txBody>
+                    <a:bodyPr wrap="square"/>
+                    <a:lstStyle/>
+                    <a:p>
+                      <a:r>
+                        <a:rPr sz="950" b="0">
+                          <a:solidFill>
+                            <a:srgbClr val="1F2937"/>
+                          </a:solidFill>
+                          <a:latin typeface="Microsoft YaHei"/>
+                          <a:ea typeface="Microsoft YaHei"/>
+                        </a:rPr>
+                        <a:t>千问月活与电商场景日活的跨等级混算</a:t>
+                      </a:r>
+                    </a:p>
+                  </a:txBody>
+                  <a:tcPr marT="25400" marB="25400">
+                    <a:solidFill>
+                      <a:srgbClr val="FFFFFF"/>
+                    </a:solidFill>
+                  </a:tcPr>
+                </a:tc>
+                <a:tc>
+                  <a:txBody>
+                    <a:bodyPr wrap="square"/>
+                    <a:lstStyle/>
+                    <a:p>
+                      <a:r>
+                        <a:rPr sz="950" b="0">
+                          <a:solidFill>
+                            <a:srgbClr val="1F2937"/>
+                          </a:solidFill>
+                          <a:latin typeface="Microsoft YaHei"/>
+                          <a:ea typeface="Microsoft YaHei"/>
+                        </a:rPr>
+                        <a:t>混用P1与P3数据，且引入日活占月活15%~30%的未验证假设</a:t>
+                      </a:r>
+                    </a:p>
+                  </a:txBody>
+                  <a:tcPr marT="25400" marB="25400">
+                    <a:solidFill>
+                      <a:srgbClr val="FFFFFF"/>
+                    </a:solidFill>
+                  </a:tcPr>
+                </a:tc>
+                <a:tc>
+                  <a:txBody>
+                    <a:bodyPr wrap="square"/>
+                    <a:lstStyle/>
+                    <a:p>
+                      <a:r>
+                        <a:rPr sz="950" b="0">
+                          <a:solidFill>
+                            <a:srgbClr val="1F2937"/>
+                          </a:solidFill>
+                          <a:latin typeface="Microsoft YaHei"/>
+                          <a:ea typeface="Microsoft YaHei"/>
+                        </a:rPr>
+                        <a:t>标注不进入证据链、不可对外引用，仅作内部量级参照</a:t>
+                      </a:r>
+                    </a:p>
+                  </a:txBody>
+                  <a:tcPr marT="25400" marB="25400">
+                    <a:solidFill>
+                      <a:srgbClr val="FFFFFF"/>
+                    </a:solidFill>
+                  </a:tcPr>
+                </a:tc>
+              </a:tr>
+              <a:tr h="344658">
+                <a:tc>
+                  <a:txBody>
+                    <a:bodyPr wrap="square"/>
+                    <a:lstStyle/>
+                    <a:p>
+                      <a:r>
+                        <a:rPr sz="950" b="0">
+                          <a:solidFill>
+                            <a:srgbClr val="1F2937"/>
+                          </a:solidFill>
+                          <a:latin typeface="Microsoft YaHei"/>
+                          <a:ea typeface="Microsoft YaHei"/>
+                        </a:rPr>
+                        <a:t>单会话推理成本的绝对水平</a:t>
+                      </a:r>
+                    </a:p>
+                  </a:txBody>
+                  <a:tcPr marT="25400" marB="25400">
+                    <a:solidFill>
+                      <a:srgbClr val="F1F5F9"/>
+                    </a:solidFill>
+                  </a:tcPr>
+                </a:tc>
+                <a:tc>
+                  <a:txBody>
+                    <a:bodyPr wrap="square"/>
+                    <a:lstStyle/>
+                    <a:p>
+                      <a:r>
+                        <a:rPr sz="950" b="0">
+                          <a:solidFill>
+                            <a:srgbClr val="1F2937"/>
+                          </a:solidFill>
+                          <a:latin typeface="Microsoft YaHei"/>
+                          <a:ea typeface="Microsoft YaHei"/>
+                        </a:rPr>
+                        <a:t>需token单价与单会话平均token数，业务方未提供</a:t>
+                      </a:r>
+                    </a:p>
+                  </a:txBody>
+                  <a:tcPr marT="25400" marB="25400">
+                    <a:solidFill>
+                      <a:srgbClr val="F1F5F9"/>
+                    </a:solidFill>
+                  </a:tcPr>
+                </a:tc>
+                <a:tc>
+                  <a:txBody>
+                    <a:bodyPr wrap="square"/>
+                    <a:lstStyle/>
+                    <a:p>
+                      <a:r>
+                        <a:rPr sz="950" b="0">
+                          <a:solidFill>
+                            <a:srgbClr val="1F2937"/>
+                          </a:solidFill>
+                          <a:latin typeface="Microsoft YaHei"/>
+                          <a:ea typeface="Microsoft YaHei"/>
+                        </a:rPr>
+                        <a:t>列为待补输入；不影响两条提升路径的相对优先级</a:t>
+                      </a:r>
+                    </a:p>
+                  </a:txBody>
+                  <a:tcPr marT="25400" marB="25400">
+                    <a:solidFill>
+                      <a:srgbClr val="F1F5F9"/>
+                    </a:solidFill>
+                  </a:tcPr>
+                </a:tc>
+              </a:tr>
+              <a:tr h="344664">
+                <a:tc>
+                  <a:txBody>
+                    <a:bodyPr wrap="square"/>
+                    <a:lstStyle/>
+                    <a:p>
+                      <a:r>
+                        <a:rPr sz="950" b="0">
+                          <a:solidFill>
+                            <a:srgbClr val="1F2937"/>
+                          </a:solidFill>
+                          <a:latin typeface="Microsoft YaHei"/>
+                          <a:ea typeface="Microsoft YaHei"/>
+                        </a:rPr>
                         <a:t>淘宝AI导购与千问电商场景全部指标</a:t>
                       </a:r>
                     </a:p>
                   </a:txBody>
                   <a:tcPr marT="25400" marB="25400">
                     <a:solidFill>
-                      <a:srgbClr val="F1F5F9"/>
+                      <a:srgbClr val="FFFFFF"/>
                     </a:solidFill>
                   </a:tcPr>
                 </a:tc>
@@ -20435,7 +20912,7 @@
                   </a:txBody>
                   <a:tcPr marT="25400" marB="25400">
                     <a:solidFill>
-                      <a:srgbClr val="F1F5F9"/>
+                      <a:srgbClr val="FFFFFF"/>
                     </a:solidFill>
                   </a:tcPr>
                 </a:tc>
@@ -20458,7 +20935,7 @@
                   </a:txBody>
                   <a:tcPr marT="25400" marB="25400">
                     <a:solidFill>
-                      <a:srgbClr val="F1F5F9"/>
+                      <a:srgbClr val="FFFFFF"/>
                     </a:solidFill>
                   </a:tcPr>
                 </a:tc>
@@ -20475,8 +20952,8 @@
         </p:nvSpPr>
         <p:spPr>
           <a:xfrm>
-            <a:off x="685800" y="5989320"/>
-            <a:ext cx="10881360" cy="457200"/>
+            <a:off x="685800" y="6189345"/>
+            <a:ext cx="10881360" cy="165735"/>
           </a:xfrm>
           <a:prstGeom prst="rect">
             <a:avLst/>
@@ -20502,7 +20979,7 @@
                 <a:latin typeface="Microsoft YaHei"/>
                 <a:ea typeface="Microsoft YaHei"/>
               </a:rPr>
-              <a:t>原则：宁可留白，不用可疑数字。不置信数据既不展示，也不作为任何结论的依据。</a:t>
+              <a:t>原则：宁可留白，不用可疑数字。不置信数据既不展示，也不作为任何结论的依据；已采纳但有局限的数据一律随数字同时列出局限。</a:t>
             </a:r>
           </a:p>
         </p:txBody>
@@ -20644,7 +21121,7 @@
                 <a:latin typeface="Microsoft YaHei"/>
                 <a:ea typeface="Microsoft YaHei"/>
               </a:rPr>
-              <a:t>五项主要发现（1／2）</a:t>
+              <a:t>六项主要发现（1／2）</a:t>
             </a:r>
           </a:p>
         </p:txBody>
@@ -20684,7 +21161,7 @@
                 <a:latin typeface="Microsoft YaHei"/>
                 <a:ea typeface="Microsoft YaHei"/>
               </a:rPr>
-              <a:t>AI电商行业研究报告｜v3.1｜数据截至2026-07｜第4页</a:t>
+              <a:t>AI电商行业研究报告｜v3.2｜数据截至2026-07｜第4页</a:t>
             </a:r>
           </a:p>
         </p:txBody>
@@ -20717,14 +21194,14 @@
               </a:spcAft>
             </a:pPr>
             <a:r>
-              <a:rPr sz="1300" b="1">
+              <a:rPr sz="1220" b="1">
                 <a:solidFill>
                   <a:srgbClr val="1F2937"/>
                 </a:solidFill>
                 <a:latin typeface="Microsoft YaHei"/>
                 <a:ea typeface="Microsoft YaHei"/>
               </a:rPr>
-              <a:t>● 一、站外AI引荐的质量问题已解决，规模问题尚未解决</a:t>
+              <a:t>● 一、站外AI引荐的质量指标已反转，但反转的因果性未被证明</a:t>
             </a:r>
           </a:p>
           <a:p>
@@ -20734,14 +21211,14 @@
               </a:spcAft>
             </a:pPr>
             <a:r>
-              <a:rPr sz="1150" b="0">
+              <a:rPr sz="1070" b="0">
                 <a:solidFill>
                   <a:srgbClr val="6B7280"/>
                 </a:solidFill>
                 <a:latin typeface="Microsoft YaHei"/>
                 <a:ea typeface="Microsoft YaHei"/>
               </a:rPr>
-              <a:t>　　美国零售网站AI来源流量转化率一年内由低于非AI渠道38%转为高于42%，单次访问收入高37%（Adobe）；但同比增速由2025年12月+1151%收敛至2026年3月+269%，高增长来自极低基数，不可线性外推</a:t>
+              <a:t>　　美国零售网站AI来源流量转化率一年内由低于非AI渠道38%转为高于42%，单次访问收入高37%（Adobe）。但这是渠道间观察性对比，同期该渠道累计流量指数由100升至493、访客构成必然大幅迁移，反转中来自渠道效率与来自构成变化的比例无法从公开数据分离。增速已由+1151%回落至+269%</a:t>
             </a:r>
           </a:p>
           <a:p>
@@ -20751,7 +21228,7 @@
               </a:spcAft>
             </a:pPr>
             <a:r>
-              <a:rPr sz="1300" b="1">
+              <a:rPr sz="1220" b="1">
                 <a:solidFill>
                   <a:srgbClr val="1F2937"/>
                 </a:solidFill>
@@ -20768,14 +21245,14 @@
               </a:spcAft>
             </a:pPr>
             <a:r>
-              <a:rPr sz="1150" b="0">
+              <a:rPr sz="1070" b="0">
                 <a:solidFill>
                   <a:srgbClr val="6B7280"/>
                 </a:solidFill>
                 <a:latin typeface="Microsoft YaHei"/>
                 <a:ea typeface="Microsoft YaHei"/>
               </a:rPr>
-              <a:t>　　ChatGPT Instant Checkout 2025-09-29上线、2026-03-05下线，存续约5个月，峰值接入商家约12至30家；替代方案为AI界面内的商家自有应用与开放协议，商家保持Merchant of Record身份</a:t>
+              <a:t>　　ChatGPT Instant Checkout 2025-09-29上线、2026-03-05下线，存续约5个月，峰值接入商家约12至30家；替代方案为AI界面内的商家自有应用与开放协议，商家保持Merchant of Record身份。这是本报告证据链最完整的结论，由产品决策、协议设计、司法判定三类异质证据支撑</a:t>
             </a:r>
           </a:p>
           <a:p>
@@ -20785,14 +21262,14 @@
               </a:spcAft>
             </a:pPr>
             <a:r>
-              <a:rPr sz="1300" b="1">
+              <a:rPr sz="1220" b="1">
                 <a:solidFill>
                   <a:srgbClr val="1F2937"/>
                 </a:solidFill>
                 <a:latin typeface="Microsoft YaHei"/>
                 <a:ea typeface="Microsoft YaHei"/>
               </a:rPr>
-              <a:t>● 三、站内AI导购的瓶颈是决策深度，不是流量（本报告最可执行的发现）</a:t>
+              <a:t>● 三、站内AI导购的公开效果证据只有一个数据点</a:t>
             </a:r>
           </a:p>
           <a:p>
@@ -20802,14 +21279,14 @@
               </a:spcAft>
             </a:pPr>
             <a:r>
-              <a:rPr sz="1150" b="0">
+              <a:rPr sz="1070" b="0">
                 <a:solidFill>
                   <a:srgbClr val="6B7280"/>
                 </a:solidFill>
                 <a:latin typeface="Microsoft YaHei"/>
                 <a:ea typeface="Microsoft YaHei"/>
               </a:rPr>
-              <a:t>　　内部口径：淘宝AI导购DAU 500万、人均IPV 0.11次；千问电商场景DAU 43万、人均IPV 1.00次。前者DAU为后者的11.63倍，但日均有效商品浏览量（55万次对43万次）仅为1.28倍</a:t>
+              <a:t>　　全球范围内可追溯的站内AI导购效果数据仅有Amazon Rufus的「使用者购买完成率高约60%」（2025Q4财报电话会，观察性对比）。Salesforce企业分组与Adobe／Shopify渠道数据分属另两种对照构造，不能替代。自建实验能力是获得可决策数字的唯一途径</a:t>
             </a:r>
           </a:p>
         </p:txBody>
@@ -20822,8 +21299,8 @@
         </p:nvSpPr>
         <p:spPr>
           <a:xfrm>
-            <a:off x="685800" y="5989320"/>
-            <a:ext cx="10881360" cy="457200"/>
+            <a:off x="685800" y="6189345"/>
+            <a:ext cx="10881360" cy="165735"/>
           </a:xfrm>
           <a:prstGeom prst="rect">
             <a:avLst/>
@@ -20991,7 +21468,7 @@
                 <a:latin typeface="Microsoft YaHei"/>
                 <a:ea typeface="Microsoft YaHei"/>
               </a:rPr>
-              <a:t>五项主要发现（2／2）</a:t>
+              <a:t>六项主要发现（2／2）</a:t>
             </a:r>
           </a:p>
         </p:txBody>
@@ -21031,7 +21508,7 @@
                 <a:latin typeface="Microsoft YaHei"/>
                 <a:ea typeface="Microsoft YaHei"/>
               </a:rPr>
-              <a:t>AI电商行业研究报告｜v3.1｜数据截至2026-07｜第5页</a:t>
+              <a:t>AI电商行业研究报告｜v3.2｜数据截至2026-07｜第5页</a:t>
             </a:r>
           </a:p>
         </p:txBody>
@@ -21064,14 +21541,14 @@
               </a:spcAft>
             </a:pPr>
             <a:r>
-              <a:rPr sz="1300" b="1">
+              <a:rPr sz="1220" b="1">
                 <a:solidFill>
                   <a:srgbClr val="1F2937"/>
                 </a:solidFill>
                 <a:latin typeface="Microsoft YaHei"/>
                 <a:ea typeface="Microsoft YaHei"/>
               </a:rPr>
-              <a:t>● 四、对该差距的解释是可检验的假说，报告已给出证伪条件</a:t>
+              <a:t>● 四、内部口径数据显示差距落在交互层，不在用户层</a:t>
             </a:r>
           </a:p>
           <a:p>
@@ -21081,14 +21558,14 @@
               </a:spcAft>
             </a:pPr>
             <a:r>
-              <a:rPr sz="1150" b="0">
+              <a:rPr sz="1070" b="0">
                 <a:solidFill>
                   <a:srgbClr val="6B7280"/>
                 </a:solidFill>
                 <a:latin typeface="Microsoft YaHei"/>
                 <a:ea typeface="Microsoft YaHei"/>
               </a:rPr>
-              <a:t>　　留存差距仅1.10至1.20倍（次日10%对12%、7日回访30%对33%），而人均IPV约9倍关系。两个竞争性解释：产品形态（答案是否给出可交易对象、每轮是否有明确下一步）与意图构成（淘宝侧DAU含入口曝光触发的低意图使用）。报告倾向前者为主因，证伪条件见第18页</a:t>
+              <a:t>　　淘宝AI导购DAU 500万、人均IPV 0.11次；千问电商场景DAU 43万、人均IPV 1.00次。两侧次日留存（10%对12%）与7日回访率（30%对33%）仅1.10~1.20倍，而「每轮对话产出的商品浏览为0.085次对0.357次（4.22倍）」——用户「是否愿意再来」接近，差别集中在「每一轮对话是否推进到商品」</a:t>
             </a:r>
           </a:p>
           <a:p>
@@ -21098,14 +21575,14 @@
               </a:spcAft>
             </a:pPr>
             <a:r>
-              <a:rPr sz="1300" b="1">
+              <a:rPr sz="1220" b="1">
                 <a:solidFill>
                   <a:srgbClr val="1F2937"/>
                 </a:solidFill>
                 <a:latin typeface="Microsoft YaHei"/>
                 <a:ea typeface="Microsoft YaHei"/>
               </a:rPr>
-              <a:t>● 五、核心建议：把人均IPV而非DAU作为首要指标</a:t>
+              <a:t>● 五、核心建议：把人均IPV设为首要指标，切入点是「每轮对话产出」而非「对话轮次」</a:t>
             </a:r>
           </a:p>
           <a:p>
@@ -21115,14 +21592,14 @@
               </a:spcAft>
             </a:pPr>
             <a:r>
-              <a:rPr sz="1150" b="0">
+              <a:rPr sz="1070" b="0">
                 <a:solidFill>
                   <a:srgbClr val="6B7280"/>
                 </a:solidFill>
                 <a:latin typeface="Microsoft YaHei"/>
                 <a:ea typeface="Microsoft YaHei"/>
               </a:rPr>
-              <a:t>　　DAU不变而人均IPV由0.11提至1.00次，有效浏览量由55万增至500万次／日（约9倍）；反之DAU翻倍而IPV不变仅得110万次（2倍）。注意：1.00次是同类产品已实证的水平参照，不是两年期目标——乐观档2028年中仅达0.594次</a:t>
+              <a:t>　　两条路径成本结构完全不同：提高每轮产出不增加轮次，推理成本近似不变，人均IPV可达0.46次；增加轮次则推理成本随轮次线性上升，人均IPV只到0.24次。前者指标增益为后者约2.8倍，按单位推理成本计效率约6倍</a:t>
             </a:r>
           </a:p>
           <a:p>
@@ -21132,14 +21609,14 @@
               </a:spcAft>
             </a:pPr>
             <a:r>
-              <a:rPr sz="1300" b="1">
+              <a:rPr sz="1220" b="1">
                 <a:solidFill>
                   <a:srgbClr val="1F2937"/>
                 </a:solidFill>
                 <a:latin typeface="Microsoft YaHei"/>
                 <a:ea typeface="Microsoft YaHei"/>
               </a:rPr>
-              <a:t>● 六、规模测算止于流量层</a:t>
+              <a:t>● 六、规模测算止于流量层，且流量层本身的不确定性尚未被压缩</a:t>
             </a:r>
           </a:p>
           <a:p>
@@ -21149,14 +21626,14 @@
               </a:spcAft>
             </a:pPr>
             <a:r>
-              <a:rPr sz="1150" b="0">
+              <a:rPr sz="1070" b="0">
                 <a:solidFill>
                   <a:srgbClr val="6B7280"/>
                 </a:solidFill>
                 <a:latin typeface="Microsoft YaHei"/>
                 <a:ea typeface="Microsoft YaHei"/>
               </a:rPr>
-              <a:t>　　情景测算只推演DAU与浏览深度，不推演成交额；由浏览量折算GMV需引入详情页转化率与客单价两项敞口参数，任何单点GMV估计都是三层假设相乘的结果。配套前提：行业内全部公开效果数据均为观察性对比，需建立随机对照实验能力</a:t>
+              <a:t>　　情景测算只推演DAU与浏览深度，区间跨度已达5.9倍且全部来自流量层假设；由浏览量折算GMV还需详情页转化率与客单价，二者无实测值、未纳入测算，因此真实GMV不确定性会更大。压缩顺序应是先用实验测出转化率与客单价，再回头收窄流量假设</a:t>
             </a:r>
           </a:p>
         </p:txBody>
@@ -21338,7 +21815,7 @@
                 <a:latin typeface="Microsoft YaHei"/>
                 <a:ea typeface="Microsoft YaHei"/>
               </a:rPr>
-              <a:t>AI电商行业研究报告｜v3.1｜数据截至2026-07｜第6页</a:t>
+              <a:t>AI电商行业研究报告｜v3.2｜数据截至2026-07｜第6页</a:t>
             </a:r>
           </a:p>
         </p:txBody>
@@ -21359,8 +21836,8 @@
         </p:blipFill>
         <p:spPr>
           <a:xfrm>
-            <a:off x="1394491" y="1207008"/>
-            <a:ext cx="9402713" cy="4434840"/>
+            <a:off x="1515603" y="1207008"/>
+            <a:ext cx="9160489" cy="4434840"/>
           </a:xfrm>
           <a:prstGeom prst="rect">
             <a:avLst/>
@@ -21544,7 +22021,7 @@
                 <a:latin typeface="Microsoft YaHei"/>
                 <a:ea typeface="Microsoft YaHei"/>
               </a:rPr>
-              <a:t>AI电商行业研究报告｜v3.1｜数据截至2026-07｜第7页</a:t>
+              <a:t>AI电商行业研究报告｜v3.2｜数据截至2026-07｜第7页</a:t>
             </a:r>
           </a:p>
         </p:txBody>
@@ -22081,8 +22558,8 @@
         </p:nvSpPr>
         <p:spPr>
           <a:xfrm>
-            <a:off x="685800" y="5989320"/>
-            <a:ext cx="10881360" cy="457200"/>
+            <a:off x="685800" y="6189345"/>
+            <a:ext cx="10881360" cy="165735"/>
           </a:xfrm>
           <a:prstGeom prst="rect">
             <a:avLst/>
@@ -22290,7 +22767,7 @@
                 <a:latin typeface="Microsoft YaHei"/>
                 <a:ea typeface="Microsoft YaHei"/>
               </a:rPr>
-              <a:t>AI电商行业研究报告｜v3.1｜数据截至2026-07｜第8页</a:t>
+              <a:t>AI电商行业研究报告｜v3.2｜数据截至2026-07｜第8页</a:t>
             </a:r>
           </a:p>
         </p:txBody>
@@ -22496,7 +22973,7 @@
                 <a:latin typeface="Microsoft YaHei"/>
                 <a:ea typeface="Microsoft YaHei"/>
               </a:rPr>
-              <a:t>AI电商行业研究报告｜v3.1｜数据截至2026-07｜第9页</a:t>
+              <a:t>AI电商行业研究报告｜v3.2｜数据截至2026-07｜第9页</a:t>
             </a:r>
           </a:p>
         </p:txBody>

--- a/report/AI电商行业研究报告.pptx
+++ b/report/AI电商行业研究报告.pptx
@@ -4473,7 +4473,7 @@
                 <a:latin typeface="Microsoft YaHei"/>
                 <a:ea typeface="Microsoft YaHei"/>
               </a:rPr>
-              <a:t>图4  规模预测：窄口径与宽口径相差一个数量级以上</a:t>
+              <a:t>图4  规模预测：口径宽窄造成的差距大于机构之间的差距（倍数须按可比配对给出）</a:t>
             </a:r>
           </a:p>
         </p:txBody>
@@ -4550,8 +4550,8 @@
         </p:nvSpPr>
         <p:spPr>
           <a:xfrm>
-            <a:off x="685800" y="6023610"/>
-            <a:ext cx="10881360" cy="331470"/>
+            <a:off x="685800" y="5857875"/>
+            <a:ext cx="10881360" cy="497204"/>
           </a:xfrm>
           <a:prstGeom prst="rect">
             <a:avLst/>
@@ -4577,7 +4577,7 @@
                 <a:latin typeface="Microsoft YaHei"/>
                 <a:ea typeface="Microsoft YaHei"/>
               </a:rPr>
-              <a:t>数据来源：eMarketer、Morgan Stanley、Bain、McKinsey、Edgar Dunn公开预测（2025-10至12发布），全部为机构预测值而非实测。关键口径：颜色编码口径宽窄，菱形为点估计、线段为区间；窄口径与宽口径相差约一个数量级，本报告不将其作为规模基数使用。</a:t>
+              <a:t>数据来源：eMarketer、Morgan Stanley、Bain、McKinsey、Edgar Dunn公开预测（2025-10至12发布），全部为机构预测值而非实测。关键口径：颜色编码口径宽窄，菱形为点估计、线段为区间。倍数须按可比配对给出：同地域同年份（美国2030年）表中无窄口径数据点，可比的是中口径下限1900亿至宽口径上限10000亿，相差约5.3倍；窄口径对宽口径需跨年份（eMarketer美国2029年1440亿对McKinsey美国2030年9000至10000亿，约6.3至6.9倍）。本报告对该差距一律按上述可比配对给出倍数，不做跨口径的量级概括，也不将预测值作为规模基数使用。</a:t>
             </a:r>
           </a:p>
         </p:txBody>
@@ -6976,7 +6976,7 @@
           <a:p>
             <a:pPr algn="l" marL="402336" indent="0">
               <a:spcAft>
-                <a:spcPts val="1042"/>
+                <a:spcPts val="652"/>
               </a:spcAft>
             </a:pPr>
             <a:r>
@@ -6987,7 +6987,7 @@
                 <a:latin typeface="Microsoft YaHei"/>
                 <a:ea typeface="Microsoft YaHei"/>
               </a:rPr>
-              <a:t>转化率由−38%转为+42%是过去一年最实质的变化；但这是渠道间观察性对比，同期渠道流量增至约4.9倍（指数100→493）、访客构成必然迁移，归因无法从公开数据分离。增速已由+1151%回落至+269%，且窄口径预测（美国2026年约206亿美元）的实现路径已因Instant Checkout下线而改变。处方：低成本占位与监测，而不是按外推规模做重投入</a:t>
+              <a:t>转化率由−38%转为+42%是过去一年最实质的变化；但这是渠道间观察性对比，同期渠道流量大幅扩张（Q1对Q1定基指数100→493即4.93倍，3月对3月约3.7倍）、访客构成必然迁移，归因无法从公开数据分离。增速已由+1151%回落至+269%，且窄口径预测（美国2026年约206亿美元）的实现路径已因Instant Checkout下线而改变。处方：低成本占位与监测，而不是按外推规模做重投入</a:t>
             </a:r>
           </a:p>
           <a:p>
@@ -7010,7 +7010,7 @@
           <a:p>
             <a:pPr algn="l" marL="402336" indent="0">
               <a:spcAft>
-                <a:spcPts val="1042"/>
+                <a:spcPts val="652"/>
               </a:spcAft>
             </a:pPr>
             <a:r>
@@ -7038,13 +7038,13 @@
                 <a:latin typeface="Microsoft YaHei"/>
                 <a:ea typeface="Microsoft YaHei"/>
               </a:rPr>
-              <a:t>● 站内AI导购方向的公开效果证据只有一个数据点</a:t>
+              <a:t>● 站内AI导购在「个体层相对效果」构造上只有一个公开数据点</a:t>
             </a:r>
           </a:p>
           <a:p>
             <a:pPr algn="l" marL="402336" indent="0">
               <a:spcAft>
-                <a:spcPts val="1042"/>
+                <a:spcPts val="652"/>
               </a:spcAft>
             </a:pPr>
             <a:r>
@@ -7055,7 +7055,7 @@
                 <a:latin typeface="Microsoft YaHei"/>
                 <a:ea typeface="Microsoft YaHei"/>
               </a:rPr>
-              <a:t>全球可追溯的站内导购效果数据仅有Rufus「+60%完成率」（图9面板①只有一根柱）。Salesforce企业分组与Adobe／Shopify渠道数据分属另两种对照构造，不能替代</a:t>
+              <a:t>图9面板①只有Rufus「+60%完成率」一根柱。Salesforce企业分组与Adobe／Shopify渠道数据分属另两种对照构造；亚马逊的「增量年化销售近120亿美元」为绝对额且归因方法未完整披露，不可跨案例比较，也不能替代相对效果证据</a:t>
             </a:r>
           </a:p>
           <a:p>
@@ -7078,7 +7078,7 @@
           <a:p>
             <a:pPr algn="l" marL="402336" indent="0">
               <a:spcAft>
-                <a:spcPts val="1042"/>
+                <a:spcPts val="652"/>
               </a:spcAft>
             </a:pPr>
             <a:r>
@@ -7112,7 +7112,7 @@
           <a:p>
             <a:pPr algn="l" marL="402336" indent="0">
               <a:spcAft>
-                <a:spcPts val="1042"/>
+                <a:spcPts val="652"/>
               </a:spcAft>
             </a:pPr>
             <a:r>
@@ -7146,7 +7146,7 @@
           <a:p>
             <a:pPr algn="l" marL="402336" indent="0">
               <a:spcAft>
-                <a:spcPts val="1042"/>
+                <a:spcPts val="652"/>
               </a:spcAft>
             </a:pPr>
             <a:r>
@@ -7180,7 +7180,7 @@
           <a:p>
             <a:pPr algn="l" marL="402336" indent="0">
               <a:spcAft>
-                <a:spcPts val="1042"/>
+                <a:spcPts val="652"/>
               </a:spcAft>
             </a:pPr>
             <a:r>
@@ -8134,7 +8134,7 @@
                 <a:gridCol w="4206240"/>
                 <a:gridCol w="4663440"/>
               </a:tblGrid>
-              <a:tr h="407323">
+              <a:tr h="344658">
                 <a:tc>
                   <a:txBody>
                     <a:bodyPr/>
@@ -8205,7 +8205,7 @@
                   </a:tcPr>
                 </a:tc>
               </a:tr>
-              <a:tr h="407323">
+              <a:tr h="344658">
                 <a:tc>
                   <a:txBody>
                     <a:bodyPr wrap="square"/>
@@ -8276,7 +8276,7 @@
                   </a:tcPr>
                 </a:tc>
               </a:tr>
-              <a:tr h="407323">
+              <a:tr h="344658">
                 <a:tc>
                   <a:txBody>
                     <a:bodyPr wrap="square"/>
@@ -8347,7 +8347,7 @@
                   </a:tcPr>
                 </a:tc>
               </a:tr>
-              <a:tr h="407323">
+              <a:tr h="344658">
                 <a:tc>
                   <a:txBody>
                     <a:bodyPr wrap="square"/>
@@ -8418,7 +8418,7 @@
                   </a:tcPr>
                 </a:tc>
               </a:tr>
-              <a:tr h="407323">
+              <a:tr h="344658">
                 <a:tc>
                   <a:txBody>
                     <a:bodyPr wrap="square"/>
@@ -8489,7 +8489,7 @@
                   </a:tcPr>
                 </a:tc>
               </a:tr>
-              <a:tr h="407323">
+              <a:tr h="344658">
                 <a:tc>
                   <a:txBody>
                     <a:bodyPr wrap="square"/>
@@ -8560,7 +8560,7 @@
                   </a:tcPr>
                 </a:tc>
               </a:tr>
-              <a:tr h="407323">
+              <a:tr h="344658">
                 <a:tc>
                   <a:txBody>
                     <a:bodyPr wrap="square"/>
@@ -8631,7 +8631,7 @@
                   </a:tcPr>
                 </a:tc>
               </a:tr>
-              <a:tr h="407323">
+              <a:tr h="344658">
                 <a:tc>
                   <a:txBody>
                     <a:bodyPr wrap="square"/>
@@ -8702,7 +8702,7 @@
                   </a:tcPr>
                 </a:tc>
               </a:tr>
-              <a:tr h="407323">
+              <a:tr h="344658">
                 <a:tc>
                   <a:txBody>
                     <a:bodyPr wrap="square"/>
@@ -8773,7 +8773,7 @@
                   </a:tcPr>
                 </a:tc>
               </a:tr>
-              <a:tr h="407323">
+              <a:tr h="344658">
                 <a:tc>
                   <a:txBody>
                     <a:bodyPr wrap="square"/>
@@ -8844,7 +8844,7 @@
                   </a:tcPr>
                 </a:tc>
               </a:tr>
-              <a:tr h="407330">
+              <a:tr h="344658">
                 <a:tc>
                   <a:txBody>
                     <a:bodyPr wrap="square"/>
@@ -8858,7 +8858,7 @@
                           <a:latin typeface="Microsoft YaHei"/>
                           <a:ea typeface="Microsoft YaHei"/>
                         </a:rPr>
-                        <a:t>决策规则</a:t>
+                        <a:t>多重性策略</a:t>
                       </a:r>
                     </a:p>
                   </a:txBody>
@@ -8874,6 +8874,77 @@
                     <a:lstStyle/>
                     <a:p>
                       <a:r>
+                        <a:rPr sz="1000" b="0">
+                          <a:solidFill>
+                            <a:srgbClr val="1F2937"/>
+                          </a:solidFill>
+                          <a:latin typeface="Microsoft YaHei"/>
+                          <a:ea typeface="Microsoft YaHei"/>
+                        </a:rPr>
+                        <a:t>门控式：先检主指标1，通过后才检主指标2；两者各用α＝0.05</a:t>
+                      </a:r>
+                    </a:p>
+                  </a:txBody>
+                  <a:tcPr marT="25400" marB="25400">
+                    <a:solidFill>
+                      <a:srgbClr val="FFFFFF"/>
+                    </a:solidFill>
+                  </a:tcPr>
+                </a:tc>
+                <a:tc>
+                  <a:txBody>
+                    <a:bodyPr wrap="square"/>
+                    <a:lstStyle/>
+                    <a:p>
+                      <a:r>
+                        <a:rPr sz="1000" b="0">
+                          <a:solidFill>
+                            <a:srgbClr val="1F2937"/>
+                          </a:solidFill>
+                          <a:latin typeface="Microsoft YaHei"/>
+                          <a:ea typeface="Microsoft YaHei"/>
+                        </a:rPr>
+                        <a:t>避免双主指标各自双侧检验抬高族系错误率</a:t>
+                      </a:r>
+                    </a:p>
+                  </a:txBody>
+                  <a:tcPr marT="25400" marB="25400">
+                    <a:solidFill>
+                      <a:srgbClr val="FFFFFF"/>
+                    </a:solidFill>
+                  </a:tcPr>
+                </a:tc>
+              </a:tr>
+              <a:tr h="344658">
+                <a:tc>
+                  <a:txBody>
+                    <a:bodyPr wrap="square"/>
+                    <a:lstStyle/>
+                    <a:p>
+                      <a:r>
+                        <a:rPr sz="1000" b="0">
+                          <a:solidFill>
+                            <a:srgbClr val="1F2937"/>
+                          </a:solidFill>
+                          <a:latin typeface="Microsoft YaHei"/>
+                          <a:ea typeface="Microsoft YaHei"/>
+                        </a:rPr>
+                        <a:t>决策规则与冲突裁决</a:t>
+                      </a:r>
+                    </a:p>
+                  </a:txBody>
+                  <a:tcPr marT="25400" marB="25400">
+                    <a:solidFill>
+                      <a:srgbClr val="F1F5F9"/>
+                    </a:solidFill>
+                  </a:tcPr>
+                </a:tc>
+                <a:tc>
+                  <a:txBody>
+                    <a:bodyPr wrap="square"/>
+                    <a:lstStyle/>
+                    <a:p>
+                      <a:r>
                         <a:rPr sz="900" b="0">
                           <a:solidFill>
                             <a:srgbClr val="1F2937"/>
@@ -8881,7 +8952,55 @@
                           <a:latin typeface="Microsoft YaHei"/>
                           <a:ea typeface="Microsoft YaHei"/>
                         </a:rPr>
-                        <a:t>过程指标达标 且 主指标1达MDE 且 护栏未越界 → 放量；主指标2的95%CI上界＜+30% → 转入分层检验</a:t>
+                        <a:t>过程指标达标 且 主指标1达MDE 且 护栏未越界 → 放量。若同时出现「主指标2的95%CI上界＜+30%」，「以证伪判据优先」：先转入分层检验判明成因，再决定是否放量</a:t>
+                      </a:r>
+                    </a:p>
+                  </a:txBody>
+                  <a:tcPr marT="25400" marB="25400">
+                    <a:solidFill>
+                      <a:srgbClr val="F1F5F9"/>
+                    </a:solidFill>
+                  </a:tcPr>
+                </a:tc>
+                <a:tc>
+                  <a:txBody>
+                    <a:bodyPr wrap="square"/>
+                    <a:lstStyle/>
+                    <a:p>
+                      <a:r>
+                        <a:rPr sz="1000" b="0">
+                          <a:solidFill>
+                            <a:srgbClr val="1F2937"/>
+                          </a:solidFill>
+                          <a:latin typeface="Microsoft YaHei"/>
+                          <a:ea typeface="Microsoft YaHei"/>
+                        </a:rPr>
+                        <a:t>避免放量一个形态假说刚被证伪的改动</a:t>
+                      </a:r>
+                    </a:p>
+                  </a:txBody>
+                  <a:tcPr marT="25400" marB="25400">
+                    <a:solidFill>
+                      <a:srgbClr val="F1F5F9"/>
+                    </a:solidFill>
+                  </a:tcPr>
+                </a:tc>
+              </a:tr>
+              <a:tr h="344664">
+                <a:tc>
+                  <a:txBody>
+                    <a:bodyPr wrap="square"/>
+                    <a:lstStyle/>
+                    <a:p>
+                      <a:r>
+                        <a:rPr sz="1000" b="0">
+                          <a:solidFill>
+                            <a:srgbClr val="1F2937"/>
+                          </a:solidFill>
+                          <a:latin typeface="Microsoft YaHei"/>
+                          <a:ea typeface="Microsoft YaHei"/>
+                        </a:rPr>
+                        <a:t>护栏的检验力约束</a:t>
                       </a:r>
                     </a:p>
                   </a:txBody>
@@ -8897,6 +9016,29 @@
                     <a:lstStyle/>
                     <a:p>
                       <a:r>
+                        <a:rPr sz="900" b="0">
+                          <a:solidFill>
+                            <a:srgbClr val="1F2937"/>
+                          </a:solidFill>
+                          <a:latin typeface="Microsoft YaHei"/>
+                          <a:ea typeface="Microsoft YaHei"/>
+                        </a:rPr>
+                        <a:t>客诉率基线需业务方提供；若基线率低于0.5%，1%分流×14日的样本量不足以对+10%边界定功，此时护栏应改为「绝对增量不超过X件/日」的运营阈值</a:t>
+                      </a:r>
+                    </a:p>
+                  </a:txBody>
+                  <a:tcPr marT="25400" marB="25400">
+                    <a:solidFill>
+                      <a:srgbClr val="FFFFFF"/>
+                    </a:solidFill>
+                  </a:tcPr>
+                </a:tc>
+                <a:tc>
+                  <a:txBody>
+                    <a:bodyPr wrap="square"/>
+                    <a:lstStyle/>
+                    <a:p>
+                      <a:r>
                         <a:rPr sz="1000" b="0">
                           <a:solidFill>
                             <a:srgbClr val="1F2937"/>
@@ -8904,7 +9046,7 @@
                           <a:latin typeface="Microsoft YaHei"/>
                           <a:ea typeface="Microsoft YaHei"/>
                         </a:rPr>
-                        <a:t>对应建议一的证伪条件</a:t>
+                        <a:t>低频事件的非劣性检验需更大样本，须先确认基线率</a:t>
                       </a:r>
                     </a:p>
                   </a:txBody>
@@ -9227,7 +9369,7 @@
                 <a:latin typeface="Microsoft YaHei"/>
                 <a:ea typeface="Microsoft YaHei"/>
               </a:rPr>
-              <a:t>查询集：GMV前20品类各15条自然语言购物查询（合计300条），覆盖品类词、场景词、价格约束三类句式；入口：豆包、千问、元宝、ChatGPT、Gemini；站外AI引荐当前绝对量小、质量指标已反转但因果性未证明、增速放缓——此阶段的合理姿态是低成本占位与监测，而不是按外推规模做重投入。查询集：GMV前20品类各15条（合计300条），覆盖品类词、场景词、价格约束三类句式；入口：豆包、千问、元宝、ChatGPT、Gemini；频率：月度且查询集固定不变（新增查询单独建集，避免漂移污染趋势）；指标：被推荐率与被平替率；基线：首月结果即为基线；触发动作：被平替率环比升超5个百分点时回溯该品类feed完成度。配套投入是商品数据结构化与协议接入——跨协议可迁移的资产</a:t>
+              <a:t>查询集：GMV前20品类各15条自然语言购物查询（合计300条），覆盖品类词、场景词、价格约束三类句式；入口：豆包、千问、元宝、ChatGPT、Gemini；站外AI引荐的质量指标已反转但因果性未证明、增速放缓；本报告未取得AI引荐占零售总访问的份额，故不对基数高低下判断——此阶段的合理姿态是低成本占位与监测，而不是按外推规模做重投入。查询集：GMV前20品类各15条（合计300条），覆盖品类词、场景词、价格约束三类句式；入口：豆包、千问、元宝、ChatGPT、Gemini；频率：月度且查询集固定不变（新增查询单独建集，避免漂移污染趋势）；指标：被推荐率与被平替率；基线：首月结果即为基线；触发动作：被平替率环比升超5个百分点时回溯该品类feed完成度。配套投入是商品数据结构化与协议接入——跨协议可迁移的资产，单一平台的接入工作则不是</a:t>
             </a:r>
           </a:p>
           <a:p>
@@ -13186,7 +13328,7 @@
         </p:nvGraphicFramePr>
         <p:xfrm>
           <a:off x="640080" y="1280160"/>
-          <a:ext cx="10972800" cy="2944368"/>
+          <a:ext cx="10972800" cy="3364992"/>
         </p:xfrm>
         <a:graphic>
           <a:graphicData uri="http://schemas.openxmlformats.org/drawingml/2006/table">
@@ -13195,8 +13337,10 @@
                 <a:tableStyleId>{5C22544A-7EE6-4342-B048-85BDC9FD1C3A}</a:tableStyleId>
               </a:tblPr>
               <a:tblGrid>
-                <a:gridCol w="2194560"/>
-                <a:gridCol w="8778240"/>
+                <a:gridCol w="1920240"/>
+                <a:gridCol w="2011680"/>
+                <a:gridCol w="2651760"/>
+                <a:gridCol w="4389120"/>
               </a:tblGrid>
               <a:tr h="420624">
                 <a:tc>
@@ -13205,7 +13349,7 @@
                     <a:lstStyle/>
                     <a:p>
                       <a:r>
-                        <a:rPr sz="1050" b="1">
+                        <a:rPr sz="950" b="1">
                           <a:solidFill>
                             <a:srgbClr val="FFFFFF"/>
                           </a:solidFill>
@@ -13228,14 +13372,60 @@
                     <a:lstStyle/>
                     <a:p>
                       <a:r>
-                        <a:rPr sz="1050" b="1">
+                        <a:rPr sz="950" b="1">
                           <a:solidFill>
                             <a:srgbClr val="FFFFFF"/>
                           </a:solidFill>
                           <a:latin typeface="Microsoft YaHei"/>
                           <a:ea typeface="Microsoft YaHei"/>
                         </a:rPr>
-                        <a:t>内容</a:t>
+                        <a:t>2025Q3披露</a:t>
+                      </a:r>
+                    </a:p>
+                  </a:txBody>
+                  <a:tcPr>
+                    <a:solidFill>
+                      <a:srgbClr val="0F2744"/>
+                    </a:solidFill>
+                  </a:tcPr>
+                </a:tc>
+                <a:tc>
+                  <a:txBody>
+                    <a:bodyPr/>
+                    <a:lstStyle/>
+                    <a:p>
+                      <a:r>
+                        <a:rPr sz="950" b="1">
+                          <a:solidFill>
+                            <a:srgbClr val="FFFFFF"/>
+                          </a:solidFill>
+                          <a:latin typeface="Microsoft YaHei"/>
+                          <a:ea typeface="Microsoft YaHei"/>
+                        </a:rPr>
+                        <a:t>2025Q4／全年披露</a:t>
+                      </a:r>
+                    </a:p>
+                  </a:txBody>
+                  <a:tcPr>
+                    <a:solidFill>
+                      <a:srgbClr val="0F2744"/>
+                    </a:solidFill>
+                  </a:tcPr>
+                </a:tc>
+                <a:tc>
+                  <a:txBody>
+                    <a:bodyPr/>
+                    <a:lstStyle/>
+                    <a:p>
+                      <a:r>
+                        <a:rPr sz="950" b="1">
+                          <a:solidFill>
+                            <a:srgbClr val="FFFFFF"/>
+                          </a:solidFill>
+                          <a:latin typeface="Microsoft YaHei"/>
+                          <a:ea typeface="Microsoft YaHei"/>
+                        </a:rPr>
+                        <a:t>口径与说明</a:t>
                       </a:r>
                     </a:p>
                   </a:txBody>
@@ -13253,14 +13443,14 @@
                     <a:lstStyle/>
                     <a:p>
                       <a:r>
-                        <a:rPr sz="1050" b="0">
-                          <a:solidFill>
-                            <a:srgbClr val="1F2937"/>
-                          </a:solidFill>
-                          <a:latin typeface="Microsoft YaHei"/>
-                          <a:ea typeface="Microsoft YaHei"/>
-                        </a:rPr>
-                        <a:t>时间线</a:t>
+                        <a:rPr sz="950" b="0">
+                          <a:solidFill>
+                            <a:srgbClr val="1F2937"/>
+                          </a:solidFill>
+                          <a:latin typeface="Microsoft YaHei"/>
+                          <a:ea typeface="Microsoft YaHei"/>
+                        </a:rPr>
+                        <a:t>累计使用用户</a:t>
                       </a:r>
                     </a:p>
                   </a:txBody>
@@ -13283,7 +13473,53 @@
                           <a:latin typeface="Microsoft YaHei"/>
                           <a:ea typeface="Microsoft YaHei"/>
                         </a:rPr>
-                        <a:t>2024-02 美国App内beta → 2024-07 全量美国 → 2025年累计超50项升级（账户记忆、盯价自动购买、视觉搜索、跨服务集成、Buy for Me跨站代购）→ 2026-02财报电话会定位为「the AI agent」</a:t>
+                        <a:t>2.5亿</a:t>
+                      </a:r>
+                    </a:p>
+                  </a:txBody>
+                  <a:tcPr marT="25400" marB="25400">
+                    <a:solidFill>
+                      <a:srgbClr val="F1F5F9"/>
+                    </a:solidFill>
+                  </a:tcPr>
+                </a:tc>
+                <a:tc>
+                  <a:txBody>
+                    <a:bodyPr wrap="square"/>
+                    <a:lstStyle/>
+                    <a:p>
+                      <a:r>
+                        <a:rPr sz="950" b="0">
+                          <a:solidFill>
+                            <a:srgbClr val="1F2937"/>
+                          </a:solidFill>
+                          <a:latin typeface="Microsoft YaHei"/>
+                          <a:ea typeface="Microsoft YaHei"/>
+                        </a:rPr>
+                        <a:t>超3亿</a:t>
+                      </a:r>
+                    </a:p>
+                  </a:txBody>
+                  <a:tcPr marT="25400" marB="25400">
+                    <a:solidFill>
+                      <a:srgbClr val="F1F5F9"/>
+                    </a:solidFill>
+                  </a:tcPr>
+                </a:tc>
+                <a:tc>
+                  <a:txBody>
+                    <a:bodyPr wrap="square"/>
+                    <a:lstStyle/>
+                    <a:p>
+                      <a:r>
+                        <a:rPr sz="950" b="0">
+                          <a:solidFill>
+                            <a:srgbClr val="1F2937"/>
+                          </a:solidFill>
+                          <a:latin typeface="Microsoft YaHei"/>
+                          <a:ea typeface="Microsoft YaHei"/>
+                        </a:rPr>
+                        <a:t>年度累计使用用户，非月活；该口径天然大于同等活跃度产品的月活</a:t>
                       </a:r>
                     </a:p>
                   </a:txBody>
@@ -13301,14 +13537,14 @@
                     <a:lstStyle/>
                     <a:p>
                       <a:r>
-                        <a:rPr sz="1050" b="0">
-                          <a:solidFill>
-                            <a:srgbClr val="1F2937"/>
-                          </a:solidFill>
-                          <a:latin typeface="Microsoft YaHei"/>
-                          <a:ea typeface="Microsoft YaHei"/>
-                        </a:rPr>
-                        <a:t>累计使用用户</a:t>
+                        <a:rPr sz="950" b="0">
+                          <a:solidFill>
+                            <a:srgbClr val="1F2937"/>
+                          </a:solidFill>
+                          <a:latin typeface="Microsoft YaHei"/>
+                          <a:ea typeface="Microsoft YaHei"/>
+                        </a:rPr>
+                        <a:t>月活跃用户同比</a:t>
                       </a:r>
                     </a:p>
                   </a:txBody>
@@ -13324,14 +13560,60 @@
                     <a:lstStyle/>
                     <a:p>
                       <a:r>
-                        <a:rPr sz="1050" b="0">
-                          <a:solidFill>
-                            <a:srgbClr val="1F2937"/>
-                          </a:solidFill>
-                          <a:latin typeface="Microsoft YaHei"/>
-                          <a:ea typeface="Microsoft YaHei"/>
-                        </a:rPr>
-                        <a:t>2025Q3披露2.5亿 → 2025Q4／全年披露超3亿</a:t>
+                        <a:rPr sz="950" b="0">
+                          <a:solidFill>
+                            <a:srgbClr val="1F2937"/>
+                          </a:solidFill>
+                          <a:latin typeface="Microsoft YaHei"/>
+                          <a:ea typeface="Microsoft YaHei"/>
+                        </a:rPr>
+                        <a:t>—</a:t>
+                      </a:r>
+                    </a:p>
+                  </a:txBody>
+                  <a:tcPr marT="25400" marB="25400">
+                    <a:solidFill>
+                      <a:srgbClr val="FFFFFF"/>
+                    </a:solidFill>
+                  </a:tcPr>
+                </a:tc>
+                <a:tc>
+                  <a:txBody>
+                    <a:bodyPr wrap="square"/>
+                    <a:lstStyle/>
+                    <a:p>
+                      <a:r>
+                        <a:rPr sz="950" b="0">
+                          <a:solidFill>
+                            <a:srgbClr val="1F2937"/>
+                          </a:solidFill>
+                          <a:latin typeface="Microsoft YaHei"/>
+                          <a:ea typeface="Microsoft YaHei"/>
+                        </a:rPr>
+                        <a:t>+149%</a:t>
+                      </a:r>
+                    </a:p>
+                  </a:txBody>
+                  <a:tcPr marT="25400" marB="25400">
+                    <a:solidFill>
+                      <a:srgbClr val="FFFFFF"/>
+                    </a:solidFill>
+                  </a:tcPr>
+                </a:tc>
+                <a:tc>
+                  <a:txBody>
+                    <a:bodyPr wrap="square"/>
+                    <a:lstStyle/>
+                    <a:p>
+                      <a:r>
+                        <a:rPr sz="950" b="0">
+                          <a:solidFill>
+                            <a:srgbClr val="1F2937"/>
+                          </a:solidFill>
+                          <a:latin typeface="Microsoft YaHei"/>
+                          <a:ea typeface="Microsoft YaHei"/>
+                        </a:rPr>
+                        <a:t>规模增长类指标，非效果指标</a:t>
                       </a:r>
                     </a:p>
                   </a:txBody>
@@ -13349,14 +13631,14 @@
                     <a:lstStyle/>
                     <a:p>
                       <a:r>
-                        <a:rPr sz="1050" b="0">
-                          <a:solidFill>
-                            <a:srgbClr val="1F2937"/>
-                          </a:solidFill>
-                          <a:latin typeface="Microsoft YaHei"/>
-                          <a:ea typeface="Microsoft YaHei"/>
-                        </a:rPr>
-                        <a:t>月活跃用户同比</a:t>
+                        <a:rPr sz="950" b="0">
+                          <a:solidFill>
+                            <a:srgbClr val="1F2937"/>
+                          </a:solidFill>
+                          <a:latin typeface="Microsoft YaHei"/>
+                          <a:ea typeface="Microsoft YaHei"/>
+                        </a:rPr>
+                        <a:t>交互量同比</a:t>
                       </a:r>
                     </a:p>
                   </a:txBody>
@@ -13372,14 +13654,60 @@
                     <a:lstStyle/>
                     <a:p>
                       <a:r>
-                        <a:rPr sz="1050" b="0">
-                          <a:solidFill>
-                            <a:srgbClr val="1F2937"/>
-                          </a:solidFill>
-                          <a:latin typeface="Microsoft YaHei"/>
-                          <a:ea typeface="Microsoft YaHei"/>
-                        </a:rPr>
-                        <a:t>+149%（2025Q4）</a:t>
+                        <a:rPr sz="950" b="0">
+                          <a:solidFill>
+                            <a:srgbClr val="1F2937"/>
+                          </a:solidFill>
+                          <a:latin typeface="Microsoft YaHei"/>
+                          <a:ea typeface="Microsoft YaHei"/>
+                        </a:rPr>
+                        <a:t>—</a:t>
+                      </a:r>
+                    </a:p>
+                  </a:txBody>
+                  <a:tcPr marT="25400" marB="25400">
+                    <a:solidFill>
+                      <a:srgbClr val="F1F5F9"/>
+                    </a:solidFill>
+                  </a:tcPr>
+                </a:tc>
+                <a:tc>
+                  <a:txBody>
+                    <a:bodyPr wrap="square"/>
+                    <a:lstStyle/>
+                    <a:p>
+                      <a:r>
+                        <a:rPr sz="950" b="0">
+                          <a:solidFill>
+                            <a:srgbClr val="1F2937"/>
+                          </a:solidFill>
+                          <a:latin typeface="Microsoft YaHei"/>
+                          <a:ea typeface="Microsoft YaHei"/>
+                        </a:rPr>
+                        <a:t>+210%</a:t>
+                      </a:r>
+                    </a:p>
+                  </a:txBody>
+                  <a:tcPr marT="25400" marB="25400">
+                    <a:solidFill>
+                      <a:srgbClr val="F1F5F9"/>
+                    </a:solidFill>
+                  </a:tcPr>
+                </a:tc>
+                <a:tc>
+                  <a:txBody>
+                    <a:bodyPr wrap="square"/>
+                    <a:lstStyle/>
+                    <a:p>
+                      <a:r>
+                        <a:rPr sz="950" b="0">
+                          <a:solidFill>
+                            <a:srgbClr val="1F2937"/>
+                          </a:solidFill>
+                          <a:latin typeface="Microsoft YaHei"/>
+                          <a:ea typeface="Microsoft YaHei"/>
+                        </a:rPr>
+                        <a:t>交互次数口径，与用户数口径不同</a:t>
                       </a:r>
                     </a:p>
                   </a:txBody>
@@ -13397,14 +13725,14 @@
                     <a:lstStyle/>
                     <a:p>
                       <a:r>
-                        <a:rPr sz="1050" b="0">
-                          <a:solidFill>
-                            <a:srgbClr val="1F2937"/>
-                          </a:solidFill>
-                          <a:latin typeface="Microsoft YaHei"/>
-                          <a:ea typeface="Microsoft YaHei"/>
-                        </a:rPr>
-                        <a:t>交互量同比</a:t>
+                        <a:rPr sz="950" b="0">
+                          <a:solidFill>
+                            <a:srgbClr val="1F2937"/>
+                          </a:solidFill>
+                          <a:latin typeface="Microsoft YaHei"/>
+                          <a:ea typeface="Microsoft YaHei"/>
+                        </a:rPr>
+                        <a:t>增量年化销售</a:t>
                       </a:r>
                     </a:p>
                   </a:txBody>
@@ -13420,14 +13748,60 @@
                     <a:lstStyle/>
                     <a:p>
                       <a:r>
-                        <a:rPr sz="1050" b="0">
-                          <a:solidFill>
-                            <a:srgbClr val="1F2937"/>
-                          </a:solidFill>
-                          <a:latin typeface="Microsoft YaHei"/>
-                          <a:ea typeface="Microsoft YaHei"/>
-                        </a:rPr>
-                        <a:t>+210%（2025Q4）</a:t>
+                        <a:rPr sz="950" b="0">
+                          <a:solidFill>
+                            <a:srgbClr val="1F2937"/>
+                          </a:solidFill>
+                          <a:latin typeface="Microsoft YaHei"/>
+                          <a:ea typeface="Microsoft YaHei"/>
+                        </a:rPr>
+                        <a:t>约100亿美元（年化节奏）</a:t>
+                      </a:r>
+                    </a:p>
+                  </a:txBody>
+                  <a:tcPr marT="25400" marB="25400">
+                    <a:solidFill>
+                      <a:srgbClr val="FFFFFF"/>
+                    </a:solidFill>
+                  </a:tcPr>
+                </a:tc>
+                <a:tc>
+                  <a:txBody>
+                    <a:bodyPr wrap="square"/>
+                    <a:lstStyle/>
+                    <a:p>
+                      <a:r>
+                        <a:rPr sz="950" b="0">
+                          <a:solidFill>
+                            <a:srgbClr val="1F2937"/>
+                          </a:solidFill>
+                          <a:latin typeface="Microsoft YaHei"/>
+                          <a:ea typeface="Microsoft YaHei"/>
+                        </a:rPr>
+                        <a:t>近120亿美元</a:t>
+                      </a:r>
+                    </a:p>
+                  </a:txBody>
+                  <a:tcPr marT="25400" marB="25400">
+                    <a:solidFill>
+                      <a:srgbClr val="FFFFFF"/>
+                    </a:solidFill>
+                  </a:tcPr>
+                </a:tc>
+                <a:tc>
+                  <a:txBody>
+                    <a:bodyPr wrap="square"/>
+                    <a:lstStyle/>
+                    <a:p>
+                      <a:r>
+                        <a:rPr sz="950" b="0">
+                          <a:solidFill>
+                            <a:srgbClr val="1F2937"/>
+                          </a:solidFill>
+                          <a:latin typeface="Microsoft YaHei"/>
+                          <a:ea typeface="Microsoft YaHei"/>
+                        </a:rPr>
+                        <a:t>incremental口径，试图剔除「本来也会发生」的购买；归因方法未经官方完整披露</a:t>
                       </a:r>
                     </a:p>
                   </a:txBody>
@@ -13445,14 +13819,14 @@
                     <a:lstStyle/>
                     <a:p>
                       <a:r>
-                        <a:rPr sz="1050" b="0">
-                          <a:solidFill>
-                            <a:srgbClr val="1F2937"/>
-                          </a:solidFill>
-                          <a:latin typeface="Microsoft YaHei"/>
-                          <a:ea typeface="Microsoft YaHei"/>
-                        </a:rPr>
-                        <a:t>增量年化销售</a:t>
+                        <a:rPr sz="950" b="0">
+                          <a:solidFill>
+                            <a:srgbClr val="1F2937"/>
+                          </a:solidFill>
+                          <a:latin typeface="Microsoft YaHei"/>
+                          <a:ea typeface="Microsoft YaHei"/>
+                        </a:rPr>
+                        <a:t>使用者购买完成率</a:t>
                       </a:r>
                     </a:p>
                   </a:txBody>
@@ -13468,14 +13842,60 @@
                     <a:lstStyle/>
                     <a:p>
                       <a:r>
-                        <a:rPr sz="1050" b="0">
-                          <a:solidFill>
-                            <a:srgbClr val="1F2937"/>
-                          </a:solidFill>
-                          <a:latin typeface="Microsoft YaHei"/>
-                          <a:ea typeface="Microsoft YaHei"/>
-                        </a:rPr>
-                        <a:t>2025Q3约100亿美元（年化节奏）→ 2025Q4／全年近120亿美元</a:t>
+                        <a:rPr sz="950" b="0">
+                          <a:solidFill>
+                            <a:srgbClr val="1F2937"/>
+                          </a:solidFill>
+                          <a:latin typeface="Microsoft YaHei"/>
+                          <a:ea typeface="Microsoft YaHei"/>
+                        </a:rPr>
+                        <a:t>—</a:t>
+                      </a:r>
+                    </a:p>
+                  </a:txBody>
+                  <a:tcPr marT="25400" marB="25400">
+                    <a:solidFill>
+                      <a:srgbClr val="F1F5F9"/>
+                    </a:solidFill>
+                  </a:tcPr>
+                </a:tc>
+                <a:tc>
+                  <a:txBody>
+                    <a:bodyPr wrap="square"/>
+                    <a:lstStyle/>
+                    <a:p>
+                      <a:r>
+                        <a:rPr sz="950" b="0">
+                          <a:solidFill>
+                            <a:srgbClr val="1F2937"/>
+                          </a:solidFill>
+                          <a:latin typeface="Microsoft YaHei"/>
+                          <a:ea typeface="Microsoft YaHei"/>
+                        </a:rPr>
+                        <a:t>约高60%</a:t>
+                      </a:r>
+                    </a:p>
+                  </a:txBody>
+                  <a:tcPr marT="25400" marB="25400">
+                    <a:solidFill>
+                      <a:srgbClr val="F1F5F9"/>
+                    </a:solidFill>
+                  </a:tcPr>
+                </a:tc>
+                <a:tc>
+                  <a:txBody>
+                    <a:bodyPr wrap="square"/>
+                    <a:lstStyle/>
+                    <a:p>
+                      <a:r>
+                        <a:rPr sz="950" b="0">
+                          <a:solidFill>
+                            <a:srgbClr val="1F2937"/>
+                          </a:solidFill>
+                          <a:latin typeface="Microsoft YaHei"/>
+                          <a:ea typeface="Microsoft YaHei"/>
+                        </a:rPr>
+                        <a:t>对照构造为「使用者对未使用者」，观察性对比、含自选择偏差；本报告统一标注来源为2025Q4财报电话会</a:t>
                       </a:r>
                     </a:p>
                   </a:txBody>
@@ -13493,14 +13913,14 @@
                     <a:lstStyle/>
                     <a:p>
                       <a:r>
-                        <a:rPr sz="1050" b="0">
-                          <a:solidFill>
-                            <a:srgbClr val="1F2937"/>
-                          </a:solidFill>
-                          <a:latin typeface="Microsoft YaHei"/>
-                          <a:ea typeface="Microsoft YaHei"/>
-                        </a:rPr>
-                        <a:t>使用者购买完成率</a:t>
+                        <a:rPr sz="950" b="0">
+                          <a:solidFill>
+                            <a:srgbClr val="1F2937"/>
+                          </a:solidFill>
+                          <a:latin typeface="Microsoft YaHei"/>
+                          <a:ea typeface="Microsoft YaHei"/>
+                        </a:rPr>
+                        <a:t>能力演进（A1→A4）</a:t>
                       </a:r>
                     </a:p>
                   </a:txBody>
@@ -13516,20 +13936,160 @@
                     <a:lstStyle/>
                     <a:p>
                       <a:r>
-                        <a:rPr sz="1050" b="0">
-                          <a:solidFill>
-                            <a:srgbClr val="1F2937"/>
-                          </a:solidFill>
-                          <a:latin typeface="Microsoft YaHei"/>
-                          <a:ea typeface="Microsoft YaHei"/>
-                        </a:rPr>
-                        <a:t>约高60%（相对未使用者）</a:t>
+                        <a:rPr sz="950" b="0">
+                          <a:solidFill>
+                            <a:srgbClr val="1F2937"/>
+                          </a:solidFill>
+                          <a:latin typeface="Microsoft YaHei"/>
+                          <a:ea typeface="Microsoft YaHei"/>
+                        </a:rPr>
+                        <a:t>2024-02美国App内beta；2024-07全量美国</a:t>
                       </a:r>
                     </a:p>
                   </a:txBody>
                   <a:tcPr marT="25400" marB="25400">
                     <a:solidFill>
                       <a:srgbClr val="FFFFFF"/>
+                    </a:solidFill>
+                  </a:tcPr>
+                </a:tc>
+                <a:tc>
+                  <a:txBody>
+                    <a:bodyPr wrap="square"/>
+                    <a:lstStyle/>
+                    <a:p>
+                      <a:r>
+                        <a:rPr sz="950" b="0">
+                          <a:solidFill>
+                            <a:srgbClr val="1F2937"/>
+                          </a:solidFill>
+                          <a:latin typeface="Microsoft YaHei"/>
+                          <a:ea typeface="Microsoft YaHei"/>
+                        </a:rPr>
+                        <a:t>2025年累计超50项升级；2026-02定位为「the AI agent」</a:t>
+                      </a:r>
+                    </a:p>
+                  </a:txBody>
+                  <a:tcPr marT="25400" marB="25400">
+                    <a:solidFill>
+                      <a:srgbClr val="FFFFFF"/>
+                    </a:solidFill>
+                  </a:tcPr>
+                </a:tc>
+                <a:tc>
+                  <a:txBody>
+                    <a:bodyPr wrap="square"/>
+                    <a:lstStyle/>
+                    <a:p>
+                      <a:r>
+                        <a:rPr sz="850" b="0">
+                          <a:solidFill>
+                            <a:srgbClr val="1F2937"/>
+                          </a:solidFill>
+                          <a:latin typeface="Microsoft YaHei"/>
+                          <a:ea typeface="Microsoft YaHei"/>
+                        </a:rPr>
+                        <a:t>升级含账户记忆、盯价自动购买、视觉搜索、Buy for Me跨站代购；沿既有账户与支付关系推进，不需新建信任</a:t>
+                      </a:r>
+                    </a:p>
+                  </a:txBody>
+                  <a:tcPr marT="25400" marB="25400">
+                    <a:solidFill>
+                      <a:srgbClr val="FFFFFF"/>
+                    </a:solidFill>
+                  </a:tcPr>
+                </a:tc>
+              </a:tr>
+              <a:tr h="420624">
+                <a:tc>
+                  <a:txBody>
+                    <a:bodyPr wrap="square"/>
+                    <a:lstStyle/>
+                    <a:p>
+                      <a:r>
+                        <a:rPr sz="950" b="0">
+                          <a:solidFill>
+                            <a:srgbClr val="1F2937"/>
+                          </a:solidFill>
+                          <a:latin typeface="Microsoft YaHei"/>
+                          <a:ea typeface="Microsoft YaHei"/>
+                        </a:rPr>
+                        <a:t>战略配套</a:t>
+                      </a:r>
+                    </a:p>
+                  </a:txBody>
+                  <a:tcPr marT="25400" marB="25400">
+                    <a:solidFill>
+                      <a:srgbClr val="F1F5F9"/>
+                    </a:solidFill>
+                  </a:tcPr>
+                </a:tc>
+                <a:tc>
+                  <a:txBody>
+                    <a:bodyPr wrap="square"/>
+                    <a:lstStyle/>
+                    <a:p>
+                      <a:r>
+                        <a:rPr sz="950" b="0">
+                          <a:solidFill>
+                            <a:srgbClr val="1F2937"/>
+                          </a:solidFill>
+                          <a:latin typeface="Microsoft YaHei"/>
+                          <a:ea typeface="Microsoft YaHei"/>
+                        </a:rPr>
+                        <a:t>—</a:t>
+                      </a:r>
+                    </a:p>
+                  </a:txBody>
+                  <a:tcPr marT="25400" marB="25400">
+                    <a:solidFill>
+                      <a:srgbClr val="F1F5F9"/>
+                    </a:solidFill>
+                  </a:tcPr>
+                </a:tc>
+                <a:tc>
+                  <a:txBody>
+                    <a:bodyPr wrap="square"/>
+                    <a:lstStyle/>
+                    <a:p>
+                      <a:r>
+                        <a:rPr sz="950" b="0">
+                          <a:solidFill>
+                            <a:srgbClr val="1F2937"/>
+                          </a:solidFill>
+                          <a:latin typeface="Microsoft YaHei"/>
+                          <a:ea typeface="Microsoft YaHei"/>
+                        </a:rPr>
+                        <a:t>2025-11起诉Perplexity，2026-03获初步禁令</a:t>
+                      </a:r>
+                    </a:p>
+                  </a:txBody>
+                  <a:tcPr marT="25400" marB="25400">
+                    <a:solidFill>
+                      <a:srgbClr val="F1F5F9"/>
+                    </a:solidFill>
+                  </a:tcPr>
+                </a:tc>
+                <a:tc>
+                  <a:txBody>
+                    <a:bodyPr wrap="square"/>
+                    <a:lstStyle/>
+                    <a:p>
+                      <a:r>
+                        <a:rPr sz="950" b="0">
+                          <a:solidFill>
+                            <a:srgbClr val="1F2937"/>
+                          </a:solidFill>
+                          <a:latin typeface="Microsoft YaHei"/>
+                          <a:ea typeface="Microsoft YaHei"/>
+                        </a:rPr>
+                        <a:t>自建站内代理（M5）与排除未授权外部代理（M3b）是同一战略的两面</a:t>
+                      </a:r>
+                    </a:p>
+                  </a:txBody>
+                  <a:tcPr marT="25400" marB="25400">
+                    <a:solidFill>
+                      <a:srgbClr val="F1F5F9"/>
                     </a:solidFill>
                   </a:tcPr>
                 </a:tc>
@@ -13573,7 +14133,7 @@
                 <a:latin typeface="Microsoft YaHei"/>
                 <a:ea typeface="Microsoft YaHei"/>
               </a:rPr>
-              <a:t>数据等级P2（公司口径，来自亚马逊2025Q3／Q4财报电话会）。归因局限见下一页。</a:t>
+              <a:t>数据等级P2（公司口径，来自亚马逊2025Q3／Q4财报电话会）。两处归因局限与四条待验证假设见下一页；分口径效果对照见第27页图9。</a:t>
             </a:r>
           </a:p>
         </p:txBody>
@@ -13715,7 +14275,7 @@
                 <a:latin typeface="Microsoft YaHei"/>
                 <a:ea typeface="Microsoft YaHei"/>
               </a:rPr>
-              <a:t>图9  站内AI导购的公开效果证据只有一个数据点（面板①）</a:t>
+              <a:t>图9  站内AI导购在「个体层相对效果」构造上只有一个公开数据点（面板①）</a:t>
             </a:r>
           </a:p>
         </p:txBody>
@@ -13961,7 +14521,7 @@
                 <a:latin typeface="Microsoft YaHei"/>
                 <a:ea typeface="Microsoft YaHei"/>
               </a:rPr>
-              <a:t>Rufus：两处归因局限与四条可复制的产品规律</a:t>
+              <a:t>Rufus：两处归因局限与四条待验证的可迁移假设（样本量为1）</a:t>
             </a:r>
           </a:p>
         </p:txBody>
@@ -14047,7 +14607,7 @@
           <a:p>
             <a:pPr algn="l" marL="402336" indent="0">
               <a:spcAft>
-                <a:spcPts val="2788"/>
+                <a:spcPts val="2354"/>
               </a:spcAft>
             </a:pPr>
             <a:r>
@@ -14081,7 +14641,7 @@
           <a:p>
             <a:pPr algn="l" marL="402336" indent="0">
               <a:spcAft>
-                <a:spcPts val="2788"/>
+                <a:spcPts val="2354"/>
               </a:spcAft>
             </a:pPr>
             <a:r>
@@ -14109,13 +14669,13 @@
                 <a:latin typeface="Microsoft YaHei"/>
                 <a:ea typeface="Microsoft YaHei"/>
               </a:rPr>
-              <a:t>● 规律一：嵌入既有动线而非新建独立入口</a:t>
+              <a:t>● 假设一：嵌入既有动线优于新建独立入口</a:t>
             </a:r>
           </a:p>
           <a:p>
             <a:pPr algn="l" marL="402336" indent="0">
               <a:spcAft>
-                <a:spcPts val="2788"/>
+                <a:spcPts val="2354"/>
               </a:spcAft>
             </a:pPr>
             <a:r>
@@ -14126,7 +14686,7 @@
                 <a:latin typeface="Microsoft YaHei"/>
                 <a:ea typeface="Microsoft YaHei"/>
               </a:rPr>
-              <a:t>Rufus嵌入搜索与商品详情页，而非作为独立标签页存在——这是其能在一年内触达3亿用户的结构性原因</a:t>
+              <a:t>Rufus嵌入搜索与商品详情页而非独立标签页，一年内触达3亿用户。这是与快速触达相一致的设计选择，「不是已证明的因果原因」——样本量为1、无反事实，且Rufus位于全美最大电商App内，3亿中有多少来自母体流量无法区分。证伪：同App内独立入口对嵌入式入口分流，若触达率差异不足30%则假设不成立</a:t>
             </a:r>
           </a:p>
           <a:p>
@@ -14143,13 +14703,13 @@
                 <a:latin typeface="Microsoft YaHei"/>
                 <a:ea typeface="Microsoft YaHei"/>
               </a:rPr>
-              <a:t>● 规律二：答案内直接给出可交易对象</a:t>
+              <a:t>● 假设二：答案内直接给出可交易对象优于仅给文字建议</a:t>
             </a:r>
           </a:p>
           <a:p>
             <a:pPr algn="l" marL="402336" indent="0">
               <a:spcAft>
-                <a:spcPts val="2788"/>
+                <a:spcPts val="2354"/>
               </a:spcAft>
             </a:pPr>
             <a:r>
@@ -14160,7 +14720,7 @@
                 <a:latin typeface="Microsoft YaHei"/>
                 <a:ea typeface="Microsoft YaHei"/>
               </a:rPr>
-              <a:t>回答中直接呈现商品而非仅给文字建议；这与第一章关于人均IPV的分析直接呼应</a:t>
+              <a:t>Rufus回答中直接呈现商品；与第一章关于每轮对话产出的分析同向。证伪：即建议一的证伪条件（人均IPV相对提升的95%CI上界低于+30%）</a:t>
             </a:r>
           </a:p>
           <a:p>
@@ -14177,13 +14737,13 @@
                 <a:latin typeface="Microsoft YaHei"/>
                 <a:ea typeface="Microsoft YaHei"/>
               </a:rPr>
-              <a:t>● 规律三与规律四：复用自有语料；沿既有账户关系升级能力</a:t>
+              <a:t>● 假设三与假设四：复用自有语料；沿既有账户关系升级能力</a:t>
             </a:r>
           </a:p>
           <a:p>
             <a:pPr algn="l" marL="402336" indent="0">
               <a:spcAft>
-                <a:spcPts val="2788"/>
+                <a:spcPts val="2354"/>
               </a:spcAft>
             </a:pPr>
             <a:r>
@@ -14194,7 +14754,7 @@
                 <a:latin typeface="Microsoft YaHei"/>
                 <a:ea typeface="Microsoft YaHei"/>
               </a:rPr>
-              <a:t>商品评论与问答语料是站内导购质量的差异化来源，站外通用AI难以等量获得；能力由A1问答演进至A4授权代理（盯价到价自动买、跨站代购），沿用户既有账户与支付关系推进</a:t>
+              <a:t>商品评论与问答语料为站内独有，站外通用AI难以等量获得——证伪：盲测中屏蔽自有评论语料后，答案采纳率下降不足10%则假设不成立。能力由A1问答演进至A4授权代理，沿用户既有账户与支付关系推进——证伪：A4授权开启率与「是否已有支付绑定」无显著相关（95%CI含0）则假设不成立</a:t>
             </a:r>
           </a:p>
           <a:p>
@@ -14217,7 +14777,7 @@
           <a:p>
             <a:pPr algn="l" marL="402336" indent="0">
               <a:spcAft>
-                <a:spcPts val="2788"/>
+                <a:spcPts val="2354"/>
               </a:spcAft>
             </a:pPr>
             <a:r>
@@ -16019,7 +16579,7 @@
           <a:p>
             <a:pPr algn="l" marL="402336" indent="0">
               <a:spcAft>
-                <a:spcPts val="4600"/>
+                <a:spcPts val="4380"/>
               </a:spcAft>
             </a:pPr>
             <a:r>
@@ -16053,7 +16613,7 @@
           <a:p>
             <a:pPr algn="l" marL="402336" indent="0">
               <a:spcAft>
-                <a:spcPts val="4600"/>
+                <a:spcPts val="4380"/>
               </a:spcAft>
             </a:pPr>
             <a:r>
@@ -16087,7 +16647,7 @@
           <a:p>
             <a:pPr algn="l" marL="402336" indent="0">
               <a:spcAft>
-                <a:spcPts val="4600"/>
+                <a:spcPts val="4380"/>
               </a:spcAft>
             </a:pPr>
             <a:r>
@@ -16098,7 +16658,7 @@
                 <a:latin typeface="Microsoft YaHei"/>
                 <a:ea typeface="Microsoft YaHei"/>
               </a:rPr>
-              <a:t>高流量App显著位置可快速获得DAU（淘宝侧500万），但不能自动获得商品决策行为（每轮对话产出0.085次）；用户主动触发的场景规模小（43万）但每轮产出高（0.357次）。意图强度与产品形态的相对贡献需通过分层实验区分（证伪条件见第18页）</a:t>
+              <a:t>高流量App显著位置可快速获得DAU（淘宝侧500万），但不能自动获得商品决策行为（每轮对话产出0.085次）；用户主动触发的场景规模小（43万）但每轮产出高（0.357次）。意图强度与产品形态的相对贡献需通过分层实验区分（证伪条件见第19页）</a:t>
             </a:r>
           </a:p>
           <a:p>
@@ -16115,13 +16675,13 @@
                 <a:latin typeface="Microsoft YaHei"/>
                 <a:ea typeface="Microsoft YaHei"/>
               </a:rPr>
-              <a:t>● 四、站内AI导购的公开效果证据只有一个数据点，且是观察性的</a:t>
+              <a:t>● 四、站内AI导购在「个体层相对效果」构造上只有一个公开数据点，且是观察性的</a:t>
             </a:r>
           </a:p>
           <a:p>
             <a:pPr algn="l" marL="402336" indent="0">
               <a:spcAft>
-                <a:spcPts val="4600"/>
+                <a:spcPts val="4380"/>
               </a:spcAft>
             </a:pPr>
             <a:r>
@@ -16132,7 +16692,7 @@
                 <a:latin typeface="Microsoft YaHei"/>
                 <a:ea typeface="Microsoft YaHei"/>
               </a:rPr>
-              <a:t>图9面板①只有Rufus一根柱。Salesforce企业分组与Adobe／Shopify渠道数据分属另两种对照构造，不能替代。建立随机对照实验能力不是可选项，而是获得可决策数字的唯一途径</a:t>
+              <a:t>图9面板①只有Rufus一根柱。Salesforce企业分组与Adobe／Shopify渠道数据分属另两种对照构造；亚马逊另披露的「增量年化销售近120亿美元」为绝对额且归因方法未完整披露，不可跨案例比较，也不能替代相对效果证据。建立随机对照实验能力不是可选项，而是获得可决策数字的唯一途径</a:t>
             </a:r>
           </a:p>
         </p:txBody>
@@ -16354,7 +16914,7 @@
                 <a:latin typeface="Microsoft YaHei"/>
                 <a:ea typeface="Microsoft YaHei"/>
               </a:rPr>
-              <a:t>● 五、站内AI导购的可复制产品规律有四条</a:t>
+              <a:t>● 五、站内AI导购有四条待验证的可迁移假设（来自Rufus单一案例，样本量为1）</a:t>
             </a:r>
           </a:p>
           <a:p>
@@ -16371,7 +16931,7 @@
                 <a:latin typeface="Microsoft YaHei"/>
                 <a:ea typeface="Microsoft YaHei"/>
               </a:rPr>
-              <a:t>嵌入既有动线而非新建独立入口；答案内直接给出可交易对象而非仅给文字建议；复用自有语料（评论、问答）作为质量差异化来源；沿既有账户与支付关系推进能力升级（A1问答→A4授权代理）</a:t>
+              <a:t>嵌入既有动线而非新建独立入口；答案内直接给出可交易对象；复用自有语料（评论、问答）作为质量差异化来源；沿既有账户与支付关系推进能力升级（A1→A4）。四条各附证伪条件（见第28页）；在验证前不应作为「规律」引用</a:t>
             </a:r>
           </a:p>
           <a:p>
@@ -16388,7 +16948,7 @@
                 <a:latin typeface="Microsoft YaHei"/>
                 <a:ea typeface="Microsoft YaHei"/>
               </a:rPr>
-              <a:t>● 六、变现前置会抑制规模，当前主流是不直接向用户或商家收费</a:t>
+              <a:t>● 六、当前主流是不直接向用户或商家收费——本报告不断言「变现前置会抑制规模」</a:t>
             </a:r>
           </a:p>
           <a:p>
@@ -16405,7 +16965,7 @@
                 <a:latin typeface="Microsoft YaHei"/>
                 <a:ea typeface="Microsoft YaHei"/>
               </a:rPr>
-              <a:t>站内AI导购的价值体现为转化提升与留存，而非独立收入项。站外入口的变现（约4%佣金、联盟分佣、生态内归因结算）仍在探索，规模远小于流量增速所暗示的水平。费率侧的判断：AI渠道总成本约7%~9%低于Amazon市场佣金约15%，对商家净有利；但费率可调、交易关系一旦让出难以收回——拒绝的不是当前费率，而是费率的未来定价权</a:t>
+              <a:t>站内AI导购的价值体现为转化提升与留存，而非独立收入项。站外入口的变现（约4%佣金、联盟分佣、生态内归因结算）仍在探索，规模远小于流量增速所暗示的水平。此处只描述现状：本报告未取得任何「早期变现导致规模受抑」的对照证据，且费率侧证据方向相反——商家的抵触对象是Merchant of Record的让渡，而非费率水平。费率侧的判断：AI渠道总成本约7%~9%低于Amazon市场佣金约15%，对商家净有利；但费率可调、交易关系一旦让出难以收回——拒绝的不是当前费率，而是费率的未来定价权</a:t>
             </a:r>
           </a:p>
           <a:p>
@@ -16581,7 +17141,7 @@
                 <a:latin typeface="Microsoft YaHei"/>
                 <a:ea typeface="Microsoft YaHei"/>
               </a:rPr>
-              <a:t>六层功能切分：L1–L4为交易主链，L5–L6为使能层</a:t>
+              <a:t>六层功能切分（按必要性判据）：L1–L4为交易主链，L5–L6为使能层</a:t>
             </a:r>
           </a:p>
         </p:txBody>
@@ -16645,10 +17205,10 @@
                 <a:tableStyleId>{5C22544A-7EE6-4342-B048-85BDC9FD1C3A}</a:tableStyleId>
               </a:tblPr>
               <a:tblGrid>
-                <a:gridCol w="1920240"/>
-                <a:gridCol w="2103120"/>
-                <a:gridCol w="2651760"/>
+                <a:gridCol w="2011680"/>
+                <a:gridCol w="1828800"/>
                 <a:gridCol w="2468880"/>
+                <a:gridCol w="2834640"/>
                 <a:gridCol w="1828800"/>
               </a:tblGrid>
               <a:tr h="420624">
@@ -17482,8 +18042,8 @@
         </p:nvSpPr>
         <p:spPr>
           <a:xfrm>
-            <a:off x="685800" y="5857875"/>
-            <a:ext cx="10881360" cy="497204"/>
+            <a:off x="685800" y="5692140"/>
+            <a:ext cx="10881360" cy="662940"/>
           </a:xfrm>
           <a:prstGeom prst="rect">
             <a:avLst/>
@@ -17509,7 +18069,7 @@
                 <a:latin typeface="Microsoft YaHei"/>
                 <a:ea typeface="Microsoft YaHei"/>
               </a:rPr>
-              <a:t>两处不单列为层的横向切面：①广告与流量变现是L2、L3的收入侧规则（核心矛盾为AI答案位与竞价位冲突）；②数据与合规横向贯穿六层。穷尽性检验：沿资金流与数据流回溯，任一笔交易均落入L1–L4；不进入该笔交易资金流的支出（GEO、SaaS、供应链算法）落入L5–L6。三种竞合模式：垂直自建闭环（M4、M5）／生态联盟与协议接入（M2、M3a）／中立第三方（M3b式绕行代理在Amazon诉Perplexity获禁令后基本关闭，中立化只能走协议授权路径）。</a:t>
+              <a:t>判据（必要性）：主链＝该环节缺失则这笔交易无法以AI方式完成；使能层＝该环节缺失交易仍可完成，只是效率或被发现概率下降。不采用「是否进入单笔交易资金流」作判据，因其分不开L1与L5（模型算力成本同样不进入单笔结算）。穷尽性检验：对任一笔交易做「移除测试」，依次假设某环节缺失，无法以AI方式完成者属L1–L4，仍可完成者属L5–L6。两处不单列为层的横向切面：①广告与流量变现是L2、L3的收入侧规则（核心矛盾为AI答案位与竞价位冲突）；②数据与合规横向贯穿六层。三种竞合模式：垂直自建闭环（M4、M5）／生态联盟与协议接入（M2、M3a）／中立第三方（M3b式绕行代理在Amazon诉Perplexity获禁令后基本关闭，中立化只能走协议授权路径）。</a:t>
             </a:r>
           </a:p>
         </p:txBody>
@@ -18669,7 +19229,7 @@
           <a:p>
             <a:pPr algn="l" marL="201168" indent="0">
               <a:spcAft>
-                <a:spcPts val="3291"/>
+                <a:spcPts val="3020"/>
               </a:spcAft>
             </a:pPr>
             <a:r>
@@ -18686,7 +19246,7 @@
           <a:p>
             <a:pPr algn="l" marL="201168" indent="0">
               <a:spcAft>
-                <a:spcPts val="3291"/>
+                <a:spcPts val="3020"/>
               </a:spcAft>
             </a:pPr>
             <a:r>
@@ -18703,7 +19263,7 @@
           <a:p>
             <a:pPr algn="l" marL="201168" indent="0">
               <a:spcAft>
-                <a:spcPts val="3291"/>
+                <a:spcPts val="3020"/>
               </a:spcAft>
             </a:pPr>
             <a:r>
@@ -18714,13 +19274,13 @@
                 <a:latin typeface="Microsoft YaHei"/>
                 <a:ea typeface="Microsoft YaHei"/>
               </a:rPr>
-              <a:t>● 站内AI导购方向的公开效果证据只有一个数据点（Rufus +60%，观察性对比）——自建随机对照实验能力是获得可决策数字的唯一途径（§2.4四、图9）</a:t>
+              <a:t>● 站内AI导购在「个体层相对效果」构造上只有一个公开数据点（Rufus +60%，观察性对比）；「增量年化销售」为绝对额且归因方法未完整披露，不可替代——自建随机对照实验能力是获得可决策数字的唯一途径（§2.4四、图9）</a:t>
             </a:r>
           </a:p>
           <a:p>
             <a:pPr algn="l" marL="201168" indent="0">
               <a:spcAft>
-                <a:spcPts val="3291"/>
+                <a:spcPts val="3020"/>
               </a:spcAft>
             </a:pPr>
             <a:r>
@@ -18737,7 +19297,7 @@
           <a:p>
             <a:pPr algn="l" marL="201168" indent="0">
               <a:spcAft>
-                <a:spcPts val="3291"/>
+                <a:spcPts val="3020"/>
               </a:spcAft>
             </a:pPr>
             <a:r>
@@ -18754,7 +19314,7 @@
           <a:p>
             <a:pPr algn="l" marL="201168" indent="0">
               <a:spcAft>
-                <a:spcPts val="3291"/>
+                <a:spcPts val="3020"/>
               </a:spcAft>
             </a:pPr>
             <a:r>
@@ -20019,7 +20579,7 @@
                           <a:latin typeface="Microsoft YaHei"/>
                           <a:ea typeface="Microsoft YaHei"/>
                         </a:rPr>
-                        <a:t>美国AI引荐流量增速与累计指数外推</a:t>
+                        <a:t>美国AI引荐流量增速与定基指数外推</a:t>
                       </a:r>
                     </a:p>
                   </a:txBody>
@@ -22921,7 +23481,7 @@
                 <a:latin typeface="Microsoft YaHei"/>
                 <a:ea typeface="Microsoft YaHei"/>
               </a:rPr>
-              <a:t>四项口径纪律：①区分「AI影响的销售」与「AI界面内完成的交易」，二者相差一个数量级以上；②区分观察性对比与因果效应，「使用者相对未使用者提升X%」应视为相关性上限；③区分实测、机构预测与本报告测算；④区间不取单点（如Perplexity月活0.3~0.45亿、Instant Checkout峰值商家约12~30家、Adobe与Shopify转化优势约+42%~+54%）。</a:t>
+              <a:t>四项口径纪律：①区分「AI影响的销售」与「AI界面内完成的交易」——本报告未取得同地域同周期的配对数据，故不给出二者倍数关系，但二者不在同一量级；②区分观察性对比与因果效应，「使用者相对未使用者提升X%」应视为相关性上限；③区分实测、机构预测与本报告测算；④区间不取单点（如Perplexity月活0.3~0.45亿、Instant Checkout峰值商家约12~30家、Adobe与Shopify转化优势约+42%~+54%）。</a:t>
             </a:r>
           </a:p>
         </p:txBody>
@@ -23160,7 +23720,7 @@
                 <a:latin typeface="Microsoft YaHei"/>
                 <a:ea typeface="Microsoft YaHei"/>
               </a:rPr>
-              <a:t>美国零售网站AI来源流量转化率一年内由低于非AI渠道38%转为高于42%，单次访问收入高37%（Adobe）。但这是渠道间观察性对比，同期该渠道累计流量指数由100升至493、访客构成必然大幅迁移，反转中来自渠道效率与来自构成变化的比例无法从公开数据分离。增速已由+1151%回落至+269%</a:t>
+              <a:t>美国零售网站AI来源流量转化率一年内由低于非AI渠道38%转为高于42%，单次访问收入高37%（Adobe）。但这是渠道间观察性对比，同期该渠道定基流量指数由100升至493、访客构成必然大幅迁移，反转中来自渠道效率与来自构成变化的比例无法从公开数据分离。增速已由+1151%回落至+269%</a:t>
             </a:r>
           </a:p>
           <a:p>
@@ -23211,7 +23771,7 @@
                 <a:latin typeface="Microsoft YaHei"/>
                 <a:ea typeface="Microsoft YaHei"/>
               </a:rPr>
-              <a:t>● 三、站内AI导购的公开效果证据只有一个数据点</a:t>
+              <a:t>● 三、站内AI导购在「个体层相对效果」这一构造上只有一个公开数据点</a:t>
             </a:r>
           </a:p>
           <a:p>
@@ -23228,7 +23788,7 @@
                 <a:latin typeface="Microsoft YaHei"/>
                 <a:ea typeface="Microsoft YaHei"/>
               </a:rPr>
-              <a:t>全球范围内可追溯的站内AI导购效果数据仅有Amazon Rufus的「使用者购买完成率高约60%」（2025Q4财报电话会，观察性对比）。Salesforce企业分组与Adobe／Shopify渠道数据分属另两种对照构造，不能替代。自建实验能力是获得可决策数字的唯一途径</a:t>
+              <a:t>以「使用者对未使用者」为对照的效果数据全球仅有Amazon Rufus的「购买完成率高约60%」（2025Q4财报电话会，观察性对比）。Salesforce企业分组与Adobe／Shopify渠道数据分属另两种对照构造；亚马逊另披露的「增量年化销售近120亿美元」为绝对额、归因方法未完整披露，不可替代相对效果证据。自建实验能力是获得可决策数字的唯一途径</a:t>
             </a:r>
           </a:p>
         </p:txBody>
@@ -23717,7 +24277,7 @@
                 <a:latin typeface="Microsoft YaHei"/>
                 <a:ea typeface="Microsoft YaHei"/>
               </a:rPr>
-              <a:t>图1  美国零售网站AI引荐流量：已实现增速与累计指数情景外推（不含中国市场）</a:t>
+              <a:t>图1  美国零售网站AI引荐流量：已实现增速与定基指数情景外推（不含中国市场）</a:t>
             </a:r>
           </a:p>
         </p:txBody>
@@ -24813,7 +25373,7 @@
                 <a:latin typeface="Microsoft YaHei"/>
                 <a:ea typeface="Microsoft YaHei"/>
               </a:rPr>
-              <a:t>数据来源：Adobe Digital Insights（2026-04）。关键口径：渠道间观察性对比、因果性未被证明，未控制访客构成差异；同期该渠道流量增至约4.9倍（累计指数100→493），访客构成必然迁移，反转的归因无法从公开数据分离。</a:t>
+              <a:t>数据来源：Adobe Digital Insights（2026-04）。关键口径：渠道间观察性对比、因果性未被证明，未控制访客构成差异；同期该渠道流量大幅扩张（Q1对Q1定基指数100→493即4.93倍，3月对3月约3.7倍），访客构成必然迁移，反转的归因无法从公开数据分离。</a:t>
             </a:r>
           </a:p>
         </p:txBody>

--- a/report/AI电商行业研究报告.pptx
+++ b/report/AI电商行业研究报告.pptx
@@ -4304,8 +4304,8 @@
         </p:nvSpPr>
         <p:spPr>
           <a:xfrm>
-            <a:off x="685800" y="6023610"/>
-            <a:ext cx="10881360" cy="331470"/>
+            <a:off x="685800" y="5857875"/>
+            <a:ext cx="10881360" cy="497204"/>
           </a:xfrm>
           <a:prstGeom prst="rect">
             <a:avLst/>
@@ -4331,7 +4331,7 @@
                 <a:latin typeface="Microsoft YaHei"/>
                 <a:ea typeface="Microsoft YaHei"/>
               </a:rPr>
-              <a:t>结论：用户愿意在AI里研究商品（流量与转化质量均改善），但不需要在AI里结账。公开复盘归因于单件即时结账缺少购物车、优惠码、会员权益、税费计算与实时库存同步，以及商家不愿让出Merchant of Record身份。</a:t>
+              <a:t>归因分三层，证据强度不同：①商家供给明确不足（峰值约12至30家，且OpenAI改走商家自有应用）——证据强；②用户对「在AI里研究商品」的需求明确存在（见第9页）——证据强；③用户对「在AI界面内结账」的需求强度无可比基准，本报告不下判断——唯一数据是首月约8%试用率，属第三方复盘的量级参考。公开复盘的机制性解释是单件即时结账缺少购物车、优惠码、会员权益、税费计算与实时库存同步，以及商家不愿让出MoR——两者都在供给侧。</a:t>
             </a:r>
           </a:p>
         </p:txBody>
@@ -6890,7 +6890,7 @@
                 <a:latin typeface="Microsoft YaHei"/>
                 <a:ea typeface="Microsoft YaHei"/>
               </a:rPr>
-              <a:t>七点分析</a:t>
+              <a:t>六点分析（第七点为§1.7的两层使用限制）</a:t>
             </a:r>
           </a:p>
         </p:txBody>
@@ -7333,7 +7333,7 @@
                 <a:latin typeface="Microsoft YaHei"/>
                 <a:ea typeface="Microsoft YaHei"/>
               </a:rPr>
-              <a:t>建议一：把人均IPV设为首要指标，切入点是「每轮对话产出」</a:t>
+              <a:t>建议一：把人均IPV设为唯一首要考核指标，切入点是「每轮对话产出」</a:t>
             </a:r>
           </a:p>
         </p:txBody>
@@ -7413,13 +7413,47 @@
                 <a:latin typeface="Microsoft YaHei"/>
                 <a:ea typeface="Microsoft YaHei"/>
               </a:rPr>
+              <a:t>● 前置条件（不可跳过）：先消除§1.6的两个敞口，再切换指标</a:t>
+            </a:r>
+          </a:p>
+          <a:p>
+            <a:pPr algn="l" marL="402336" indent="0">
+              <a:spcAft>
+                <a:spcPts val="1704"/>
+              </a:spcAft>
+            </a:pPr>
+            <a:r>
+              <a:rPr sz="1000" b="0">
+                <a:solidFill>
+                  <a:srgbClr val="6B7280"/>
+                </a:solidFill>
+                <a:latin typeface="Microsoft YaHei"/>
+                <a:ea typeface="Microsoft YaHei"/>
+              </a:rPr>
+              <a:t>联合敏感度：交互层差距＝4.22÷(u×s)，u为淘宝侧IPV低估倍数（2~3）、s为两侧人均日会话数之比（≤2）。当u×s达到约3.5及以上时，交互层差距降至留存层差距（1.10~1.20倍）以下，中心结论方向反转。故建议二的P0第1步（定u、定s、核查千问IPV是否为定义性产物）必须先行</a:t>
+            </a:r>
+          </a:p>
+          <a:p>
+            <a:pPr algn="l" marL="201168" indent="0">
+              <a:spcAft>
+                <a:spcPts val="200"/>
+              </a:spcAft>
+            </a:pPr>
+            <a:r>
+              <a:rPr sz="1150" b="1">
+                <a:solidFill>
+                  <a:srgbClr val="1F2937"/>
+                </a:solidFill>
+                <a:latin typeface="Microsoft YaHei"/>
+                <a:ea typeface="Microsoft YaHei"/>
+              </a:rPr>
               <a:t>● 可达空间对比（注意：不是边际弹性对比）</a:t>
             </a:r>
           </a:p>
           <a:p>
             <a:pPr algn="l" marL="402336" indent="0">
               <a:spcAft>
-                <a:spcPts val="2905"/>
+                <a:spcPts val="1704"/>
               </a:spcAft>
             </a:pPr>
             <a:r>
@@ -7453,7 +7487,7 @@
           <a:p>
             <a:pPr algn="l" marL="402336" indent="0">
               <a:spcAft>
-                <a:spcPts val="2905"/>
+                <a:spcPts val="1704"/>
               </a:spcAft>
             </a:pPr>
             <a:r>
@@ -7487,7 +7521,7 @@
           <a:p>
             <a:pPr algn="l" marL="402336" indent="0">
               <a:spcAft>
-                <a:spcPts val="2905"/>
+                <a:spcPts val="1704"/>
               </a:spcAft>
             </a:pPr>
             <a:r>
@@ -7521,7 +7555,7 @@
           <a:p>
             <a:pPr algn="l" marL="402336" indent="0">
               <a:spcAft>
-                <a:spcPts val="2905"/>
+                <a:spcPts val="1704"/>
               </a:spcAft>
             </a:pPr>
             <a:r>
@@ -7555,7 +7589,7 @@
           <a:p>
             <a:pPr algn="l" marL="402336" indent="0">
               <a:spcAft>
-                <a:spcPts val="2905"/>
+                <a:spcPts val="1704"/>
               </a:spcAft>
             </a:pPr>
             <a:r>
@@ -9369,7 +9403,7 @@
                 <a:latin typeface="Microsoft YaHei"/>
                 <a:ea typeface="Microsoft YaHei"/>
               </a:rPr>
-              <a:t>查询集：GMV前20品类各15条自然语言购物查询（合计300条），覆盖品类词、场景词、价格约束三类句式；入口：豆包、千问、元宝、ChatGPT、Gemini；站外AI引荐的质量指标已反转但因果性未证明、增速放缓；本报告未取得AI引荐占零售总访问的份额，故不对基数高低下判断——此阶段的合理姿态是低成本占位与监测，而不是按外推规模做重投入。查询集：GMV前20品类各15条（合计300条），覆盖品类词、场景词、价格约束三类句式；入口：豆包、千问、元宝、ChatGPT、Gemini；频率：月度且查询集固定不变（新增查询单独建集，避免漂移污染趋势）；指标：被推荐率与被平替率；基线：首月结果即为基线；触发动作：被平替率环比升超5个百分点时回溯该品类feed完成度。配套投入是商品数据结构化与协议接入——跨协议可迁移的资产，单一平台的接入工作则不是</a:t>
+              <a:t>站外AI引荐的质量指标已反转但因果性未证明、增速放缓；本报告未取得AI引荐占零售总访问的份额，故不对基数高低下判断。查询集：GMV前20品类各15条（合计300条），覆盖品类词、场景词、价格约束三类句式；入口：豆包、千问、元宝、ChatGPT、Gemini；频率：月度且查询集固定不变（新增查询单独建集，避免漂移污染趋势）；指标：被推荐率与被平替率；基线：首月结果即为基线；触发动作：被平替率环比升超5个百分点时回溯该品类feed完成度。配套投入是商品数据结构化与协议接入——跨协议可迁移的资产，单一平台的接入工作则不是</a:t>
             </a:r>
           </a:p>
           <a:p>
@@ -11216,7 +11250,7 @@
                 <a:latin typeface="Microsoft YaHei"/>
                 <a:ea typeface="Microsoft YaHei"/>
               </a:rPr>
-              <a:t>● Google／Gemini与AI Mode（M2＋M3）　Gemini月活跃用户约6.5亿</a:t>
+              <a:t>● Google／Gemini与AI Mode（M2＋M3a）　Gemini月活跃用户约6.5亿</a:t>
             </a:r>
           </a:p>
           <a:p>
@@ -11250,7 +11284,7 @@
                 <a:latin typeface="Microsoft YaHei"/>
                 <a:ea typeface="Microsoft YaHei"/>
               </a:rPr>
-              <a:t>● Perplexity（M3）　月活跃用户约0.3至0.45亿；联盟分佣＋Comet浏览器代理</a:t>
+              <a:t>● Perplexity（联盟＝M3a／Comet代理＝M3b）　月活跃用户约0.3至0.45亿</a:t>
             </a:r>
           </a:p>
           <a:p>
@@ -11557,7 +11591,7 @@
                 <a:latin typeface="Microsoft YaHei"/>
                 <a:ea typeface="Microsoft YaHei"/>
               </a:rPr>
-              <a:t>● 元宝×京东（M3）　用户规模不列示（无权威披露）</a:t>
+              <a:t>● 元宝×京东（M3a）　用户规模不列示（无权威披露）</a:t>
             </a:r>
           </a:p>
           <a:p>
@@ -14686,7 +14720,7 @@
                 <a:latin typeface="Microsoft YaHei"/>
                 <a:ea typeface="Microsoft YaHei"/>
               </a:rPr>
-              <a:t>Rufus嵌入搜索与商品详情页而非独立标签页，一年内触达3亿用户。这是与快速触达相一致的设计选择，「不是已证明的因果原因」——样本量为1、无反事实，且Rufus位于全美最大电商App内，3亿中有多少来自母体流量无法区分。证伪：同App内独立入口对嵌入式入口分流，若触达率差异不足30%则假设不成立</a:t>
+              <a:t>Rufus嵌入搜索与商品详情页而非独立标签页；自2024-07全量美国到2025全年累计超3亿用户，历时约一年半。这是与快速触达相一致的设计选择，「不是已证明的因果原因」——样本量为1、无反事实，且Rufus位于全美最大电商App内，3亿中有多少来自母体流量无法区分。证伪：同App内独立入口对嵌入式入口分流，若触达率差异不足30%则假设不成立</a:t>
             </a:r>
           </a:p>
           <a:p>
@@ -19643,7 +19677,7 @@
                           <a:latin typeface="Microsoft YaHei"/>
                           <a:ea typeface="Microsoft YaHei"/>
                         </a:rPr>
-                        <a:t>建立口径与实验基建</a:t>
+                        <a:t>建立口径与实验基建，并消除两个敞口</a:t>
                       </a:r>
                     </a:p>
                   </a:txBody>
@@ -19666,7 +19700,7 @@
                           <a:latin typeface="Microsoft YaHei"/>
                           <a:ea typeface="Microsoft YaHei"/>
                         </a:rPr>
-                        <a:t>统一留存与回访率命名；明确AI链路商品浏览的归因规则；建立随机对照实验能力（参数见第19页），替代观察性对比</a:t>
+                        <a:t>统一留存与回访率命名；明确AI链路商品浏览的归因规则（定u）；采集两侧人均日会话数（定s）；核查千问侧IPV是否为定义性产物；建立随机对照实验能力（参数见第20页）。u×s＜3.5 是下一项的前置条件</a:t>
                       </a:r>
                     </a:p>
                   </a:txBody>
@@ -19714,7 +19748,7 @@
                           <a:latin typeface="Microsoft YaHei"/>
                           <a:ea typeface="Microsoft YaHei"/>
                         </a:rPr>
-                        <a:t>将人均IPV设为首要指标</a:t>
+                        <a:t>将人均IPV设为唯一首要考核指标</a:t>
                       </a:r>
                     </a:p>
                   </a:txBody>
@@ -19737,7 +19771,7 @@
                           <a:latin typeface="Microsoft YaHei"/>
                           <a:ea typeface="Microsoft YaHei"/>
                         </a:rPr>
-                        <a:t>DAU降为次级；阶段目标12个月0.22次、24个月0.35次（对齐中性档），1.00次为长期追赶参照；改造重点是「每轮对话产出」</a:t>
+                        <a:t>须待上一项完成且u×s＜3.5。DAU与有效商品浏览量降为次级／观察指标；阶段目标12个月0.22次、24个月0.35次（对齐中性档），1.00次为长期追赶参照；改造重点是「每轮对话产出」</a:t>
                       </a:r>
                     </a:p>
                   </a:txBody>
@@ -23754,7 +23788,7 @@
                 <a:latin typeface="Microsoft YaHei"/>
                 <a:ea typeface="Microsoft YaHei"/>
               </a:rPr>
-              <a:t>ChatGPT Instant Checkout 2025-09-29上线、2026-03-05下线，存续约5个月，峰值接入商家约12至30家；替代方案为AI界面内的商家自有应用与开放协议，商家保持Merchant of Record身份。这是本报告证据链最完整的结论，由产品决策、协议设计、司法判定三类异质证据支撑</a:t>
+              <a:t>ChatGPT Instant Checkout 2025-09-29上线、2026-03-05下线，存续约5个月，峰值接入商家约12至30家；替代方案为AI界面内的商家自有应用与开放协议，商家保持Merchant of Record身份。该结论的支撑证据涉及四个主体、三类性质（产品决策／协议设计／司法判定），其中司法判定的独立性最强。归因限定：可确证的是商家侧供给未起量；消费者对「在AI界面内结账」的需求强度无可比基准，本报告不下判断</a:t>
             </a:r>
           </a:p>
           <a:p>
@@ -24084,7 +24118,7 @@
                 <a:latin typeface="Microsoft YaHei"/>
                 <a:ea typeface="Microsoft YaHei"/>
               </a:rPr>
-              <a:t>● 五、核心建议：把人均IPV设为首要指标，切入点是「每轮对话产出」而非「对话轮次」</a:t>
+              <a:t>● 五、核心建议：把人均IPV设为唯一首要考核指标，切入点是「每轮对话产出」而非「对话轮次」</a:t>
             </a:r>
           </a:p>
           <a:p>

--- a/report/AI电商行业研究报告.pptx
+++ b/report/AI电商行业研究报告.pptx
@@ -4251,7 +4251,7 @@
                     <a:lstStyle/>
                     <a:p>
                       <a:r>
-                        <a:rPr sz="900" b="0">
+                        <a:rPr sz="1000" b="0">
                           <a:solidFill>
                             <a:srgbClr val="1F2937"/>
                           </a:solidFill>
@@ -4304,7 +4304,7 @@
         </p:nvSpPr>
         <p:spPr>
           <a:xfrm>
-            <a:off x="685800" y="5857875"/>
+            <a:off x="685800" y="5120640"/>
             <a:ext cx="10881360" cy="497204"/>
           </a:xfrm>
           <a:prstGeom prst="rect">
@@ -5288,8 +5288,8 @@
         </p:nvSpPr>
         <p:spPr>
           <a:xfrm>
-            <a:off x="685800" y="5857875"/>
-            <a:ext cx="10881360" cy="497204"/>
+            <a:off x="685800" y="5692140"/>
+            <a:ext cx="10881360" cy="662940"/>
           </a:xfrm>
           <a:prstGeom prst="rect">
             <a:avLst/>
@@ -5315,7 +5315,7 @@
                 <a:latin typeface="Microsoft YaHei"/>
                 <a:ea typeface="Microsoft YaHei"/>
               </a:rPr>
-              <a:t>数据性质：P3内部运营口径（淘宝AI导购与千问电商场景），由业务方提供，未公开披露、无第三方交叉验证，仅作内部对照，不与第三方监测数据混排。斜纹柱为本报告派生指标（浏览量＝DAU×人均IPV；每轮产出＝人均IPV÷人均对话轮次）。三点可比性限制：①两侧入口曝光机制不同，DAU意图强度不一致；②淘宝侧用户可绕过AI链路直达商品，归因规则可能低估其IPV（即便低估2~3倍，深度差距仍为约3~4.5倍）；③IPV为日度、轮次为会话内均值，相除为近似量级。</a:t>
+              <a:t>数据性质：P3内部运营口径（淘宝AI导购与千问电商场景），由业务方提供，未公开披露、无第三方交叉验证，仅作内部对照，不与第三方监测数据混排。斜纹柱为本报告派生指标（浏览量＝DAU×人均IPV；每轮产出＝人均IPV÷人均对话轮次）。三点可比性限制：①两侧入口曝光机制不同，DAU意图强度不一致；②淘宝侧用户可绕过AI链路直达商品，归因规则可能低估其IPV，低估倍数记为u（压力区间2~3）；③IPV为日度、轮次为会话内均值，两侧人均日会话数之比记为s（上限2）。联合反转边界（不可省略）：②③联合后交互层差距＝4.22÷(u×s)，当u×s达到约3.5及以上时降至留存层差距（1.10~1.20倍）以下、方向反转；本页结论只在u×s＜3.5范围内成立。选择改造路径的门槛更严（u＜约2）。</a:t>
             </a:r>
           </a:p>
         </p:txBody>
@@ -6475,7 +6475,7 @@
         </p:nvSpPr>
         <p:spPr>
           <a:xfrm>
-            <a:off x="685800" y="5857875"/>
+            <a:off x="685800" y="5120640"/>
             <a:ext cx="10881360" cy="497204"/>
           </a:xfrm>
           <a:prstGeom prst="rect">
@@ -8668,7 +8668,7 @@
                     <a:lstStyle/>
                     <a:p>
                       <a:r>
-                        <a:rPr sz="800" b="0">
+                        <a:rPr sz="900" b="0">
                           <a:solidFill>
                             <a:srgbClr val="1F2937"/>
                           </a:solidFill>
@@ -8721,7 +8721,7 @@
         </p:nvSpPr>
         <p:spPr>
           <a:xfrm>
-            <a:off x="685800" y="5857875"/>
+            <a:off x="685800" y="5120640"/>
             <a:ext cx="10881360" cy="497204"/>
           </a:xfrm>
           <a:prstGeom prst="rect">
@@ -11250,7 +11250,7 @@
         </p:nvSpPr>
         <p:spPr>
           <a:xfrm>
-            <a:off x="685800" y="6189345"/>
+            <a:off x="685800" y="5120640"/>
             <a:ext cx="10881360" cy="165735"/>
           </a:xfrm>
           <a:prstGeom prst="rect">
@@ -12128,7 +12128,7 @@
                     <a:lstStyle/>
                     <a:p>
                       <a:r>
-                        <a:rPr sz="850" b="0">
+                        <a:rPr sz="950" b="0">
                           <a:solidFill>
                             <a:srgbClr val="1F2937"/>
                           </a:solidFill>
@@ -12252,7 +12252,7 @@
         </p:nvSpPr>
         <p:spPr>
           <a:xfrm>
-            <a:off x="685800" y="6189345"/>
+            <a:off x="685800" y="5120640"/>
             <a:ext cx="10881360" cy="165735"/>
           </a:xfrm>
           <a:prstGeom prst="rect">
@@ -13245,7 +13245,7 @@
                     <a:lstStyle/>
                     <a:p>
                       <a:r>
-                        <a:rPr sz="850" b="0">
+                        <a:rPr sz="950" b="0">
                           <a:solidFill>
                             <a:srgbClr val="1F2937"/>
                           </a:solidFill>
@@ -13316,7 +13316,7 @@
                     <a:lstStyle/>
                     <a:p>
                       <a:r>
-                        <a:rPr sz="850" b="0">
+                        <a:rPr sz="950" b="0">
                           <a:solidFill>
                             <a:srgbClr val="1F2937"/>
                           </a:solidFill>
@@ -13339,7 +13339,7 @@
                     <a:lstStyle/>
                     <a:p>
                       <a:r>
-                        <a:rPr sz="850" b="0">
+                        <a:rPr sz="950" b="0">
                           <a:solidFill>
                             <a:srgbClr val="1F2937"/>
                           </a:solidFill>
@@ -13387,7 +13387,7 @@
                     <a:lstStyle/>
                     <a:p>
                       <a:r>
-                        <a:rPr sz="850" b="0">
+                        <a:rPr sz="950" b="0">
                           <a:solidFill>
                             <a:srgbClr val="1F2937"/>
                           </a:solidFill>
@@ -13653,7 +13653,7 @@
         </p:nvSpPr>
         <p:spPr>
           <a:xfrm>
-            <a:off x="685800" y="6189345"/>
+            <a:off x="685800" y="5120640"/>
             <a:ext cx="10881360" cy="165735"/>
           </a:xfrm>
           <a:prstGeom prst="rect">
@@ -15371,7 +15371,7 @@
         </p:nvSpPr>
         <p:spPr>
           <a:xfrm>
-            <a:off x="685800" y="5692140"/>
+            <a:off x="685800" y="5120640"/>
             <a:ext cx="10881360" cy="662940"/>
           </a:xfrm>
           <a:prstGeom prst="rect">
@@ -17693,7 +17693,7 @@
                 <a:latin typeface="Microsoft YaHei"/>
                 <a:ea typeface="Microsoft YaHei"/>
               </a:rPr>
-              <a:t>● 前置条件（不可跳过）：先消除§1.6的两个敞口，再切换指标</a:t>
+              <a:t>● 前置条件（不可跳过）：两条并列门槛，须同时满足</a:t>
             </a:r>
           </a:p>
           <a:p>
@@ -17710,7 +17710,7 @@
                 <a:latin typeface="Microsoft YaHei"/>
                 <a:ea typeface="Microsoft YaHei"/>
               </a:rPr>
-              <a:t>联合敏感度：交互层差距＝4.22÷(u×s)，u为淘宝侧IPV低估倍数（2~3）、s为两侧人均日会话数之比（≤2）。当u×s达到约3.5及以上时，交互层差距降至留存层差距（1.10~1.20倍）以下，中心结论方向反转。故建议二的P0第1步（定u、定s、核查千问IPV是否为定义性产物）必须先行</a:t>
+              <a:t>方向性门槛 u×s＜3.5——交互层差距＝4.22÷(u×s)，达到约3.5及以上时降至留存层差距（1.10~1.20倍）以下、方向反转；成本论证门槛 u＜约2——路径A终值不含u而路径B随u线性上升，故 u≈1.96 起A的增益优势消失、u≈2.75 起按单位推理成本计B反而更优。两条门槛均由建议二的P0第1步实测确定；在此之前，4.22倍与2.8倍都不能作为投入依据</a:t>
             </a:r>
           </a:p>
           <a:p>
@@ -18097,7 +18097,7 @@
                     <a:lstStyle/>
                     <a:p>
                       <a:r>
-                        <a:rPr sz="1000" b="1">
+                        <a:rPr sz="800" b="1">
                           <a:solidFill>
                             <a:srgbClr val="FFFFFF"/>
                           </a:solidFill>
@@ -18120,7 +18120,7 @@
                     <a:lstStyle/>
                     <a:p>
                       <a:r>
-                        <a:rPr sz="1000" b="1">
+                        <a:rPr sz="800" b="1">
                           <a:solidFill>
                             <a:srgbClr val="FFFFFF"/>
                           </a:solidFill>
@@ -18143,7 +18143,7 @@
                     <a:lstStyle/>
                     <a:p>
                       <a:r>
-                        <a:rPr sz="1000" b="1">
+                        <a:rPr sz="800" b="1">
                           <a:solidFill>
                             <a:srgbClr val="FFFFFF"/>
                           </a:solidFill>
@@ -18168,7 +18168,7 @@
                     <a:lstStyle/>
                     <a:p>
                       <a:r>
-                        <a:rPr sz="1000" b="0">
+                        <a:rPr sz="800" b="0">
                           <a:solidFill>
                             <a:srgbClr val="1F2937"/>
                           </a:solidFill>
@@ -18191,7 +18191,7 @@
                     <a:lstStyle/>
                     <a:p>
                       <a:r>
-                        <a:rPr sz="1000" b="0">
+                        <a:rPr sz="800" b="0">
                           <a:solidFill>
                             <a:srgbClr val="1F2937"/>
                           </a:solidFill>
@@ -18214,7 +18214,7 @@
                     <a:lstStyle/>
                     <a:p>
                       <a:r>
-                        <a:rPr sz="1000" b="0">
+                        <a:rPr sz="800" b="0">
                           <a:solidFill>
                             <a:srgbClr val="1F2937"/>
                           </a:solidFill>
@@ -18239,7 +18239,7 @@
                     <a:lstStyle/>
                     <a:p>
                       <a:r>
-                        <a:rPr sz="1000" b="0">
+                        <a:rPr sz="800" b="0">
                           <a:solidFill>
                             <a:srgbClr val="1F2937"/>
                           </a:solidFill>
@@ -18262,7 +18262,7 @@
                     <a:lstStyle/>
                     <a:p>
                       <a:r>
-                        <a:rPr sz="1000" b="0">
+                        <a:rPr sz="800" b="0">
                           <a:solidFill>
                             <a:srgbClr val="1F2937"/>
                           </a:solidFill>
@@ -18285,7 +18285,7 @@
                     <a:lstStyle/>
                     <a:p>
                       <a:r>
-                        <a:rPr sz="1000" b="0">
+                        <a:rPr sz="800" b="0">
                           <a:solidFill>
                             <a:srgbClr val="1F2937"/>
                           </a:solidFill>
@@ -18310,7 +18310,7 @@
                     <a:lstStyle/>
                     <a:p>
                       <a:r>
-                        <a:rPr sz="1000" b="0">
+                        <a:rPr sz="800" b="0">
                           <a:solidFill>
                             <a:srgbClr val="1F2937"/>
                           </a:solidFill>
@@ -18333,7 +18333,7 @@
                     <a:lstStyle/>
                     <a:p>
                       <a:r>
-                        <a:rPr sz="1000" b="0">
+                        <a:rPr sz="800" b="0">
                           <a:solidFill>
                             <a:srgbClr val="1F2937"/>
                           </a:solidFill>
@@ -18356,7 +18356,7 @@
                     <a:lstStyle/>
                     <a:p>
                       <a:r>
-                        <a:rPr sz="1000" b="0">
+                        <a:rPr sz="800" b="0">
                           <a:solidFill>
                             <a:srgbClr val="1F2937"/>
                           </a:solidFill>
@@ -18381,7 +18381,7 @@
                     <a:lstStyle/>
                     <a:p>
                       <a:r>
-                        <a:rPr sz="1000" b="0">
+                        <a:rPr sz="800" b="0">
                           <a:solidFill>
                             <a:srgbClr val="1F2937"/>
                           </a:solidFill>
@@ -18404,7 +18404,7 @@
                     <a:lstStyle/>
                     <a:p>
                       <a:r>
-                        <a:rPr sz="1000" b="0">
+                        <a:rPr sz="800" b="0">
                           <a:solidFill>
                             <a:srgbClr val="1F2937"/>
                           </a:solidFill>
@@ -18427,7 +18427,7 @@
                     <a:lstStyle/>
                     <a:p>
                       <a:r>
-                        <a:rPr sz="1000" b="0">
+                        <a:rPr sz="800" b="0">
                           <a:solidFill>
                             <a:srgbClr val="1F2937"/>
                           </a:solidFill>
@@ -18452,7 +18452,7 @@
                     <a:lstStyle/>
                     <a:p>
                       <a:r>
-                        <a:rPr sz="1000" b="0">
+                        <a:rPr sz="800" b="0">
                           <a:solidFill>
                             <a:srgbClr val="1F2937"/>
                           </a:solidFill>
@@ -18475,7 +18475,7 @@
                     <a:lstStyle/>
                     <a:p>
                       <a:r>
-                        <a:rPr sz="1000" b="0">
+                        <a:rPr sz="800" b="0">
                           <a:solidFill>
                             <a:srgbClr val="1F2937"/>
                           </a:solidFill>
@@ -18498,7 +18498,7 @@
                     <a:lstStyle/>
                     <a:p>
                       <a:r>
-                        <a:rPr sz="900" b="0">
+                        <a:rPr sz="800" b="0">
                           <a:solidFill>
                             <a:srgbClr val="1F2937"/>
                           </a:solidFill>
@@ -18523,7 +18523,7 @@
                     <a:lstStyle/>
                     <a:p>
                       <a:r>
-                        <a:rPr sz="1000" b="0">
+                        <a:rPr sz="800" b="0">
                           <a:solidFill>
                             <a:srgbClr val="1F2937"/>
                           </a:solidFill>
@@ -18546,7 +18546,7 @@
                     <a:lstStyle/>
                     <a:p>
                       <a:r>
-                        <a:rPr sz="1000" b="0">
+                        <a:rPr sz="800" b="0">
                           <a:solidFill>
                             <a:srgbClr val="1F2937"/>
                           </a:solidFill>
@@ -18569,7 +18569,7 @@
                     <a:lstStyle/>
                     <a:p>
                       <a:r>
-                        <a:rPr sz="1000" b="0">
+                        <a:rPr sz="800" b="0">
                           <a:solidFill>
                             <a:srgbClr val="1F2937"/>
                           </a:solidFill>
@@ -18594,7 +18594,7 @@
                     <a:lstStyle/>
                     <a:p>
                       <a:r>
-                        <a:rPr sz="1000" b="0">
+                        <a:rPr sz="800" b="0">
                           <a:solidFill>
                             <a:srgbClr val="1F2937"/>
                           </a:solidFill>
@@ -18617,7 +18617,7 @@
                     <a:lstStyle/>
                     <a:p>
                       <a:r>
-                        <a:rPr sz="1000" b="0">
+                        <a:rPr sz="800" b="0">
                           <a:solidFill>
                             <a:srgbClr val="1F2937"/>
                           </a:solidFill>
@@ -18640,7 +18640,7 @@
                     <a:lstStyle/>
                     <a:p>
                       <a:r>
-                        <a:rPr sz="1000" b="0">
+                        <a:rPr sz="800" b="0">
                           <a:solidFill>
                             <a:srgbClr val="1F2937"/>
                           </a:solidFill>
@@ -18665,7 +18665,7 @@
                     <a:lstStyle/>
                     <a:p>
                       <a:r>
-                        <a:rPr sz="1000" b="0">
+                        <a:rPr sz="800" b="0">
                           <a:solidFill>
                             <a:srgbClr val="1F2937"/>
                           </a:solidFill>
@@ -18688,7 +18688,7 @@
                     <a:lstStyle/>
                     <a:p>
                       <a:r>
-                        <a:rPr sz="1000" b="0">
+                        <a:rPr sz="800" b="0">
                           <a:solidFill>
                             <a:srgbClr val="1F2937"/>
                           </a:solidFill>
@@ -18711,7 +18711,7 @@
                     <a:lstStyle/>
                     <a:p>
                       <a:r>
-                        <a:rPr sz="1000" b="0">
+                        <a:rPr sz="800" b="0">
                           <a:solidFill>
                             <a:srgbClr val="1F2937"/>
                           </a:solidFill>
@@ -18736,7 +18736,7 @@
                     <a:lstStyle/>
                     <a:p>
                       <a:r>
-                        <a:rPr sz="1000" b="0">
+                        <a:rPr sz="800" b="0">
                           <a:solidFill>
                             <a:srgbClr val="1F2937"/>
                           </a:solidFill>
@@ -18759,7 +18759,7 @@
                     <a:lstStyle/>
                     <a:p>
                       <a:r>
-                        <a:rPr sz="1000" b="0">
+                        <a:rPr sz="800" b="0">
                           <a:solidFill>
                             <a:srgbClr val="1F2937"/>
                           </a:solidFill>
@@ -18782,7 +18782,7 @@
                     <a:lstStyle/>
                     <a:p>
                       <a:r>
-                        <a:rPr sz="1000" b="0">
+                        <a:rPr sz="800" b="0">
                           <a:solidFill>
                             <a:srgbClr val="1F2937"/>
                           </a:solidFill>
@@ -18807,7 +18807,7 @@
                     <a:lstStyle/>
                     <a:p>
                       <a:r>
-                        <a:rPr sz="1000" b="0">
+                        <a:rPr sz="800" b="0">
                           <a:solidFill>
                             <a:srgbClr val="1F2937"/>
                           </a:solidFill>
@@ -18830,7 +18830,7 @@
                     <a:lstStyle/>
                     <a:p>
                       <a:r>
-                        <a:rPr sz="1000" b="0">
+                        <a:rPr sz="800" b="0">
                           <a:solidFill>
                             <a:srgbClr val="1F2937"/>
                           </a:solidFill>
@@ -18853,7 +18853,7 @@
                     <a:lstStyle/>
                     <a:p>
                       <a:r>
-                        <a:rPr sz="1000" b="0">
+                        <a:rPr sz="800" b="0">
                           <a:solidFill>
                             <a:srgbClr val="1F2937"/>
                           </a:solidFill>
@@ -18878,7 +18878,7 @@
                     <a:lstStyle/>
                     <a:p>
                       <a:r>
-                        <a:rPr sz="1000" b="0">
+                        <a:rPr sz="800" b="0">
                           <a:solidFill>
                             <a:srgbClr val="1F2937"/>
                           </a:solidFill>
@@ -18901,7 +18901,7 @@
                     <a:lstStyle/>
                     <a:p>
                       <a:r>
-                        <a:rPr sz="1000" b="0">
+                        <a:rPr sz="800" b="0">
                           <a:solidFill>
                             <a:srgbClr val="1F2937"/>
                           </a:solidFill>
@@ -18924,7 +18924,7 @@
                     <a:lstStyle/>
                     <a:p>
                       <a:r>
-                        <a:rPr sz="1000" b="0">
+                        <a:rPr sz="800" b="0">
                           <a:solidFill>
                             <a:srgbClr val="1F2937"/>
                           </a:solidFill>
@@ -18949,7 +18949,7 @@
                     <a:lstStyle/>
                     <a:p>
                       <a:r>
-                        <a:rPr sz="1000" b="0">
+                        <a:rPr sz="800" b="0">
                           <a:solidFill>
                             <a:srgbClr val="1F2937"/>
                           </a:solidFill>
@@ -18972,7 +18972,7 @@
                     <a:lstStyle/>
                     <a:p>
                       <a:r>
-                        <a:rPr sz="1000" b="0">
+                        <a:rPr sz="800" b="0">
                           <a:solidFill>
                             <a:srgbClr val="1F2937"/>
                           </a:solidFill>
@@ -18995,7 +18995,7 @@
                     <a:lstStyle/>
                     <a:p>
                       <a:r>
-                        <a:rPr sz="1000" b="0">
+                        <a:rPr sz="800" b="0">
                           <a:solidFill>
                             <a:srgbClr val="1F2937"/>
                           </a:solidFill>
@@ -19020,7 +19020,7 @@
                     <a:lstStyle/>
                     <a:p>
                       <a:r>
-                        <a:rPr sz="1000" b="0">
+                        <a:rPr sz="800" b="0">
                           <a:solidFill>
                             <a:srgbClr val="1F2937"/>
                           </a:solidFill>
@@ -19043,7 +19043,7 @@
                     <a:lstStyle/>
                     <a:p>
                       <a:r>
-                        <a:rPr sz="900" b="0">
+                        <a:rPr sz="800" b="0">
                           <a:solidFill>
                             <a:srgbClr val="1F2937"/>
                           </a:solidFill>
@@ -19066,7 +19066,7 @@
                     <a:lstStyle/>
                     <a:p>
                       <a:r>
-                        <a:rPr sz="1000" b="0">
+                        <a:rPr sz="800" b="0">
                           <a:solidFill>
                             <a:srgbClr val="1F2937"/>
                           </a:solidFill>
@@ -19091,7 +19091,7 @@
                     <a:lstStyle/>
                     <a:p>
                       <a:r>
-                        <a:rPr sz="1000" b="0">
+                        <a:rPr sz="800" b="0">
                           <a:solidFill>
                             <a:srgbClr val="1F2937"/>
                           </a:solidFill>
@@ -19114,7 +19114,7 @@
                     <a:lstStyle/>
                     <a:p>
                       <a:r>
-                        <a:rPr sz="900" b="0">
+                        <a:rPr sz="800" b="0">
                           <a:solidFill>
                             <a:srgbClr val="1F2937"/>
                           </a:solidFill>
@@ -19137,7 +19137,7 @@
                     <a:lstStyle/>
                     <a:p>
                       <a:r>
-                        <a:rPr sz="1000" b="0">
+                        <a:rPr sz="800" b="0">
                           <a:solidFill>
                             <a:srgbClr val="1F2937"/>
                           </a:solidFill>
@@ -19167,7 +19167,7 @@
         </p:nvSpPr>
         <p:spPr>
           <a:xfrm>
-            <a:off x="685800" y="5857875"/>
+            <a:off x="685800" y="5870448"/>
             <a:ext cx="10881360" cy="497204"/>
           </a:xfrm>
           <a:prstGeom prst="rect">
@@ -19416,7 +19416,7 @@
                 <a:latin typeface="Microsoft YaHei"/>
                 <a:ea typeface="Microsoft YaHei"/>
               </a:rPr>
-              <a:t>● 三、交易环节不外让</a:t>
+              <a:t>● 三、交易环节不外让　可观测指标：合作协议中MoR归属条款的覆盖率（目标100%）</a:t>
             </a:r>
           </a:p>
           <a:p>
@@ -19484,7 +19484,7 @@
                 <a:latin typeface="Microsoft YaHei"/>
                 <a:ea typeface="Microsoft YaHei"/>
               </a:rPr>
-              <a:t>● 五、规模测算止于流量层，转化率与客单价先实测再折算</a:t>
+              <a:t>● 五、规模测算止于流量层　可观测指标：GMV折算所需实测输入的到位率（详情页转化率、客单价、u、s、过散布参数k，共5项）</a:t>
             </a:r>
           </a:p>
           <a:p>
@@ -19603,7 +19603,7 @@
                 <a:latin typeface="Microsoft YaHei"/>
                 <a:ea typeface="Microsoft YaHei"/>
               </a:rPr>
-              <a:t>第六章　结论与建议　　六项结论；建议一至五（含随机对照实验参数）；行动优先级</a:t>
+              <a:t>第六章　结论与建议</a:t>
             </a:r>
           </a:p>
         </p:txBody>
@@ -19643,7 +19643,7 @@
                 <a:latin typeface="Microsoft YaHei"/>
                 <a:ea typeface="Microsoft YaHei"/>
               </a:rPr>
-              <a:t>行动优先级</a:t>
+              <a:t>行动优先级（含执行主体）</a:t>
             </a:r>
           </a:p>
         </p:txBody>
@@ -19707,9 +19707,10 @@
                 <a:tableStyleId>{5C22544A-7EE6-4342-B048-85BDC9FD1C3A}</a:tableStyleId>
               </a:tblPr>
               <a:tblGrid>
-                <a:gridCol w="1005840"/>
+                <a:gridCol w="822960"/>
+                <a:gridCol w="2103120"/>
                 <a:gridCol w="2743200"/>
-                <a:gridCol w="7223760"/>
+                <a:gridCol w="5303520"/>
               </a:tblGrid>
               <a:tr h="420624">
                 <a:tc>
@@ -19748,6 +19749,29 @@
                           <a:latin typeface="Microsoft YaHei"/>
                           <a:ea typeface="Microsoft YaHei"/>
                         </a:rPr>
+                        <a:t>执行主体</a:t>
+                      </a:r>
+                    </a:p>
+                  </a:txBody>
+                  <a:tcPr>
+                    <a:solidFill>
+                      <a:srgbClr val="0F2744"/>
+                    </a:solidFill>
+                  </a:tcPr>
+                </a:tc>
+                <a:tc>
+                  <a:txBody>
+                    <a:bodyPr/>
+                    <a:lstStyle/>
+                    <a:p>
+                      <a:r>
+                        <a:rPr sz="950" b="1">
+                          <a:solidFill>
+                            <a:srgbClr val="FFFFFF"/>
+                          </a:solidFill>
+                          <a:latin typeface="Microsoft YaHei"/>
+                          <a:ea typeface="Microsoft YaHei"/>
+                        </a:rPr>
                         <a:t>动作</a:t>
                       </a:r>
                     </a:p>
@@ -19819,6 +19843,29 @@
                           <a:latin typeface="Microsoft YaHei"/>
                           <a:ea typeface="Microsoft YaHei"/>
                         </a:rPr>
+                        <a:t>平台方</a:t>
+                      </a:r>
+                    </a:p>
+                  </a:txBody>
+                  <a:tcPr marT="25400" marB="25400">
+                    <a:solidFill>
+                      <a:srgbClr val="F1F5F9"/>
+                    </a:solidFill>
+                  </a:tcPr>
+                </a:tc>
+                <a:tc>
+                  <a:txBody>
+                    <a:bodyPr wrap="square"/>
+                    <a:lstStyle/>
+                    <a:p>
+                      <a:r>
+                        <a:rPr sz="950" b="0">
+                          <a:solidFill>
+                            <a:srgbClr val="1F2937"/>
+                          </a:solidFill>
+                          <a:latin typeface="Microsoft YaHei"/>
+                          <a:ea typeface="Microsoft YaHei"/>
+                        </a:rPr>
                         <a:t>建立口径与实验基建，并消除两个敞口</a:t>
                       </a:r>
                     </a:p>
@@ -19835,14 +19882,14 @@
                     <a:lstStyle/>
                     <a:p>
                       <a:r>
-                        <a:rPr sz="850" b="0">
-                          <a:solidFill>
-                            <a:srgbClr val="1F2937"/>
-                          </a:solidFill>
-                          <a:latin typeface="Microsoft YaHei"/>
-                          <a:ea typeface="Microsoft YaHei"/>
-                        </a:rPr>
-                        <a:t>统一留存与回访率命名；明确AI链路商品浏览的归因规则（定u）；采集两侧人均日会话数（定s）；核查千问侧IPV是否为定义性产物；建立随机对照实验能力（参数见「建议二」页）。u×s＜3.5 是下一项的前置条件</a:t>
+                        <a:rPr sz="950" b="0">
+                          <a:solidFill>
+                            <a:srgbClr val="1F2937"/>
+                          </a:solidFill>
+                          <a:latin typeface="Microsoft YaHei"/>
+                          <a:ea typeface="Microsoft YaHei"/>
+                        </a:rPr>
+                        <a:t>统一留存与回访率命名；明确归因规则（定u）；采集两侧人均日会话数（定s）；核查千问侧IPV是否为定义性产物；建立随机对照实验能力（参数见「建议二」页）</a:t>
                       </a:r>
                     </a:p>
                   </a:txBody>
@@ -19890,6 +19937,29 @@
                           <a:latin typeface="Microsoft YaHei"/>
                           <a:ea typeface="Microsoft YaHei"/>
                         </a:rPr>
+                        <a:t>平台方</a:t>
+                      </a:r>
+                    </a:p>
+                  </a:txBody>
+                  <a:tcPr marT="25400" marB="25400">
+                    <a:solidFill>
+                      <a:srgbClr val="FFFFFF"/>
+                    </a:solidFill>
+                  </a:tcPr>
+                </a:tc>
+                <a:tc>
+                  <a:txBody>
+                    <a:bodyPr wrap="square"/>
+                    <a:lstStyle/>
+                    <a:p>
+                      <a:r>
+                        <a:rPr sz="950" b="0">
+                          <a:solidFill>
+                            <a:srgbClr val="1F2937"/>
+                          </a:solidFill>
+                          <a:latin typeface="Microsoft YaHei"/>
+                          <a:ea typeface="Microsoft YaHei"/>
+                        </a:rPr>
                         <a:t>将人均IPV设为唯一首要考核指标</a:t>
                       </a:r>
                     </a:p>
@@ -19906,14 +19976,14 @@
                     <a:lstStyle/>
                     <a:p>
                       <a:r>
-                        <a:rPr sz="850" b="0">
-                          <a:solidFill>
-                            <a:srgbClr val="1F2937"/>
-                          </a:solidFill>
-                          <a:latin typeface="Microsoft YaHei"/>
-                          <a:ea typeface="Microsoft YaHei"/>
-                        </a:rPr>
-                        <a:t>须待上一项完成且u×s＜3.5。DAU与有效商品浏览量降为次级／观察指标；阶段目标12个月0.22次、24个月0.35次（对齐中性档），1.00次为长期追赶参照；改造重点是「每轮对话产出」</a:t>
+                        <a:rPr sz="950" b="0">
+                          <a:solidFill>
+                            <a:srgbClr val="1F2937"/>
+                          </a:solidFill>
+                          <a:latin typeface="Microsoft YaHei"/>
+                          <a:ea typeface="Microsoft YaHei"/>
+                        </a:rPr>
+                        <a:t>须同时满足方向性门槛u×s＜3.5与成本论证门槛u＜约2；仅满足前者时可切换指标但不可据此选路径。阶段目标12个月0.22次、24个月0.35次须在u测定后按同一归因规则重述</a:t>
                       </a:r>
                     </a:p>
                   </a:txBody>
@@ -19961,6 +20031,29 @@
                           <a:latin typeface="Microsoft YaHei"/>
                           <a:ea typeface="Microsoft YaHei"/>
                         </a:rPr>
+                        <a:t>平台方</a:t>
+                      </a:r>
+                    </a:p>
+                  </a:txBody>
+                  <a:tcPr marT="25400" marB="25400">
+                    <a:solidFill>
+                      <a:srgbClr val="F1F5F9"/>
+                    </a:solidFill>
+                  </a:tcPr>
+                </a:tc>
+                <a:tc>
+                  <a:txBody>
+                    <a:bodyPr wrap="square"/>
+                    <a:lstStyle/>
+                    <a:p>
+                      <a:r>
+                        <a:rPr sz="950" b="0">
+                          <a:solidFill>
+                            <a:srgbClr val="1F2937"/>
+                          </a:solidFill>
+                          <a:latin typeface="Microsoft YaHei"/>
+                          <a:ea typeface="Microsoft YaHei"/>
+                        </a:rPr>
                         <a:t>站内高确定性场景落地</a:t>
                       </a:r>
                     </a:p>
@@ -19977,7 +20070,7 @@
                     <a:lstStyle/>
                     <a:p>
                       <a:r>
-                        <a:rPr sz="850" b="0">
+                        <a:rPr sz="950" b="0">
                           <a:solidFill>
                             <a:srgbClr val="1F2937"/>
                           </a:solidFill>
@@ -20032,6 +20125,29 @@
                           <a:latin typeface="Microsoft YaHei"/>
                           <a:ea typeface="Microsoft YaHei"/>
                         </a:rPr>
+                        <a:t>商家与零售商</a:t>
+                      </a:r>
+                    </a:p>
+                  </a:txBody>
+                  <a:tcPr marT="25400" marB="25400">
+                    <a:solidFill>
+                      <a:srgbClr val="FFFFFF"/>
+                    </a:solidFill>
+                  </a:tcPr>
+                </a:tc>
+                <a:tc>
+                  <a:txBody>
+                    <a:bodyPr wrap="square"/>
+                    <a:lstStyle/>
+                    <a:p>
+                      <a:r>
+                        <a:rPr sz="950" b="0">
+                          <a:solidFill>
+                            <a:srgbClr val="1F2937"/>
+                          </a:solidFill>
+                          <a:latin typeface="Microsoft YaHei"/>
+                          <a:ea typeface="Microsoft YaHei"/>
+                        </a:rPr>
                         <a:t>交易环节不外让</a:t>
                       </a:r>
                     </a:p>
@@ -20048,7 +20164,7 @@
                     <a:lstStyle/>
                     <a:p>
                       <a:r>
-                        <a:rPr sz="850" b="0">
+                        <a:rPr sz="950" b="0">
                           <a:solidFill>
                             <a:srgbClr val="1F2937"/>
                           </a:solidFill>
@@ -20103,6 +20219,29 @@
                           <a:latin typeface="Microsoft YaHei"/>
                           <a:ea typeface="Microsoft YaHei"/>
                         </a:rPr>
+                        <a:t>商家与零售商</a:t>
+                      </a:r>
+                    </a:p>
+                  </a:txBody>
+                  <a:tcPr marT="25400" marB="25400">
+                    <a:solidFill>
+                      <a:srgbClr val="F1F5F9"/>
+                    </a:solidFill>
+                  </a:tcPr>
+                </a:tc>
+                <a:tc>
+                  <a:txBody>
+                    <a:bodyPr wrap="square"/>
+                    <a:lstStyle/>
+                    <a:p>
+                      <a:r>
+                        <a:rPr sz="950" b="0">
+                          <a:solidFill>
+                            <a:srgbClr val="1F2937"/>
+                          </a:solidFill>
+                          <a:latin typeface="Microsoft YaHei"/>
+                          <a:ea typeface="Microsoft YaHei"/>
+                        </a:rPr>
                         <a:t>商品数据结构化</a:t>
                       </a:r>
                     </a:p>
@@ -20174,6 +20313,29 @@
                           <a:latin typeface="Microsoft YaHei"/>
                           <a:ea typeface="Microsoft YaHei"/>
                         </a:rPr>
+                        <a:t>商家与零售商</a:t>
+                      </a:r>
+                    </a:p>
+                  </a:txBody>
+                  <a:tcPr marT="25400" marB="25400">
+                    <a:solidFill>
+                      <a:srgbClr val="FFFFFF"/>
+                    </a:solidFill>
+                  </a:tcPr>
+                </a:tc>
+                <a:tc>
+                  <a:txBody>
+                    <a:bodyPr wrap="square"/>
+                    <a:lstStyle/>
+                    <a:p>
+                      <a:r>
+                        <a:rPr sz="950" b="0">
+                          <a:solidFill>
+                            <a:srgbClr val="1F2937"/>
+                          </a:solidFill>
+                          <a:latin typeface="Microsoft YaHei"/>
+                          <a:ea typeface="Microsoft YaHei"/>
+                        </a:rPr>
                         <a:t>建立被推荐率监测</a:t>
                       </a:r>
                     </a:p>
@@ -20190,7 +20352,7 @@
                     <a:lstStyle/>
                     <a:p>
                       <a:r>
-                        <a:rPr sz="850" b="0">
+                        <a:rPr sz="950" b="0">
                           <a:solidFill>
                             <a:srgbClr val="1F2937"/>
                           </a:solidFill>
@@ -20245,6 +20407,29 @@
                           <a:latin typeface="Microsoft YaHei"/>
                           <a:ea typeface="Microsoft YaHei"/>
                         </a:rPr>
+                        <a:t>平台方与零售商（法务）</a:t>
+                      </a:r>
+                    </a:p>
+                  </a:txBody>
+                  <a:tcPr marT="25400" marB="25400">
+                    <a:solidFill>
+                      <a:srgbClr val="F1F5F9"/>
+                    </a:solidFill>
+                  </a:tcPr>
+                </a:tc>
+                <a:tc>
+                  <a:txBody>
+                    <a:bodyPr wrap="square"/>
+                    <a:lstStyle/>
+                    <a:p>
+                      <a:r>
+                        <a:rPr sz="950" b="0">
+                          <a:solidFill>
+                            <a:srgbClr val="1F2937"/>
+                          </a:solidFill>
+                          <a:latin typeface="Microsoft YaHei"/>
+                          <a:ea typeface="Microsoft YaHei"/>
+                        </a:rPr>
                         <a:t>服务条款中定义AI代理规则</a:t>
                       </a:r>
                     </a:p>
@@ -20316,6 +20501,29 @@
                           <a:latin typeface="Microsoft YaHei"/>
                           <a:ea typeface="Microsoft YaHei"/>
                         </a:rPr>
+                        <a:t>生鲜与即时零售业务方</a:t>
+                      </a:r>
+                    </a:p>
+                  </a:txBody>
+                  <a:tcPr marT="25400" marB="25400">
+                    <a:solidFill>
+                      <a:srgbClr val="FFFFFF"/>
+                    </a:solidFill>
+                  </a:tcPr>
+                </a:tc>
+                <a:tc>
+                  <a:txBody>
+                    <a:bodyPr wrap="square"/>
+                    <a:lstStyle/>
+                    <a:p>
+                      <a:r>
+                        <a:rPr sz="950" b="0">
+                          <a:solidFill>
+                            <a:srgbClr val="1F2937"/>
+                          </a:solidFill>
+                          <a:latin typeface="Microsoft YaHei"/>
+                          <a:ea typeface="Microsoft YaHei"/>
+                        </a:rPr>
                         <a:t>生鲜专项：餐桌助手优先</a:t>
                       </a:r>
                     </a:p>
@@ -20332,7 +20540,7 @@
                     <a:lstStyle/>
                     <a:p>
                       <a:r>
-                        <a:rPr sz="850" b="0">
+                        <a:rPr sz="950" b="0">
                           <a:solidFill>
                             <a:srgbClr val="1F2937"/>
                           </a:solidFill>
@@ -20362,7 +20570,7 @@
         </p:nvSpPr>
         <p:spPr>
           <a:xfrm>
-            <a:off x="685800" y="6189345"/>
+            <a:off x="685800" y="5175504"/>
             <a:ext cx="10881360" cy="165735"/>
           </a:xfrm>
           <a:prstGeom prst="rect">
@@ -21613,7 +21821,7 @@
                     <a:lstStyle/>
                     <a:p>
                       <a:r>
-                        <a:rPr sz="800" b="0">
+                        <a:rPr sz="900" b="0">
                           <a:solidFill>
                             <a:srgbClr val="1F2937"/>
                           </a:solidFill>
@@ -21783,8 +21991,8 @@
         </p:nvSpPr>
         <p:spPr>
           <a:xfrm>
-            <a:off x="685800" y="6189345"/>
-            <a:ext cx="10881360" cy="165735"/>
+            <a:off x="685800" y="5596128"/>
+            <a:ext cx="10881360" cy="331470"/>
           </a:xfrm>
           <a:prstGeom prst="rect">
             <a:avLst/>
@@ -21810,7 +22018,7 @@
                 <a:latin typeface="Microsoft YaHei"/>
                 <a:ea typeface="Microsoft YaHei"/>
               </a:rPr>
-              <a:t>更新方式：修改 data/*.csv 后依次执行 python3 scripts/make_charts.py 与 python3 scripts/make_pptx.py。情景测算中间结果输出至 data/_computed_scenarios.csv，可复算校验。</a:t>
+              <a:t>更新方式：修改 data/*.csv 后依次执行 python3 scripts/make_charts.py（报告版图表）、python3 scripts/make_charts.py --slides（演示版图表，本PPT使用）与 python3 scripts/make_pptx.py。漏执行 --slides 会导致PPT内图表滞后于报告。情景测算中间结果输出至 data/_computed_scenarios.csv，可复算校验。</a:t>
             </a:r>
           </a:p>
         </p:txBody>
@@ -22955,7 +23163,7 @@
         </p:nvSpPr>
         <p:spPr>
           <a:xfrm>
-            <a:off x="685800" y="6189345"/>
+            <a:off x="685800" y="5870448"/>
             <a:ext cx="10881360" cy="165735"/>
           </a:xfrm>
           <a:prstGeom prst="rect">
@@ -23630,7 +23838,7 @@
         </p:nvSpPr>
         <p:spPr>
           <a:xfrm>
-            <a:off x="685800" y="6023610"/>
+            <a:off x="685800" y="5120640"/>
             <a:ext cx="10881360" cy="331470"/>
           </a:xfrm>
           <a:prstGeom prst="rect">
@@ -23964,7 +24172,7 @@
                 <a:latin typeface="Microsoft YaHei"/>
                 <a:ea typeface="Microsoft YaHei"/>
               </a:rPr>
-              <a:t>以「使用者对未使用者」为对照的效果数据全球仅有Amazon Rufus的「购买完成率高约60%」（2025Q4财报电话会，观察性对比）。Salesforce企业分组与Adobe／Shopify渠道数据分属另两种对照构造；亚马逊另披露的「增量年化销售近120亿美元」为绝对额、归因方法未完整披露，不可替代相对效果证据。自建实验能力是获得可决策数字的唯一途径</a:t>
+              <a:t>在本报告检索范围内（docs/05 所列来源，数据截至2026-07；未做穷尽性文献检索），以「使用者对未使用者」为对照的效果数据仅有Amazon Rufus的「购买完成率高约60%」（2025Q4财报电话会，观察性对比）。Salesforce企业分组与Adobe／Shopify渠道数据分属另两种对照构造；亚马逊另披露的「增量年化销售近120亿美元」为绝对额、归因方法未完整披露，不可替代相对效果证据。自建实验能力是获得可决策数字的唯一途径</a:t>
             </a:r>
           </a:p>
         </p:txBody>
@@ -24868,7 +25076,7 @@
                     <a:lstStyle/>
                     <a:p>
                       <a:r>
-                        <a:rPr sz="900" b="0">
+                        <a:rPr sz="1000" b="0">
                           <a:solidFill>
                             <a:srgbClr val="1F2937"/>
                           </a:solidFill>
@@ -24891,7 +25099,7 @@
                     <a:lstStyle/>
                     <a:p>
                       <a:r>
-                        <a:rPr sz="900" b="0">
+                        <a:rPr sz="1000" b="0">
                           <a:solidFill>
                             <a:srgbClr val="1F2937"/>
                           </a:solidFill>
@@ -25223,7 +25431,7 @@
                     <a:lstStyle/>
                     <a:p>
                       <a:r>
-                        <a:rPr sz="900" b="0">
+                        <a:rPr sz="1000" b="0">
                           <a:solidFill>
                             <a:srgbClr val="1F2937"/>
                           </a:solidFill>
@@ -25276,7 +25484,7 @@
         </p:nvSpPr>
         <p:spPr>
           <a:xfrm>
-            <a:off x="685800" y="6023610"/>
+            <a:off x="685800" y="5120640"/>
             <a:ext cx="10881360" cy="331470"/>
           </a:xfrm>
           <a:prstGeom prst="rect">

--- a/report/AI电商行业研究报告.pptx
+++ b/report/AI电商行业研究报告.pptx
@@ -5288,8 +5288,8 @@
         </p:nvSpPr>
         <p:spPr>
           <a:xfrm>
-            <a:off x="685800" y="5692140"/>
-            <a:ext cx="10881360" cy="662940"/>
+            <a:off x="685800" y="5526405"/>
+            <a:ext cx="10881360" cy="828675"/>
           </a:xfrm>
           <a:prstGeom prst="rect">
             <a:avLst/>
@@ -5315,7 +5315,7 @@
                 <a:latin typeface="Microsoft YaHei"/>
                 <a:ea typeface="Microsoft YaHei"/>
               </a:rPr>
-              <a:t>数据性质：P3内部运营口径（淘宝AI导购与千问电商场景），由业务方提供，未公开披露、无第三方交叉验证，仅作内部对照，不与第三方监测数据混排。斜纹柱为本报告派生指标（浏览量＝DAU×人均IPV；每轮产出＝人均IPV÷人均对话轮次）。三点可比性限制：①两侧入口曝光机制不同，DAU意图强度不一致；②淘宝侧用户可绕过AI链路直达商品，归因规则可能低估其IPV，低估倍数记为u（压力区间2~3）；③IPV为日度、轮次为会话内均值，两侧人均日会话数之比记为s（上限2）。联合反转边界（不可省略）：②③联合后交互层差距＝4.22÷(u×s)，当u×s达到约3.5及以上时降至留存层差距（1.10~1.20倍）以下、方向反转；本页结论只在u×s＜3.5范围内成立。选择改造路径的门槛更严（u＜约2）。</a:t>
+              <a:t>数据性质：P3内部运营口径（淘宝AI导购与千问电商场景），由业务方提供，未公开披露、无第三方交叉验证，仅作内部对照，不与第三方监测数据混排。斜纹柱为本报告派生指标（浏览量＝DAU×人均IPV；每轮产出＝人均IPV÷人均对话轮次）。三点可比性限制：①两侧入口曝光机制不同，DAU意图强度不一致；②淘宝侧用户可绕过AI链路直达商品，归因规则可能低估其IPV，低估倍数记为u（压力区间2~3）；③IPV为日度、轮次为会话内均值，两侧人均日会话数之比记为s（上限2）。联合反转边界（不可省略）：②③以乘积形式进入，交互层差距＝4.22÷(u×s)——u×s＝2时为2.11倍、＝3时为1.41倍，仍高于留存层的1.10~1.20倍；当u×s达到约3.5及以上时降至留存层以下、方向反转。同一乘积还决定改造路径排序，且阈值更低：≈1.96起「优先提高每轮产出」的增益优势消失，≈2.75起按单位推理成本计应改为优先增加对话轮次。三道阈值构成同一量上的嵌套判据。</a:t>
             </a:r>
           </a:p>
         </p:txBody>
@@ -6335,7 +6335,7 @@
                           <a:latin typeface="Microsoft YaHei"/>
                           <a:ea typeface="Microsoft YaHei"/>
                         </a:rPr>
-                        <a:t>人均IPV ÷ 人均对话轮次；差距落在交互层，是本报告首要指标的依据</a:t>
+                        <a:t>人均IPV ÷ 人均对话轮次；差距落在交互层，是首要指标的依据。成立边界 u×s＜3.5；路径排序的阈值更低（1.96／2.75）</a:t>
                       </a:r>
                     </a:p>
                   </a:txBody>
@@ -6976,7 +6976,7 @@
           <a:p>
             <a:pPr algn="l" marL="402336" indent="0">
               <a:spcAft>
-                <a:spcPts val="652"/>
+                <a:spcPts val="457"/>
               </a:spcAft>
             </a:pPr>
             <a:r>
@@ -7010,7 +7010,7 @@
           <a:p>
             <a:pPr algn="l" marL="402336" indent="0">
               <a:spcAft>
-                <a:spcPts val="652"/>
+                <a:spcPts val="457"/>
               </a:spcAft>
             </a:pPr>
             <a:r>
@@ -7044,7 +7044,7 @@
           <a:p>
             <a:pPr algn="l" marL="402336" indent="0">
               <a:spcAft>
-                <a:spcPts val="652"/>
+                <a:spcPts val="457"/>
               </a:spcAft>
             </a:pPr>
             <a:r>
@@ -7078,7 +7078,7 @@
           <a:p>
             <a:pPr algn="l" marL="402336" indent="0">
               <a:spcAft>
-                <a:spcPts val="652"/>
+                <a:spcPts val="457"/>
               </a:spcAft>
             </a:pPr>
             <a:r>
@@ -7106,13 +7106,13 @@
                 <a:latin typeface="Microsoft YaHei"/>
                 <a:ea typeface="Microsoft YaHei"/>
               </a:rPr>
-              <a:t>● 两条提升路径的成本结构不同，这在成本约束下直接决定优先级</a:t>
+              <a:t>● 两条提升路径的成本结构不同，但排序会随 u×s 反转——这是最需谨慎使用的一处结论</a:t>
             </a:r>
           </a:p>
           <a:p>
             <a:pPr algn="l" marL="402336" indent="0">
               <a:spcAft>
-                <a:spcPts val="652"/>
+                <a:spcPts val="457"/>
               </a:spcAft>
             </a:pPr>
             <a:r>
@@ -7123,7 +7123,7 @@
                 <a:latin typeface="Microsoft YaHei"/>
                 <a:ea typeface="Microsoft YaHei"/>
               </a:rPr>
-              <a:t>路径A提高每轮产出：轮次仍1.3轮、推理成本近似不变、人均IPV达0.46次；路径B增加轮次：轮次至2.8轮、推理成本约为原2.15倍、人均IPV仅0.24次。A的指标增益为B的约2.8倍，按单位推理成本计效率约6倍。绝对成本水平需业务方补token单价，本报告不做估计</a:t>
+              <a:t>按u×s＝1计算：路径A（轮次仍1.3、每轮产出提到千问水平）人均IPV达0.46次；路径B（每轮产出不变、轮次提到2.8）仅0.24次；A的指标增益为B的约2.8倍、按单位推理成本计约6倍。但路径A终值为0.464÷s、路径B终值为0.237u，故增益比只取决于乘积 u×s：≈1.96起A的增益优势消失，≈2.75起按单位推理成本计B反而更优，≥3.5则「差距落在交互层」本身不成立。三道阈值构成同一量上的嵌套判据。另：「推理成本近似不变」本身是待验证假设，已列为建议二的次级指标；绝对成本水平需业务方补token单价，本报告不做估计</a:t>
             </a:r>
           </a:p>
           <a:p>
@@ -7146,7 +7146,7 @@
           <a:p>
             <a:pPr algn="l" marL="402336" indent="0">
               <a:spcAft>
-                <a:spcPts val="652"/>
+                <a:spcPts val="457"/>
               </a:spcAft>
             </a:pPr>
             <a:r>
@@ -7180,7 +7180,7 @@
           <a:p>
             <a:pPr algn="l" marL="402336" indent="0">
               <a:spcAft>
-                <a:spcPts val="652"/>
+                <a:spcPts val="457"/>
               </a:spcAft>
             </a:pPr>
             <a:r>
@@ -13987,7 +13987,7 @@
                 <a:latin typeface="Microsoft YaHei"/>
                 <a:ea typeface="Microsoft YaHei"/>
               </a:rPr>
-              <a:t>高流量App显著位置可快速获得DAU（淘宝侧500万），但不能自动获得商品决策行为（每轮对话产出0.085次）；用户主动触发的场景规模小（43万）但每轮产出高（0.357次）。意图强度与产品形态的相对贡献需通过分层实验区分（证伪条件见「建议一」页）</a:t>
+              <a:t>高流量App显著位置可快速获得DAU（淘宝侧500万），但不能自动获得商品决策行为（每轮对话产出0.085次）；用户主动触发的场景规模小（43万）但每轮产出高（0.357次）——成立边界 u×s＜3.5。意图强度与产品形态的相对贡献需通过分层实验区分（证伪条件见「建议一」页）</a:t>
             </a:r>
           </a:p>
           <a:p>
@@ -14021,7 +14021,7 @@
                 <a:latin typeface="Microsoft YaHei"/>
                 <a:ea typeface="Microsoft YaHei"/>
               </a:rPr>
-              <a:t>图9面板①只有Rufus一根柱。Salesforce企业分组与Adobe／Shopify渠道数据分属另两种对照构造；亚马逊另披露的「增量年化销售近120亿美元」为绝对额且归因方法未完整披露，不可跨案例比较，也不能替代相对效果证据。建立随机对照实验能力不是可选项，而是获得可决策数字的唯一途径</a:t>
+              <a:t>图9面板①只有Rufus一根柱。Salesforce企业分组与Adobe／Shopify渠道数据分属另两种对照构造；亚马逊另披露的「增量年化销售近120亿美元」为绝对额且归因方法未完整披露，不可跨案例比较，也不能替代相对效果证据。建立随机对照实验能力不是可选项——它是当前最可靠、且可自主取得的识别途径；准实验识别可作退路但需额外假设</a:t>
             </a:r>
           </a:p>
         </p:txBody>
@@ -14811,7 +14811,7 @@
                           <a:latin typeface="Microsoft YaHei"/>
                           <a:ea typeface="Microsoft YaHei"/>
                         </a:rPr>
-                        <a:t>承接购物意图</a:t>
+                        <a:t>承接购物意图。四类子层：2a通用AI助手／2b站内AI导购／2c内容社区AI／2d硬件与OS入口</a:t>
                       </a:r>
                     </a:p>
                   </a:txBody>
@@ -14834,7 +14834,7 @@
                           <a:latin typeface="Microsoft YaHei"/>
                           <a:ea typeface="Microsoft YaHei"/>
                         </a:rPr>
-                        <a:t>豆包、千问、元宝；淘宝站内AI导购</a:t>
+                        <a:t>豆包、千问、元宝；淘宝站内AI导购；小红书点点；千问AI眼镜、豆包手机</a:t>
                       </a:r>
                     </a:p>
                   </a:txBody>
@@ -14857,7 +14857,7 @@
                           <a:latin typeface="Microsoft YaHei"/>
                           <a:ea typeface="Microsoft YaHei"/>
                         </a:rPr>
-                        <a:t>ChatGPT、Gemini、Perplexity、Rufus</a:t>
+                        <a:t>ChatGPT、Gemini、Perplexity、Rufus；Alexa+</a:t>
                       </a:r>
                     </a:p>
                   </a:txBody>
@@ -17420,7 +17420,7 @@
                 <a:latin typeface="Microsoft YaHei"/>
                 <a:ea typeface="Microsoft YaHei"/>
               </a:rPr>
-              <a:t>● 站内AI导购在「个体层相对效果」构造上只有一个公开数据点（Rufus +60%，观察性对比）；「增量年化销售」为绝对额且归因方法未完整披露，不可替代——自建随机对照实验能力是获得可决策数字的唯一途径（§2.4四、图9）</a:t>
+              <a:t>● 站内AI导购在「个体层相对效果」构造上只有一个公开数据点（Rufus +60%，观察性对比）；「增量年化销售」为绝对额且归因方法未完整披露，不可替代——自建随机对照实验是当前最可靠且可自主取得的识别途径（§2.4四、图9）</a:t>
             </a:r>
           </a:p>
           <a:p>
@@ -17437,7 +17437,7 @@
                 <a:latin typeface="Microsoft YaHei"/>
                 <a:ea typeface="Microsoft YaHei"/>
               </a:rPr>
-              <a:t>● 差距落在交互层，成立边界为 u×s＜3.5：留存差距仅1.10至1.20倍而每轮对话产出差4.22倍，但该倍数受两个未消除敞口影响，联合后 u×s≥约3.5 时方向反转，须先实测消除再据此考核（§1.6、§6.2建议一前置条件）</a:t>
+              <a:t>● 差距落在交互层，成立边界与改造路径排序落在同一个量 u×s 上，构成三级嵌套判据（1.96／2.75／3.5）：留存差距仅1.10至1.20倍而每轮对话产出差4.22倍，但该倍数受两个敞口的乘积影响，须先实测u与s再据此考核（§1.6、§1.8分析五、§6.2建议一）</a:t>
             </a:r>
           </a:p>
           <a:p>
@@ -17693,13 +17693,13 @@
                 <a:latin typeface="Microsoft YaHei"/>
                 <a:ea typeface="Microsoft YaHei"/>
               </a:rPr>
-              <a:t>● 前置条件（不可跳过）：两条并列门槛，须同时满足</a:t>
+              <a:t>● 前置条件（不可跳过）：u×s 的取值决定本建议可用到什么程度</a:t>
             </a:r>
           </a:p>
           <a:p>
             <a:pPr algn="l" marL="402336" indent="0">
               <a:spcAft>
-                <a:spcPts val="1704"/>
+                <a:spcPts val="1488"/>
               </a:spcAft>
             </a:pPr>
             <a:r>
@@ -17710,7 +17710,7 @@
                 <a:latin typeface="Microsoft YaHei"/>
                 <a:ea typeface="Microsoft YaHei"/>
               </a:rPr>
-              <a:t>方向性门槛 u×s＜3.5——交互层差距＝4.22÷(u×s)，达到约3.5及以上时降至留存层差距（1.10~1.20倍）以下、方向反转；成本论证门槛 u＜约2——路径A终值不含u而路径B随u线性上升，故 u≈1.96 起A的增益优势消失、u≈2.75 起按单位推理成本计B反而更优。两条门槛均由建议二的P0第1步实测确定；在此之前，4.22倍与2.8倍都不能作为投入依据</a:t>
+              <a:t>u×s＜1.96 → 全部可用（可切换指标，且「优先提高每轮产出」的排序成立）；1.96~2.75 → 可切换指标，路径排序改按单位推理成本判定（此区间仍为路径A占优）；2.75~3.5 → 可切换指标，但路径排序反转、应优先增加对话轮次；≥3.5 → 不可用，「差距落在交互层」的前提本身不成立，须转入意图构成检验。u与s均由建议二的P0第1步实测确定；在此之前，4.22倍与2.8倍都不能作为投入依据</a:t>
             </a:r>
           </a:p>
           <a:p>
@@ -17733,7 +17733,7 @@
           <a:p>
             <a:pPr algn="l" marL="402336" indent="0">
               <a:spcAft>
-                <a:spcPts val="1704"/>
+                <a:spcPts val="1488"/>
               </a:spcAft>
             </a:pPr>
             <a:r>
@@ -17767,7 +17767,7 @@
           <a:p>
             <a:pPr algn="l" marL="402336" indent="0">
               <a:spcAft>
-                <a:spcPts val="1704"/>
+                <a:spcPts val="1488"/>
               </a:spcAft>
             </a:pPr>
             <a:r>
@@ -17801,7 +17801,7 @@
           <a:p>
             <a:pPr algn="l" marL="402336" indent="0">
               <a:spcAft>
-                <a:spcPts val="1704"/>
+                <a:spcPts val="1488"/>
               </a:spcAft>
             </a:pPr>
             <a:r>
@@ -17835,7 +17835,7 @@
           <a:p>
             <a:pPr algn="l" marL="402336" indent="0">
               <a:spcAft>
-                <a:spcPts val="1704"/>
+                <a:spcPts val="1488"/>
               </a:spcAft>
             </a:pPr>
             <a:r>
@@ -17869,7 +17869,7 @@
           <a:p>
             <a:pPr algn="l" marL="402336" indent="0">
               <a:spcAft>
-                <a:spcPts val="1704"/>
+                <a:spcPts val="1488"/>
               </a:spcAft>
             </a:pPr>
             <a:r>
@@ -19983,7 +19983,7 @@
                           <a:latin typeface="Microsoft YaHei"/>
                           <a:ea typeface="Microsoft YaHei"/>
                         </a:rPr>
-                        <a:t>须同时满足方向性门槛u×s＜3.5与成本论证门槛u＜约2；仅满足前者时可切换指标但不可据此选路径。阶段目标12个月0.22次、24个月0.35次须在u测定后按同一归因规则重述</a:t>
+                        <a:t>按u×s分级：＜1.96全部可用；1.96~2.75可切换指标但路径排序改按单位推理成本判定；2.75~3.5路径排序反转应优先加轮次；≥3.5不可用。阶段目标12个月0.22次、24个月0.35次须在u测定后按同一归因规则重述</a:t>
                       </a:r>
                     </a:p>
                   </a:txBody>
@@ -24172,7 +24172,7 @@
                 <a:latin typeface="Microsoft YaHei"/>
                 <a:ea typeface="Microsoft YaHei"/>
               </a:rPr>
-              <a:t>在本报告检索范围内（docs/05 所列来源，数据截至2026-07；未做穷尽性文献检索），以「使用者对未使用者」为对照的效果数据仅有Amazon Rufus的「购买完成率高约60%」（2025Q4财报电话会，观察性对比）。Salesforce企业分组与Adobe／Shopify渠道数据分属另两种对照构造；亚马逊另披露的「增量年化销售近120亿美元」为绝对额、归因方法未完整披露，不可替代相对效果证据。自建实验能力是获得可决策数字的唯一途径</a:t>
+              <a:t>在本报告检索范围内（docs/05 所列来源，数据截至2026-07；未做穷尽性文献检索），以「使用者对未使用者」为对照的效果数据仅有Amazon Rufus的「购买完成率高约60%」（2025Q4财报电话会，观察性对比）。Salesforce企业分组与Adobe／Shopify渠道数据分属另两种对照构造；亚马逊另披露的「增量年化销售近120亿美元」为绝对额、归因方法未完整披露，不可替代相对效果证据。自建随机对照实验是当前最可靠、且可自主取得的识别途径（准实验识别可作退路，但需额外假设）</a:t>
             </a:r>
           </a:p>
         </p:txBody>
@@ -24468,7 +24468,7 @@
                 <a:latin typeface="Microsoft YaHei"/>
                 <a:ea typeface="Microsoft YaHei"/>
               </a:rPr>
-              <a:t>● 五、核心建议（以第四条的成立边界为前提）：把人均IPV设为唯一首要考核指标，切入点是「每轮对话产出」而非「对话轮次」</a:t>
+              <a:t>● 五、核心建议：把人均IPV设为唯一首要考核指标，切入点是「每轮对话产出」——排序的门槛与第四条落在同一个量上</a:t>
             </a:r>
           </a:p>
           <a:p>
@@ -24485,7 +24485,7 @@
                 <a:latin typeface="Microsoft YaHei"/>
                 <a:ea typeface="Microsoft YaHei"/>
               </a:rPr>
-              <a:t>提高每轮产出不增加轮次，人均IPV可达0.46次；增加轮次则推理成本随轮次上升，人均IPV只到0.24次。前者指标增益为后者约2.8倍。「按单位推理成本计效率约6倍」以「提高每轮产出的推理成本近似不变」为前提，而该前提本身是待验证假设（每轮塞入商品卡与检索会推高单轮token），已列为建议二的次级指标待实测校验</a:t>
+              <a:t>按u×s＝1计算：提高每轮产出可达0.46次、增加轮次只到0.24次，前者指标增益为后者约2.8倍、按单位推理成本计约6倍。但路径A终值为0.464÷s、路径B为0.237u，故增益比只取决于乘积——u×s≈1.96起A的优势消失、≈2.75起按单位成本计B更优、≥3.5则第四条本身不成立。三道阈值构成嵌套判据，均须先实测u与s。另：「推理成本近似不变」本身是待验证假设</a:t>
             </a:r>
           </a:p>
           <a:p>

--- a/report/AI电商行业研究报告.pptx
+++ b/report/AI电商行业研究报告.pptx
@@ -5211,7 +5211,7 @@
                 <a:latin typeface="Microsoft YaHei"/>
                 <a:ea typeface="Microsoft YaHei"/>
               </a:rPr>
-              <a:t>图7  规模大不等于价值大：DAU为11.63倍，有效商品浏览量仅为1.28倍（P3）</a:t>
+              <a:t>图7  差距落在交互层：每轮对话产出0.085次对0.357次（≈4.22×，边界 u×s＜3.5）｜P3</a:t>
             </a:r>
           </a:p>
         </p:txBody>
@@ -5315,7 +5315,7 @@
                 <a:latin typeface="Microsoft YaHei"/>
                 <a:ea typeface="Microsoft YaHei"/>
               </a:rPr>
-              <a:t>数据性质：P3内部运营口径（淘宝AI导购与千问电商场景），由业务方提供，未公开披露、无第三方交叉验证，仅作内部对照，不与第三方监测数据混排。斜纹柱为本报告派生指标（浏览量＝DAU×人均IPV；每轮产出＝人均IPV÷人均对话轮次）。三点可比性限制：①两侧入口曝光机制不同，DAU意图强度不一致；②淘宝侧用户可绕过AI链路直达商品，归因规则可能低估其IPV，低估倍数记为u（压力区间2~3）；③IPV为日度、轮次为会话内均值，两侧人均日会话数之比记为s（上限2）。联合反转边界（不可省略）：②③以乘积形式进入，交互层差距＝4.22÷(u×s)——u×s＝2时为2.11倍、＝3时为1.41倍，仍高于留存层的1.10~1.20倍；当u×s达到约3.5及以上时降至留存层以下、方向反转。同一乘积还决定改造路径排序，且阈值更低：≈1.96起「优先提高每轮产出」的增益优势消失，≈2.75起按单位推理成本计应改为优先增加对话轮次。三道阈值构成同一量上的嵌套判据。</a:t>
+              <a:t>数据性质：P3内部运营口径（淘宝AI导购与千问电商场景），由业务方提供，未公开披露、无第三方交叉验证，仅作内部对照，不与第三方监测数据混排。斜纹柱为本报告派生指标（浏览量＝DAU×人均IPV；每轮产出＝人均IPV÷人均对话轮次）。三点可比性限制：①两侧入口曝光机制不同，DAU意图强度不一致；②淘宝侧用户可绕过AI链路直达商品，归因规则可能低估其IPV，低估倍数记为u（压力区间2~3）；③IPV为日度、轮次为会话内均值，两侧人均日会话数之比记为s（上限2）。联合反转边界（不可省略）：检验「差距落在交互层」须用「每轮对话产出之比」而非人均IPV之比——②③以乘积形式进入，该比值＝4.22÷(u×s)：u×s＝2时为2.11倍、＝3时为1.41倍，仍高于留存层的1.10~1.20倍；达到约3.5及以上时降至留存层以下、方向反转。同一乘积还决定改造路径排序且阈值更低：≈1.96起「优先提高每轮产出」的增益优势消失，≈2.75起按单位推理成本计应改为优先增加对话轮次。三道阈值构成同一量上的嵌套判据。</a:t>
             </a:r>
           </a:p>
         </p:txBody>
@@ -5457,7 +5457,7 @@
                 <a:latin typeface="Microsoft YaHei"/>
                 <a:ea typeface="Microsoft YaHei"/>
               </a:rPr>
-              <a:t>内部口径实测与派生指标：淘宝侧DAU为千问侧的11.63倍，有效商品浏览量仅为1.28倍</a:t>
+              <a:t>内部口径实测与派生指标：差距落在交互层，每轮对话产出相差≈4.22倍</a:t>
             </a:r>
           </a:p>
         </p:txBody>
@@ -5727,7 +5727,7 @@
                           <a:latin typeface="Microsoft YaHei"/>
                           <a:ea typeface="Microsoft YaHei"/>
                         </a:rPr>
-                        <a:t>0.09×（淘宝为千问11.63倍）</a:t>
+                        <a:t>0.09×（淘宝为千问11.63倍；对应有效浏览量仅1.28倍）</a:t>
                       </a:r>
                     </a:p>
                   </a:txBody>
@@ -6476,7 +6476,7 @@
         <p:spPr>
           <a:xfrm>
             <a:off x="685800" y="5120640"/>
-            <a:ext cx="10881360" cy="497204"/>
+            <a:ext cx="10881360" cy="662940"/>
           </a:xfrm>
           <a:prstGeom prst="rect">
             <a:avLst/>
@@ -6502,7 +6502,7 @@
                 <a:latin typeface="Microsoft YaHei"/>
                 <a:ea typeface="Microsoft YaHei"/>
               </a:rPr>
-              <a:t>读法：DAU与人均IPV的两组倍数方向相反、量级相近，几近相互抵消，乘积为0.78×（二者不是倒数关系，0.09的倒数为11.11）；真正提供额外信息的是「每轮对话产出」。口径校正：原始表述为「7日留存」，但单日留存单调不增、不可能高于次日留存，故判定为7日回访率。精度提示：千问IPV为整数1.00，倍数一律按「约9倍量级」引用。可比性限制：①两侧入口曝光机制不同，DAU意图强度不一致；②淘宝侧用户可绕过AI链路直达商品，归因规则可能低估其IPV（即便低估2~3倍，深度差距仍为约3~4.5倍）；③IPV为日度、轮次为会话内均值，相除为近似量级。</a:t>
+              <a:t>读法：DAU与人均IPV的两组倍数方向相反、量级相近，几近相互抵消，乘积为0.78×（二者不是倒数关系，0.09的倒数为11.11）；真正提供额外信息的是「每轮对话产出」。口径校正：原始表述为「7日留存」，但单日留存单调不增、不可能高于次日留存，故判定为7日回访率。精度提示：千问IPV为整数1.00，倍数一律按「约9倍量级」引用。可比性限制：①两侧入口曝光机制不同，DAU意图强度不一致；②淘宝侧用户可绕过AI链路直达商品，归因规则可能低估其IPV，低估倍数记为u（压力区间2~3）；③IPV为日度、轮次为会话内均值，两侧人均日会话数之比记为s（上限2）。检验「差距落在交互层」须用每轮对话产出之比＝4.22÷(u×s)：u×s＝2时2.11倍、＝3时1.41倍，仍高于留存层的1.10~1.20倍；达到约3.5及以上时方向反转。</a:t>
             </a:r>
           </a:p>
         </p:txBody>
@@ -14021,7 +14021,7 @@
                 <a:latin typeface="Microsoft YaHei"/>
                 <a:ea typeface="Microsoft YaHei"/>
               </a:rPr>
-              <a:t>图9面板①只有Rufus一根柱。Salesforce企业分组与Adobe／Shopify渠道数据分属另两种对照构造；亚马逊另披露的「增量年化销售近120亿美元」为绝对额且归因方法未完整披露，不可跨案例比较，也不能替代相对效果证据。建立随机对照实验能力不是可选项——它是当前最可靠、且可自主取得的识别途径；准实验识别可作退路但需额外假设</a:t>
+              <a:t>图9面板①只有Rufus一根柱。Salesforce企业分组与Adobe／Shopify渠道数据分属另两种对照构造；亚马逊另披露的「增量年化销售近120亿美元」为绝对额且归因方法未完整披露，不可跨案例比较，也不能替代相对效果证据。建立随机对照实验能力不是可选项——它是当前最可靠的识别途径；准实验识别可作退路但需额外的平行趋势假设</a:t>
             </a:r>
           </a:p>
         </p:txBody>
@@ -17420,7 +17420,7 @@
                 <a:latin typeface="Microsoft YaHei"/>
                 <a:ea typeface="Microsoft YaHei"/>
               </a:rPr>
-              <a:t>● 站内AI导购在「个体层相对效果」构造上只有一个公开数据点（Rufus +60%，观察性对比）；「增量年化销售」为绝对额且归因方法未完整披露，不可替代——自建随机对照实验是当前最可靠且可自主取得的识别途径（§2.4四、图9）</a:t>
+              <a:t>● 站内AI导购在「个体层相对效果」构造上只有一个公开数据点（Rufus +60%，观察性对比）；「增量年化销售」为绝对额且归因方法未完整披露，不可替代——自建随机对照实验是当前最可靠的识别途径（§2.4四、图9）</a:t>
             </a:r>
           </a:p>
           <a:p>
@@ -18097,7 +18097,7 @@
                     <a:lstStyle/>
                     <a:p>
                       <a:r>
-                        <a:rPr sz="800" b="1">
+                        <a:rPr sz="750" b="1">
                           <a:solidFill>
                             <a:srgbClr val="FFFFFF"/>
                           </a:solidFill>
@@ -18120,7 +18120,7 @@
                     <a:lstStyle/>
                     <a:p>
                       <a:r>
-                        <a:rPr sz="800" b="1">
+                        <a:rPr sz="750" b="1">
                           <a:solidFill>
                             <a:srgbClr val="FFFFFF"/>
                           </a:solidFill>
@@ -18143,7 +18143,7 @@
                     <a:lstStyle/>
                     <a:p>
                       <a:r>
-                        <a:rPr sz="800" b="1">
+                        <a:rPr sz="750" b="1">
                           <a:solidFill>
                             <a:srgbClr val="FFFFFF"/>
                           </a:solidFill>
@@ -18168,7 +18168,7 @@
                     <a:lstStyle/>
                     <a:p>
                       <a:r>
-                        <a:rPr sz="800" b="0">
+                        <a:rPr sz="750" b="0">
                           <a:solidFill>
                             <a:srgbClr val="1F2937"/>
                           </a:solidFill>
@@ -18191,7 +18191,7 @@
                     <a:lstStyle/>
                     <a:p>
                       <a:r>
-                        <a:rPr sz="800" b="0">
+                        <a:rPr sz="750" b="0">
                           <a:solidFill>
                             <a:srgbClr val="1F2937"/>
                           </a:solidFill>
@@ -18214,7 +18214,7 @@
                     <a:lstStyle/>
                     <a:p>
                       <a:r>
-                        <a:rPr sz="800" b="0">
+                        <a:rPr sz="750" b="0">
                           <a:solidFill>
                             <a:srgbClr val="1F2937"/>
                           </a:solidFill>
@@ -18239,7 +18239,7 @@
                     <a:lstStyle/>
                     <a:p>
                       <a:r>
-                        <a:rPr sz="800" b="0">
+                        <a:rPr sz="750" b="0">
                           <a:solidFill>
                             <a:srgbClr val="1F2937"/>
                           </a:solidFill>
@@ -18262,7 +18262,7 @@
                     <a:lstStyle/>
                     <a:p>
                       <a:r>
-                        <a:rPr sz="800" b="0">
+                        <a:rPr sz="750" b="0">
                           <a:solidFill>
                             <a:srgbClr val="1F2937"/>
                           </a:solidFill>
@@ -18285,7 +18285,7 @@
                     <a:lstStyle/>
                     <a:p>
                       <a:r>
-                        <a:rPr sz="800" b="0">
+                        <a:rPr sz="750" b="0">
                           <a:solidFill>
                             <a:srgbClr val="1F2937"/>
                           </a:solidFill>
@@ -18310,7 +18310,7 @@
                     <a:lstStyle/>
                     <a:p>
                       <a:r>
-                        <a:rPr sz="800" b="0">
+                        <a:rPr sz="750" b="0">
                           <a:solidFill>
                             <a:srgbClr val="1F2937"/>
                           </a:solidFill>
@@ -18333,14 +18333,14 @@
                     <a:lstStyle/>
                     <a:p>
                       <a:r>
-                        <a:rPr sz="800" b="0">
-                          <a:solidFill>
-                            <a:srgbClr val="1F2937"/>
-                          </a:solidFill>
-                          <a:latin typeface="Microsoft YaHei"/>
-                          <a:ea typeface="Microsoft YaHei"/>
-                        </a:rPr>
-                        <a:t>会话内进入商品详情页的用户占比，基线约10%</a:t>
+                        <a:rPr sz="750" b="0">
+                          <a:solidFill>
+                            <a:srgbClr val="1F2937"/>
+                          </a:solidFill>
+                          <a:latin typeface="Microsoft YaHei"/>
+                          <a:ea typeface="Microsoft YaHei"/>
+                        </a:rPr>
+                        <a:t>14日观测窗口内至少有一次会话进入商品详情页的用户占比（与随机化单元一致）</a:t>
                       </a:r>
                     </a:p>
                   </a:txBody>
@@ -18356,14 +18356,14 @@
                     <a:lstStyle/>
                     <a:p>
                       <a:r>
-                        <a:rPr sz="800" b="0">
-                          <a:solidFill>
-                            <a:srgbClr val="1F2937"/>
-                          </a:solidFill>
-                          <a:latin typeface="Microsoft YaHei"/>
-                          <a:ea typeface="Microsoft YaHei"/>
-                        </a:rPr>
-                        <a:t>以人均IPV 0.11次／人·日近似推得</a:t>
+                        <a:rPr sz="750" b="0">
+                          <a:solidFill>
+                            <a:srgbClr val="1F2937"/>
+                          </a:solidFill>
+                          <a:latin typeface="Microsoft YaHei"/>
+                          <a:ea typeface="Microsoft YaHei"/>
+                        </a:rPr>
+                        <a:t>基线待实测，预估15%~20%——不可用「0.11次／人·日」的日度发生率10.4%充当窗口发生率，二者不同期</a:t>
                       </a:r>
                     </a:p>
                   </a:txBody>
@@ -18381,7 +18381,7 @@
                     <a:lstStyle/>
                     <a:p>
                       <a:r>
-                        <a:rPr sz="800" b="0">
+                        <a:rPr sz="750" b="0">
                           <a:solidFill>
                             <a:srgbClr val="1F2937"/>
                           </a:solidFill>
@@ -18404,14 +18404,14 @@
                     <a:lstStyle/>
                     <a:p>
                       <a:r>
-                        <a:rPr sz="800" b="0">
-                          <a:solidFill>
-                            <a:srgbClr val="1F2937"/>
-                          </a:solidFill>
-                          <a:latin typeface="Microsoft YaHei"/>
-                          <a:ea typeface="Microsoft YaHei"/>
-                        </a:rPr>
-                        <a:t>相对提升20%（10%→12%）；α＝0.05双侧，检验力80%</a:t>
+                        <a:rPr sz="750" b="0">
+                          <a:solidFill>
+                            <a:srgbClr val="1F2937"/>
+                          </a:solidFill>
+                          <a:latin typeface="Microsoft YaHei"/>
+                          <a:ea typeface="Microsoft YaHei"/>
+                        </a:rPr>
+                        <a:t>相对提升20%；α＝0.05双侧，检验力80%</a:t>
                       </a:r>
                     </a:p>
                   </a:txBody>
@@ -18427,7 +18427,7 @@
                     <a:lstStyle/>
                     <a:p>
                       <a:r>
-                        <a:rPr sz="800" b="0">
+                        <a:rPr sz="750" b="0">
                           <a:solidFill>
                             <a:srgbClr val="1F2937"/>
                           </a:solidFill>
@@ -18452,7 +18452,7 @@
                     <a:lstStyle/>
                     <a:p>
                       <a:r>
-                        <a:rPr sz="800" b="0">
+                        <a:rPr sz="750" b="0">
                           <a:solidFill>
                             <a:srgbClr val="1F2937"/>
                           </a:solidFill>
@@ -18475,14 +18475,14 @@
                     <a:lstStyle/>
                     <a:p>
                       <a:r>
-                        <a:rPr sz="800" b="0">
-                          <a:solidFill>
-                            <a:srgbClr val="1F2937"/>
-                          </a:solidFill>
-                          <a:latin typeface="Microsoft YaHei"/>
-                          <a:ea typeface="Microsoft YaHei"/>
-                        </a:rPr>
-                        <a:t>约3840人</a:t>
+                        <a:rPr sz="750" b="0">
+                          <a:solidFill>
+                            <a:srgbClr val="1F2937"/>
+                          </a:solidFill>
+                          <a:latin typeface="Microsoft YaHei"/>
+                          <a:ea typeface="Microsoft YaHei"/>
+                        </a:rPr>
+                        <a:t>约1680~2400人（对应基线20%与15%）</a:t>
                       </a:r>
                     </a:p>
                   </a:txBody>
@@ -18498,14 +18498,14 @@
                     <a:lstStyle/>
                     <a:p>
                       <a:r>
-                        <a:rPr sz="800" b="0">
-                          <a:solidFill>
-                            <a:srgbClr val="1F2937"/>
-                          </a:solidFill>
-                          <a:latin typeface="Microsoft YaHei"/>
-                          <a:ea typeface="Microsoft YaHei"/>
-                        </a:rPr>
-                        <a:t>n ≈ 2(z₀.₉₇₅+z₀.₈)²·p̄(1−p̄)/δ² ＝ 2×7.85×0.11×0.89÷0.02²</a:t>
+                        <a:rPr sz="750" b="0">
+                          <a:solidFill>
+                            <a:srgbClr val="1F2937"/>
+                          </a:solidFill>
+                          <a:latin typeface="Microsoft YaHei"/>
+                          <a:ea typeface="Microsoft YaHei"/>
+                        </a:rPr>
+                        <a:t>n ≈ 2(z₀.₉₇₅+z₀.₈)²·p̄(1−p̄)/δ²，全表统一用合并率p̄：基线15%→2403人，基线20%→1684人</a:t>
                       </a:r>
                     </a:p>
                   </a:txBody>
@@ -18523,7 +18523,7 @@
                     <a:lstStyle/>
                     <a:p>
                       <a:r>
-                        <a:rPr sz="800" b="0">
+                        <a:rPr sz="750" b="0">
                           <a:solidFill>
                             <a:srgbClr val="1F2937"/>
                           </a:solidFill>
@@ -18546,7 +18546,7 @@
                     <a:lstStyle/>
                     <a:p>
                       <a:r>
-                        <a:rPr sz="800" b="0">
+                        <a:rPr sz="750" b="0">
                           <a:solidFill>
                             <a:srgbClr val="1F2937"/>
                           </a:solidFill>
@@ -18569,7 +18569,7 @@
                     <a:lstStyle/>
                     <a:p>
                       <a:r>
-                        <a:rPr sz="800" b="0">
+                        <a:rPr sz="750" b="0">
                           <a:solidFill>
                             <a:srgbClr val="1F2937"/>
                           </a:solidFill>
@@ -18594,7 +18594,7 @@
                     <a:lstStyle/>
                     <a:p>
                       <a:r>
-                        <a:rPr sz="800" b="0">
+                        <a:rPr sz="750" b="0">
                           <a:solidFill>
                             <a:srgbClr val="1F2937"/>
                           </a:solidFill>
@@ -18617,7 +18617,7 @@
                     <a:lstStyle/>
                     <a:p>
                       <a:r>
-                        <a:rPr sz="800" b="0">
+                        <a:rPr sz="750" b="0">
                           <a:solidFill>
                             <a:srgbClr val="1F2937"/>
                           </a:solidFill>
@@ -18640,7 +18640,7 @@
                     <a:lstStyle/>
                     <a:p>
                       <a:r>
-                        <a:rPr sz="800" b="0">
+                        <a:rPr sz="750" b="0">
                           <a:solidFill>
                             <a:srgbClr val="1F2937"/>
                           </a:solidFill>
@@ -18665,7 +18665,7 @@
                     <a:lstStyle/>
                     <a:p>
                       <a:r>
-                        <a:rPr sz="800" b="0">
+                        <a:rPr sz="750" b="0">
                           <a:solidFill>
                             <a:srgbClr val="1F2937"/>
                           </a:solidFill>
@@ -18688,14 +18688,14 @@
                     <a:lstStyle/>
                     <a:p>
                       <a:r>
-                        <a:rPr sz="800" b="0">
-                          <a:solidFill>
-                            <a:srgbClr val="1F2937"/>
-                          </a:solidFill>
-                          <a:latin typeface="Microsoft YaHei"/>
-                          <a:ea typeface="Microsoft YaHei"/>
-                        </a:rPr>
-                        <a:t>1%分流（每组约2.5万人／日）</a:t>
+                        <a:rPr sz="750" b="0">
+                          <a:solidFill>
+                            <a:srgbClr val="1F2937"/>
+                          </a:solidFill>
+                          <a:latin typeface="Microsoft YaHei"/>
+                          <a:ea typeface="Microsoft YaHei"/>
+                        </a:rPr>
+                        <a:t>1%分流（每组约2.5万人／日新增；14日窗口的去重量按实测活跃结构确定）</a:t>
                       </a:r>
                     </a:p>
                   </a:txBody>
@@ -18711,14 +18711,14 @@
                     <a:lstStyle/>
                     <a:p>
                       <a:r>
-                        <a:rPr sz="800" b="0">
-                          <a:solidFill>
-                            <a:srgbClr val="1F2937"/>
-                          </a:solidFill>
-                          <a:latin typeface="Microsoft YaHei"/>
-                          <a:ea typeface="Microsoft YaHei"/>
-                        </a:rPr>
-                        <a:t>主指标1不足一日即达样本量</a:t>
+                        <a:rPr sz="750" b="0">
+                          <a:solidFill>
+                            <a:srgbClr val="1F2937"/>
+                          </a:solidFill>
+                          <a:latin typeface="Microsoft YaHei"/>
+                          <a:ea typeface="Microsoft YaHei"/>
+                        </a:rPr>
+                        <a:t>主指标1所需样本一日内即可积累；真正的约束是观测窗口</a:t>
                       </a:r>
                     </a:p>
                   </a:txBody>
@@ -18736,7 +18736,7 @@
                     <a:lstStyle/>
                     <a:p>
                       <a:r>
-                        <a:rPr sz="800" b="0">
+                        <a:rPr sz="750" b="0">
                           <a:solidFill>
                             <a:srgbClr val="1F2937"/>
                           </a:solidFill>
@@ -18759,7 +18759,7 @@
                     <a:lstStyle/>
                     <a:p>
                       <a:r>
-                        <a:rPr sz="800" b="0">
+                        <a:rPr sz="750" b="0">
                           <a:solidFill>
                             <a:srgbClr val="1F2937"/>
                           </a:solidFill>
@@ -18782,7 +18782,7 @@
                     <a:lstStyle/>
                     <a:p>
                       <a:r>
-                        <a:rPr sz="800" b="0">
+                        <a:rPr sz="750" b="0">
                           <a:solidFill>
                             <a:srgbClr val="1F2937"/>
                           </a:solidFill>
@@ -18807,7 +18807,7 @@
                     <a:lstStyle/>
                     <a:p>
                       <a:r>
-                        <a:rPr sz="800" b="0">
+                        <a:rPr sz="750" b="0">
                           <a:solidFill>
                             <a:srgbClr val="1F2937"/>
                           </a:solidFill>
@@ -18830,14 +18830,14 @@
                     <a:lstStyle/>
                     <a:p>
                       <a:r>
-                        <a:rPr sz="800" b="0">
-                          <a:solidFill>
-                            <a:srgbClr val="1F2937"/>
-                          </a:solidFill>
-                          <a:latin typeface="Microsoft YaHei"/>
-                          <a:ea typeface="Microsoft YaHei"/>
-                        </a:rPr>
-                        <a:t>客诉率相对提升的95%CI上界 ≤ +10%</a:t>
+                        <a:rPr sz="750" b="0">
+                          <a:solidFill>
+                            <a:srgbClr val="1F2937"/>
+                          </a:solidFill>
+                          <a:latin typeface="Microsoft YaHei"/>
+                          <a:ea typeface="Microsoft YaHei"/>
+                        </a:rPr>
+                        <a:t>客诉率相对提升的95%CI上界 ≤ +10%；分母为14日窗口内的去重用户数</a:t>
                       </a:r>
                     </a:p>
                   </a:txBody>
@@ -18853,7 +18853,7 @@
                     <a:lstStyle/>
                     <a:p>
                       <a:r>
-                        <a:rPr sz="800" b="0">
+                        <a:rPr sz="750" b="0">
                           <a:solidFill>
                             <a:srgbClr val="1F2937"/>
                           </a:solidFill>
@@ -18878,7 +18878,7 @@
                     <a:lstStyle/>
                     <a:p>
                       <a:r>
-                        <a:rPr sz="800" b="0">
+                        <a:rPr sz="750" b="0">
                           <a:solidFill>
                             <a:srgbClr val="1F2937"/>
                           </a:solidFill>
@@ -18901,7 +18901,7 @@
                     <a:lstStyle/>
                     <a:p>
                       <a:r>
-                        <a:rPr sz="800" b="0">
+                        <a:rPr sz="750" b="0">
                           <a:solidFill>
                             <a:srgbClr val="1F2937"/>
                           </a:solidFill>
@@ -18924,7 +18924,7 @@
                     <a:lstStyle/>
                     <a:p>
                       <a:r>
-                        <a:rPr sz="800" b="0">
+                        <a:rPr sz="750" b="0">
                           <a:solidFill>
                             <a:srgbClr val="1F2937"/>
                           </a:solidFill>
@@ -18949,7 +18949,7 @@
                     <a:lstStyle/>
                     <a:p>
                       <a:r>
-                        <a:rPr sz="800" b="0">
+                        <a:rPr sz="750" b="0">
                           <a:solidFill>
                             <a:srgbClr val="1F2937"/>
                           </a:solidFill>
@@ -18972,7 +18972,7 @@
                     <a:lstStyle/>
                     <a:p>
                       <a:r>
-                        <a:rPr sz="800" b="0">
+                        <a:rPr sz="750" b="0">
                           <a:solidFill>
                             <a:srgbClr val="1F2937"/>
                           </a:solidFill>
@@ -18995,7 +18995,7 @@
                     <a:lstStyle/>
                     <a:p>
                       <a:r>
-                        <a:rPr sz="800" b="0">
+                        <a:rPr sz="750" b="0">
                           <a:solidFill>
                             <a:srgbClr val="1F2937"/>
                           </a:solidFill>
@@ -19020,7 +19020,7 @@
                     <a:lstStyle/>
                     <a:p>
                       <a:r>
-                        <a:rPr sz="800" b="0">
+                        <a:rPr sz="750" b="0">
                           <a:solidFill>
                             <a:srgbClr val="1F2937"/>
                           </a:solidFill>
@@ -19043,7 +19043,7 @@
                     <a:lstStyle/>
                     <a:p>
                       <a:r>
-                        <a:rPr sz="800" b="0">
+                        <a:rPr sz="750" b="0">
                           <a:solidFill>
                             <a:srgbClr val="1F2937"/>
                           </a:solidFill>
@@ -19066,7 +19066,7 @@
                     <a:lstStyle/>
                     <a:p>
                       <a:r>
-                        <a:rPr sz="800" b="0">
+                        <a:rPr sz="750" b="0">
                           <a:solidFill>
                             <a:srgbClr val="1F2937"/>
                           </a:solidFill>
@@ -19091,7 +19091,7 @@
                     <a:lstStyle/>
                     <a:p>
                       <a:r>
-                        <a:rPr sz="800" b="0">
+                        <a:rPr sz="750" b="0">
                           <a:solidFill>
                             <a:srgbClr val="1F2937"/>
                           </a:solidFill>
@@ -19114,14 +19114,14 @@
                     <a:lstStyle/>
                     <a:p>
                       <a:r>
-                        <a:rPr sz="800" b="0">
-                          <a:solidFill>
-                            <a:srgbClr val="1F2937"/>
-                          </a:solidFill>
-                          <a:latin typeface="Microsoft YaHei"/>
-                          <a:ea typeface="Microsoft YaHei"/>
-                        </a:rPr>
-                        <a:t>客诉率基线需业务方提供；若基线率低于0.5%，1%分流×14日的样本量不足以对+10%边界定功，此时护栏应改为「绝对增量不超过X件/日」的运营阈值</a:t>
+                        <a:rPr sz="750" b="0">
+                          <a:solidFill>
+                            <a:srgbClr val="1F2937"/>
+                          </a:solidFill>
+                          <a:latin typeface="Microsoft YaHei"/>
+                          <a:ea typeface="Microsoft YaHei"/>
+                        </a:rPr>
+                        <a:t>按合并方差：基线0.5%时检出+10%相对提升需约32.8万人／组。每组实际去重量须实测——14日去重活跃用户显著大于DAU 500万，故1%分流下每组远大于单日2.5万人</a:t>
                       </a:r>
                     </a:p>
                   </a:txBody>
@@ -19137,14 +19137,14 @@
                     <a:lstStyle/>
                     <a:p>
                       <a:r>
-                        <a:rPr sz="800" b="0">
-                          <a:solidFill>
-                            <a:srgbClr val="1F2937"/>
-                          </a:solidFill>
-                          <a:latin typeface="Microsoft YaHei"/>
-                          <a:ea typeface="Microsoft YaHei"/>
-                        </a:rPr>
-                        <a:t>低频事件的非劣性检验需更大样本，须先确认基线率</a:t>
+                        <a:rPr sz="750" b="0">
+                          <a:solidFill>
+                            <a:srgbClr val="1F2937"/>
+                          </a:solidFill>
+                          <a:latin typeface="Microsoft YaHei"/>
+                          <a:ea typeface="Microsoft YaHei"/>
+                        </a:rPr>
+                        <a:t>本报告不预设护栏无法定功；若实测不足则改用「绝对增量不超过X件／日」并记录该切换</a:t>
                       </a:r>
                     </a:p>
                   </a:txBody>
@@ -19416,7 +19416,7 @@
                 <a:latin typeface="Microsoft YaHei"/>
                 <a:ea typeface="Microsoft YaHei"/>
               </a:rPr>
-              <a:t>● 三、交易环节不外让　可观测指标：合作协议中MoR归属条款的覆盖率（目标100%）</a:t>
+              <a:t>● 三、守住MoR与用户关系，结账界面位置不作为准入条件　可观测指标：合作协议中MoR归属条款覆盖率（目标100%）</a:t>
             </a:r>
           </a:p>
           <a:p>
@@ -19433,7 +19433,7 @@
                 <a:latin typeface="Microsoft YaHei"/>
                 <a:ea typeface="Microsoft YaHei"/>
               </a:rPr>
-              <a:t>与外部通用AI入口合作采用「AI发现＋自有结账」，保持Merchant of Record身份与会员、售后归属。证据涉及四个主体、三类性质：OpenAI（Instant Checkout下线并改为零售商应用｜产品决策）、Google（UCP保留商家MoR｜协议设计）、Shopify（Agentic Storefronts把结账留在商家店铺｜协议设计）、加州北区联邦法院（Amazon诉Perplexity初步禁令｜司法判定）</a:t>
+              <a:t>准入条件是MoR与会员、售后、退换的归属留在自有体系，而非结账界面必须在自有站点——按模式框架，M1退场与M2扩张的差别正在MoR归属而非界面位置，故M2与M3a都可接受、M1不可接受。证据涉及四个主体、三类性质：OpenAI（Instant Checkout下线并改为零售商应用｜产品决策）、Google（UCP保留商家MoR｜协议设计）、Shopify（Agentic Storefronts把结账留在商家店铺｜协议设计）、加州北区联邦法院（Amazon诉Perplexity初步禁令｜司法判定）</a:t>
             </a:r>
           </a:p>
           <a:p>
@@ -20148,7 +20148,7 @@
                           <a:latin typeface="Microsoft YaHei"/>
                           <a:ea typeface="Microsoft YaHei"/>
                         </a:rPr>
-                        <a:t>交易环节不外让</a:t>
+                        <a:t>守住MoR与用户关系（结账界面位置不作准入条件）</a:t>
                       </a:r>
                     </a:p>
                   </a:txBody>
@@ -20171,7 +20171,7 @@
                           <a:latin typeface="Microsoft YaHei"/>
                           <a:ea typeface="Microsoft YaHei"/>
                         </a:rPr>
-                        <a:t>与外部通用AI入口合作采用「AI发现＋自有结账」；保持Merchant of Record身份与会员、售后归属</a:t>
+                        <a:t>准入条件是MoR与会员、售后归属留在自有体系；M2与M3a均可接受，M1（MoR归AI平台）不可接受</a:t>
                       </a:r>
                     </a:p>
                   </a:txBody>
@@ -21665,7 +21665,7 @@
                           <a:latin typeface="Microsoft YaHei"/>
                           <a:ea typeface="Microsoft YaHei"/>
                         </a:rPr>
-                        <a:t>站内AI导购运营指标</a:t>
+                        <a:t>差距落在交互层：每轮对话产出0.085对0.357次</a:t>
                       </a:r>
                     </a:p>
                   </a:txBody>
@@ -21711,7 +21711,7 @@
                           <a:latin typeface="Microsoft YaHei"/>
                           <a:ea typeface="Microsoft YaHei"/>
                         </a:rPr>
-                        <a:t>未公开、无交叉验证；7日回访率为口径校正后表述；含精度提示与三点可比性限制</a:t>
+                        <a:t>未公开、无交叉验证；7日回访率为口径校正后表述；成立边界 u×s＜3.5（联合敏感度见报告§1.6）；含精度提示与三点可比性限制</a:t>
                       </a:r>
                     </a:p>
                   </a:txBody>
@@ -23140,7 +23140,7 @@
                           <a:latin typeface="Microsoft YaHei"/>
                           <a:ea typeface="Microsoft YaHei"/>
                         </a:rPr>
-                        <a:t>列为P3，仅内部对照；列出三点可比性限制与低估2至3倍的敏感度</a:t>
+                        <a:t>列为P3，仅内部对照；列出三点可比性限制，并以每轮对话产出之比给出联合敏感度（4.22÷(u×s)）与反转边界</a:t>
                       </a:r>
                     </a:p>
                   </a:txBody>
@@ -24172,7 +24172,7 @@
                 <a:latin typeface="Microsoft YaHei"/>
                 <a:ea typeface="Microsoft YaHei"/>
               </a:rPr>
-              <a:t>在本报告检索范围内（docs/05 所列来源，数据截至2026-07；未做穷尽性文献检索），以「使用者对未使用者」为对照的效果数据仅有Amazon Rufus的「购买完成率高约60%」（2025Q4财报电话会，观察性对比）。Salesforce企业分组与Adobe／Shopify渠道数据分属另两种对照构造；亚马逊另披露的「增量年化销售近120亿美元」为绝对额、归因方法未完整披露，不可替代相对效果证据。自建随机对照实验是当前最可靠、且可自主取得的识别途径（准实验识别可作退路，但需额外假设）</a:t>
+              <a:t>在本报告检索范围内（docs/05 所列来源，数据截至2026-07；未做穷尽性文献检索），以「使用者对未使用者」为对照的效果数据仅有Amazon Rufus的「购买完成率高约60%」（2025Q4财报电话会，观察性对比）。Salesforce企业分组与Adobe／Shopify渠道数据分属另两种对照构造；亚马逊另披露的「增量年化销售近120亿美元」为绝对额、归因方法未完整披露，不可替代相对效果证据。自建随机对照实验是当前最可靠的识别途径（准实验识别可作退路，但需额外的平行趋势假设）</a:t>
             </a:r>
           </a:p>
         </p:txBody>
